--- a/slides/CSC270-Lecture-26-Introduction-to-NoSQL-Databases.pptx
+++ b/slides/CSC270-Lecture-26-Introduction-to-NoSQL-Databases.pptx
@@ -7,16 +7,23 @@
   <p:sldIdLst>
     <p:sldId id="256" r:id="rId2"/>
     <p:sldId id="257" r:id="rId3"/>
+    <p:sldId id="269" r:id="rId20"/>
     <p:sldId id="258" r:id="rId4"/>
     <p:sldId id="259" r:id="rId5"/>
+    <p:sldId id="270" r:id="rId21"/>
     <p:sldId id="260" r:id="rId6"/>
     <p:sldId id="261" r:id="rId7"/>
     <p:sldId id="262" r:id="rId8"/>
+    <p:sldId id="271" r:id="rId22"/>
     <p:sldId id="263" r:id="rId9"/>
     <p:sldId id="264" r:id="rId10"/>
+    <p:sldId id="272" r:id="rId23"/>
     <p:sldId id="265" r:id="rId11"/>
+    <p:sldId id="275" r:id="rId26"/>
     <p:sldId id="266" r:id="rId12"/>
+    <p:sldId id="273" r:id="rId24"/>
     <p:sldId id="267" r:id="rId13"/>
+    <p:sldId id="274" r:id="rId25"/>
     <p:sldId id="268" r:id="rId14"/>
   </p:sldIdLst>
   <p:notesMasterIdLst>
@@ -2044,7 +2051,7 @@
               </a:rPr>
               <a:t>CSC270 · DATABASE SYSTEMS · LECTURE 26</a:t>
             </a:r>
-            <a:endParaRPr lang="en-US" sz="1400" dirty="0"/>
+            <a:endParaRPr lang="en-US" sz="1800" dirty="0"/>
           </a:p>
         </p:txBody>
       </p:sp>
@@ -2083,7 +2090,7 @@
               </a:rPr>
               <a:t>Beyond the Relational Model</a:t>
             </a:r>
-            <a:endParaRPr lang="en-US" sz="1400" dirty="0"/>
+            <a:endParaRPr lang="en-US" sz="1800" dirty="0"/>
           </a:p>
         </p:txBody>
       </p:sp>
@@ -2151,7 +2158,7 @@
               <a:buNone/>
             </a:pPr>
             <a:r>
-              <a:rPr lang="en-US" sz="1600" dirty="0">
+              <a:rPr lang="en-US" sz="1800" dirty="0">
                 <a:solidFill>
                   <a:srgbClr val="8A939B"/>
                 </a:solidFill>
@@ -2161,7 +2168,7 @@
               </a:rPr>
               <a:t>CSC270 · Database Systems — COMSATS University Islamabad, Lahore Campus</a:t>
             </a:r>
-            <a:endParaRPr lang="en-US" sz="1600" dirty="0"/>
+            <a:endParaRPr lang="en-US" sz="1800" dirty="0"/>
           </a:p>
         </p:txBody>
       </p:sp>
@@ -2190,7 +2197,7 @@
               <a:buNone/>
             </a:pPr>
             <a:r>
-              <a:rPr lang="en-US" sz="1000" u="sng" dirty="0">
+              <a:rPr lang="en-US" sz="1200" u="sng" dirty="0">
                 <a:solidFill>
                   <a:srgbClr val="8A939B"/>
                 </a:solidFill>
@@ -2211,7 +2218,7 @@
               <a:buNone/>
             </a:pPr>
             <a:r>
-              <a:rPr lang="en-US" sz="1000" dirty="0">
+              <a:rPr lang="en-US" sz="1200" dirty="0">
                 <a:solidFill>
                   <a:srgbClr val="8A939B"/>
                 </a:solidFill>
@@ -2221,7 +2228,7 @@
               </a:rPr>
               <a:t>  ·  1</a:t>
             </a:r>
-            <a:endParaRPr lang="en-US" sz="1000" dirty="0"/>
+            <a:endParaRPr lang="en-US" sz="1200" dirty="0"/>
           </a:p>
         </p:txBody>
       </p:sp>
@@ -2360,7 +2367,7 @@
               <a:buNone/>
             </a:pPr>
             <a:r>
-              <a:rPr lang="en-US" sz="1000" u="sng" dirty="0">
+              <a:rPr lang="en-US" sz="1200" u="sng" dirty="0">
                 <a:solidFill>
                   <a:srgbClr val="8A939B"/>
                 </a:solidFill>
@@ -2381,7 +2388,7 @@
               <a:buNone/>
             </a:pPr>
             <a:r>
-              <a:rPr lang="en-US" sz="1000" dirty="0">
+              <a:rPr lang="en-US" sz="1200" dirty="0">
                 <a:solidFill>
                   <a:srgbClr val="8A939B"/>
                 </a:solidFill>
@@ -2389,9 +2396,9 @@
                 <a:ea typeface="Calibri" pitchFamily="34" charset="-122"/>
                 <a:cs typeface="Calibri" pitchFamily="34" charset="-120"/>
               </a:rPr>
-              <a:t>  ·  10</a:t>
-            </a:r>
-            <a:endParaRPr lang="en-US" sz="1000" dirty="0"/>
+              <a:t>  ·  14</a:t>
+            </a:r>
+            <a:endParaRPr lang="en-US" sz="1200" dirty="0"/>
           </a:p>
         </p:txBody>
       </p:sp>
@@ -2474,7 +2481,7 @@
               <a:buNone/>
             </a:pPr>
             <a:r>
-              <a:rPr lang="en-US" sz="1350" b="1" dirty="0">
+              <a:rPr lang="en-US" sz="1800" b="1" dirty="0">
                 <a:solidFill>
                   <a:srgbClr val="1F2429"/>
                 </a:solidFill>
@@ -2484,7 +2491,7 @@
               </a:rPr>
               <a:t>Content management</a:t>
             </a:r>
-            <a:endParaRPr lang="en-US" sz="1350" dirty="0"/>
+            <a:endParaRPr lang="en-US" sz="1800" dirty="0"/>
           </a:p>
         </p:txBody>
       </p:sp>
@@ -2516,7 +2523,7 @@
               <a:buNone/>
             </a:pPr>
             <a:r>
-              <a:rPr lang="en-US" sz="1050" dirty="0">
+              <a:rPr lang="en-US" sz="1200" dirty="0">
                 <a:solidFill>
                   <a:srgbClr val="6B7480"/>
                 </a:solidFill>
@@ -2526,7 +2533,7 @@
               </a:rPr>
               <a:t>Articles, product pages, profiles that naturally vary in shape (document stores).</a:t>
             </a:r>
-            <a:endParaRPr lang="en-US" sz="1050" dirty="0"/>
+            <a:endParaRPr lang="en-US" sz="1200" dirty="0"/>
           </a:p>
         </p:txBody>
       </p:sp>
@@ -2609,7 +2616,7 @@
               <a:buNone/>
             </a:pPr>
             <a:r>
-              <a:rPr lang="en-US" sz="1350" b="1" dirty="0">
+              <a:rPr lang="en-US" sz="1800" b="1" dirty="0">
                 <a:solidFill>
                   <a:srgbClr val="1F2429"/>
                 </a:solidFill>
@@ -2619,7 +2626,7 @@
               </a:rPr>
               <a:t>Real-time analytics</a:t>
             </a:r>
-            <a:endParaRPr lang="en-US" sz="1350" dirty="0"/>
+            <a:endParaRPr lang="en-US" sz="1800" dirty="0"/>
           </a:p>
         </p:txBody>
       </p:sp>
@@ -2651,7 +2658,7 @@
               <a:buNone/>
             </a:pPr>
             <a:r>
-              <a:rPr lang="en-US" sz="1050" dirty="0">
+              <a:rPr lang="en-US" sz="1200" dirty="0">
                 <a:solidFill>
                   <a:srgbClr val="6B7480"/>
                 </a:solidFill>
@@ -2661,7 +2668,7 @@
               </a:rPr>
               <a:t>High-velocity event and metrics data written far more often than updated (column-family).</a:t>
             </a:r>
-            <a:endParaRPr lang="en-US" sz="1050" dirty="0"/>
+            <a:endParaRPr lang="en-US" sz="1200" dirty="0"/>
           </a:p>
         </p:txBody>
       </p:sp>
@@ -2744,7 +2751,7 @@
               <a:buNone/>
             </a:pPr>
             <a:r>
-              <a:rPr lang="en-US" sz="1350" b="1" dirty="0">
+              <a:rPr lang="en-US" sz="1800" b="1" dirty="0">
                 <a:solidFill>
                   <a:srgbClr val="1F2429"/>
                 </a:solidFill>
@@ -2754,7 +2761,7 @@
               </a:rPr>
               <a:t>Product catalogs</a:t>
             </a:r>
-            <a:endParaRPr lang="en-US" sz="1350" dirty="0"/>
+            <a:endParaRPr lang="en-US" sz="1800" dirty="0"/>
           </a:p>
         </p:txBody>
       </p:sp>
@@ -2786,7 +2793,7 @@
               <a:buNone/>
             </a:pPr>
             <a:r>
-              <a:rPr lang="en-US" sz="1050" dirty="0">
+              <a:rPr lang="en-US" sz="1200" dirty="0">
                 <a:solidFill>
                   <a:srgbClr val="6B7480"/>
                 </a:solidFill>
@@ -2796,7 +2803,7 @@
               </a:rPr>
               <a:t>Items with wildly different attribute sets — a book vs. a laptop — forcing sparse relational tables otherwise.</a:t>
             </a:r>
-            <a:endParaRPr lang="en-US" sz="1050" dirty="0"/>
+            <a:endParaRPr lang="en-US" sz="1200" dirty="0"/>
           </a:p>
         </p:txBody>
       </p:sp>
@@ -2879,7 +2886,7 @@
               <a:buNone/>
             </a:pPr>
             <a:r>
-              <a:rPr lang="en-US" sz="1350" b="1" dirty="0">
+              <a:rPr lang="en-US" sz="1800" b="1" dirty="0">
                 <a:solidFill>
                   <a:srgbClr val="1F2429"/>
                 </a:solidFill>
@@ -2889,7 +2896,7 @@
               </a:rPr>
               <a:t>Social graphs</a:t>
             </a:r>
-            <a:endParaRPr lang="en-US" sz="1350" dirty="0"/>
+            <a:endParaRPr lang="en-US" sz="1800" dirty="0"/>
           </a:p>
         </p:txBody>
       </p:sp>
@@ -2921,7 +2928,7 @@
               <a:buNone/>
             </a:pPr>
             <a:r>
-              <a:rPr lang="en-US" sz="1050" dirty="0">
+              <a:rPr lang="en-US" sz="1200" dirty="0">
                 <a:solidFill>
                   <a:srgbClr val="6B7480"/>
                 </a:solidFill>
@@ -2931,7 +2938,7 @@
               </a:rPr>
               <a:t>Friend networks, recommendations, fraud detection built around “who's connected to whom” (graph).</a:t>
             </a:r>
-            <a:endParaRPr lang="en-US" sz="1050" dirty="0"/>
+            <a:endParaRPr lang="en-US" sz="1200" dirty="0"/>
           </a:p>
         </p:txBody>
       </p:sp>
@@ -3014,7 +3021,7 @@
               <a:buNone/>
             </a:pPr>
             <a:r>
-              <a:rPr lang="en-US" sz="1350" b="1" dirty="0">
+              <a:rPr lang="en-US" sz="1800" b="1" dirty="0">
                 <a:solidFill>
                   <a:srgbClr val="1F2429"/>
                 </a:solidFill>
@@ -3024,7 +3031,7 @@
               </a:rPr>
               <a:t>Session stores and caches</a:t>
             </a:r>
-            <a:endParaRPr lang="en-US" sz="1350" dirty="0"/>
+            <a:endParaRPr lang="en-US" sz="1800" dirty="0"/>
           </a:p>
         </p:txBody>
       </p:sp>
@@ -3056,7 +3063,7 @@
               <a:buNone/>
             </a:pPr>
             <a:r>
-              <a:rPr lang="en-US" sz="1050" dirty="0">
+              <a:rPr lang="en-US" sz="1200" dirty="0">
                 <a:solidFill>
                   <a:srgbClr val="6B7480"/>
                 </a:solidFill>
@@ -3066,7 +3073,7 @@
               </a:rPr>
               <a:t>Simple, extremely fast get/set operations against a key (key-value).</a:t>
             </a:r>
-            <a:endParaRPr lang="en-US" sz="1050" dirty="0"/>
+            <a:endParaRPr lang="en-US" sz="1200" dirty="0"/>
           </a:p>
         </p:txBody>
       </p:sp>
@@ -3205,7 +3212,7 @@
               <a:buNone/>
             </a:pPr>
             <a:r>
-              <a:rPr lang="en-US" sz="1000" u="sng" dirty="0">
+              <a:rPr lang="en-US" sz="1200" u="sng" dirty="0">
                 <a:solidFill>
                   <a:srgbClr val="8A939B"/>
                 </a:solidFill>
@@ -3226,7 +3233,7 @@
               <a:buNone/>
             </a:pPr>
             <a:r>
-              <a:rPr lang="en-US" sz="1000" dirty="0">
+              <a:rPr lang="en-US" sz="1200" dirty="0">
                 <a:solidFill>
                   <a:srgbClr val="8A939B"/>
                 </a:solidFill>
@@ -3234,9 +3241,9 @@
                 <a:ea typeface="Calibri" pitchFamily="34" charset="-122"/>
                 <a:cs typeface="Calibri" pitchFamily="34" charset="-120"/>
               </a:rPr>
-              <a:t>  ·  11</a:t>
-            </a:r>
-            <a:endParaRPr lang="en-US" sz="1000" dirty="0"/>
+              <a:t>  ·  16</a:t>
+            </a:r>
+            <a:endParaRPr lang="en-US" sz="1200" dirty="0"/>
           </a:p>
         </p:txBody>
       </p:sp>
@@ -3268,7 +3275,7 @@
               <a:buNone/>
             </a:pPr>
             <a:r>
-              <a:rPr lang="en-US" sz="1350" dirty="0">
+              <a:rPr lang="en-US" sz="1400" dirty="0">
                 <a:solidFill>
                   <a:srgbClr val="1F2429"/>
                 </a:solidFill>
@@ -3278,7 +3285,7 @@
               </a:rPr>
               <a:t>Once a database is distributed — data spread across more than one machine — it can only fully guarantee two of these three properties at once, whenever a network partition occurs:</a:t>
             </a:r>
-            <a:endParaRPr lang="en-US" sz="1350" dirty="0"/>
+            <a:endParaRPr lang="en-US" sz="1800" dirty="0"/>
           </a:p>
         </p:txBody>
       </p:sp>
@@ -3361,7 +3368,7 @@
               <a:buNone/>
             </a:pPr>
             <a:r>
-              <a:rPr lang="en-US" sz="1350" b="1" dirty="0">
+              <a:rPr lang="en-US" sz="1800" b="1" dirty="0">
                 <a:solidFill>
                   <a:srgbClr val="1F2429"/>
                 </a:solidFill>
@@ -3371,7 +3378,7 @@
               </a:rPr>
               <a:t>C — Consistency</a:t>
             </a:r>
-            <a:endParaRPr lang="en-US" sz="1350" dirty="0"/>
+            <a:endParaRPr lang="en-US" sz="1800" dirty="0"/>
           </a:p>
         </p:txBody>
       </p:sp>
@@ -3403,7 +3410,7 @@
               <a:buNone/>
             </a:pPr>
             <a:r>
-              <a:rPr lang="en-US" sz="1050" dirty="0">
+              <a:rPr lang="en-US" sz="1200" dirty="0">
                 <a:solidFill>
                   <a:srgbClr val="6B7480"/>
                 </a:solidFill>
@@ -3413,7 +3420,7 @@
               </a:rPr>
               <a:t>Every read sees the most recent write, everywhere</a:t>
             </a:r>
-            <a:endParaRPr lang="en-US" sz="1050" dirty="0"/>
+            <a:endParaRPr lang="en-US" sz="1200" dirty="0"/>
           </a:p>
         </p:txBody>
       </p:sp>
@@ -3520,7 +3527,7 @@
               <a:buNone/>
             </a:pPr>
             <a:r>
-              <a:rPr lang="en-US" sz="1350" b="1" dirty="0">
+              <a:rPr lang="en-US" sz="1800" b="1" dirty="0">
                 <a:solidFill>
                   <a:srgbClr val="1F2429"/>
                 </a:solidFill>
@@ -3530,7 +3537,7 @@
               </a:rPr>
               <a:t>A — Availability</a:t>
             </a:r>
-            <a:endParaRPr lang="en-US" sz="1350" dirty="0"/>
+            <a:endParaRPr lang="en-US" sz="1800" dirty="0"/>
           </a:p>
         </p:txBody>
       </p:sp>
@@ -3562,7 +3569,7 @@
               <a:buNone/>
             </a:pPr>
             <a:r>
-              <a:rPr lang="en-US" sz="1050" dirty="0">
+              <a:rPr lang="en-US" sz="1200" dirty="0">
                 <a:solidFill>
                   <a:srgbClr val="6B7480"/>
                 </a:solidFill>
@@ -3572,7 +3579,7 @@
               </a:rPr>
               <a:t>Every request gets a response, even if not the latest data</a:t>
             </a:r>
-            <a:endParaRPr lang="en-US" sz="1050" dirty="0"/>
+            <a:endParaRPr lang="en-US" sz="1200" dirty="0"/>
           </a:p>
         </p:txBody>
       </p:sp>
@@ -3679,7 +3686,7 @@
               <a:buNone/>
             </a:pPr>
             <a:r>
-              <a:rPr lang="en-US" sz="1350" b="1" dirty="0">
+              <a:rPr lang="en-US" sz="1800" b="1" dirty="0">
                 <a:solidFill>
                   <a:srgbClr val="1F2429"/>
                 </a:solidFill>
@@ -3689,7 +3696,7 @@
               </a:rPr>
               <a:t>P — Partition tolerance</a:t>
             </a:r>
-            <a:endParaRPr lang="en-US" sz="1350" dirty="0"/>
+            <a:endParaRPr lang="en-US" sz="1800" dirty="0"/>
           </a:p>
         </p:txBody>
       </p:sp>
@@ -3721,7 +3728,7 @@
               <a:buNone/>
             </a:pPr>
             <a:r>
-              <a:rPr lang="en-US" sz="1050" dirty="0">
+              <a:rPr lang="en-US" sz="1200" dirty="0">
                 <a:solidFill>
                   <a:srgbClr val="6B7480"/>
                 </a:solidFill>
@@ -3731,7 +3738,7 @@
               </a:rPr>
               <a:t>The system keeps working even if servers can't talk to each other</a:t>
             </a:r>
-            <a:endParaRPr lang="en-US" sz="1050" dirty="0"/>
+            <a:endParaRPr lang="en-US" sz="1200" dirty="0"/>
           </a:p>
         </p:txBody>
       </p:sp>
@@ -3814,7 +3821,7 @@
               <a:buNone/>
             </a:pPr>
             <a:r>
-              <a:rPr lang="en-US" sz="1050" b="1" spc="100" kern="0" dirty="0">
+              <a:rPr lang="en-US" sz="1200" b="1" spc="100" kern="0" dirty="0">
                 <a:solidFill>
                   <a:srgbClr val="2FE6C4"/>
                 </a:solidFill>
@@ -3824,7 +3831,7 @@
               </a:rPr>
               <a:t>NOT ALL-THE-TIME — ONLY DURING A PARTITION</a:t>
             </a:r>
-            <a:endParaRPr lang="en-US" sz="1050" dirty="0"/>
+            <a:endParaRPr lang="en-US" sz="1200" dirty="0"/>
           </a:p>
         </p:txBody>
       </p:sp>
@@ -4005,7 +4012,7 @@
               <a:buNone/>
             </a:pPr>
             <a:r>
-              <a:rPr lang="en-US" sz="1000" u="sng" dirty="0">
+              <a:rPr lang="en-US" sz="1200" u="sng" dirty="0">
                 <a:solidFill>
                   <a:srgbClr val="8A939B"/>
                 </a:solidFill>
@@ -4026,7 +4033,7 @@
               <a:buNone/>
             </a:pPr>
             <a:r>
-              <a:rPr lang="en-US" sz="1000" dirty="0">
+              <a:rPr lang="en-US" sz="1200" dirty="0">
                 <a:solidFill>
                   <a:srgbClr val="8A939B"/>
                 </a:solidFill>
@@ -4034,9 +4041,9 @@
                 <a:ea typeface="Calibri" pitchFamily="34" charset="-122"/>
                 <a:cs typeface="Calibri" pitchFamily="34" charset="-120"/>
               </a:rPr>
-              <a:t>  ·  12</a:t>
-            </a:r>
-            <a:endParaRPr lang="en-US" sz="1000" dirty="0"/>
+              <a:t>  ·  18</a:t>
+            </a:r>
+            <a:endParaRPr lang="en-US" sz="1200" dirty="0"/>
           </a:p>
         </p:txBody>
       </p:sp>
@@ -4107,7 +4114,7 @@
               <a:buNone/>
             </a:pPr>
             <a:r>
-              <a:rPr lang="en-US" sz="1150" b="1" spc="50" kern="0" dirty="0">
+              <a:rPr lang="en-US" sz="1200" b="1" spc="50" kern="0" dirty="0">
                 <a:solidFill>
                   <a:srgbClr val="2FE6C4"/>
                 </a:solidFill>
@@ -4117,7 +4124,7 @@
               </a:rPr>
               <a:t>CHOOSE CONSISTENCY (GIVE UP AVAILABILITY)</a:t>
             </a:r>
-            <a:endParaRPr lang="en-US" sz="1150" dirty="0"/>
+            <a:endParaRPr lang="en-US" sz="1200" dirty="0"/>
           </a:p>
         </p:txBody>
       </p:sp>
@@ -4200,7 +4207,7 @@
               <a:buNone/>
             </a:pPr>
             <a:r>
-              <a:rPr lang="en-US" sz="1400" b="1" dirty="0">
+              <a:rPr lang="en-US" sz="1800" b="1" dirty="0">
                 <a:solidFill>
                   <a:srgbClr val="1F2429"/>
                 </a:solidFill>
@@ -4210,7 +4217,7 @@
               </a:rPr>
               <a:t>Reject the write</a:t>
             </a:r>
-            <a:endParaRPr lang="en-US" sz="1400" dirty="0"/>
+            <a:endParaRPr lang="en-US" sz="1800" dirty="0"/>
           </a:p>
         </p:txBody>
       </p:sp>
@@ -4242,7 +4249,7 @@
               <a:buNone/>
             </a:pPr>
             <a:r>
-              <a:rPr lang="en-US" sz="1100" dirty="0">
+              <a:rPr lang="en-US" sz="1200" dirty="0">
                 <a:solidFill>
                   <a:srgbClr val="6B7480"/>
                 </a:solidFill>
@@ -4252,7 +4259,7 @@
               </a:rPr>
               <a:t>Karachi refuses new writes until it can confirm with Lahore again</a:t>
             </a:r>
-            <a:endParaRPr lang="en-US" sz="1100" dirty="0"/>
+            <a:endParaRPr lang="en-US" sz="1200" dirty="0"/>
           </a:p>
         </p:txBody>
       </p:sp>
@@ -4359,7 +4366,7 @@
               <a:buNone/>
             </a:pPr>
             <a:r>
-              <a:rPr lang="en-US" sz="1400" b="1" dirty="0">
+              <a:rPr lang="en-US" sz="1800" b="1" dirty="0">
                 <a:solidFill>
                   <a:srgbClr val="1F2429"/>
                 </a:solidFill>
@@ -4369,7 +4376,7 @@
               </a:rPr>
               <a:t>Result: CP system</a:t>
             </a:r>
-            <a:endParaRPr lang="en-US" sz="1400" dirty="0"/>
+            <a:endParaRPr lang="en-US" sz="1800" dirty="0"/>
           </a:p>
         </p:txBody>
       </p:sp>
@@ -4401,7 +4408,7 @@
               <a:buNone/>
             </a:pPr>
             <a:r>
-              <a:rPr lang="en-US" sz="1100" dirty="0">
+              <a:rPr lang="en-US" sz="1200" dirty="0">
                 <a:solidFill>
                   <a:srgbClr val="6B7480"/>
                 </a:solidFill>
@@ -4411,7 +4418,7 @@
               </a:rPr>
               <a:t>Never returns stale data, but some requests fail during the partition</a:t>
             </a:r>
-            <a:endParaRPr lang="en-US" sz="1100" dirty="0"/>
+            <a:endParaRPr lang="en-US" sz="1200" dirty="0"/>
           </a:p>
         </p:txBody>
       </p:sp>
@@ -4440,7 +4447,7 @@
               <a:buNone/>
             </a:pPr>
             <a:r>
-              <a:rPr lang="en-US" sz="1150" b="1" spc="50" kern="0" dirty="0">
+              <a:rPr lang="en-US" sz="1200" b="1" spc="50" kern="0" dirty="0">
                 <a:solidFill>
                   <a:srgbClr val="8B7FD9"/>
                 </a:solidFill>
@@ -4450,7 +4457,7 @@
               </a:rPr>
               <a:t>CHOOSE AVAILABILITY (GIVE UP CONSISTENCY)</a:t>
             </a:r>
-            <a:endParaRPr lang="en-US" sz="1150" dirty="0"/>
+            <a:endParaRPr lang="en-US" sz="1200" dirty="0"/>
           </a:p>
         </p:txBody>
       </p:sp>
@@ -4533,7 +4540,7 @@
               <a:buNone/>
             </a:pPr>
             <a:r>
-              <a:rPr lang="en-US" sz="1400" b="1" dirty="0">
+              <a:rPr lang="en-US" sz="1800" b="1" dirty="0">
                 <a:solidFill>
                   <a:srgbClr val="1F2429"/>
                 </a:solidFill>
@@ -4543,7 +4550,7 @@
               </a:rPr>
               <a:t>Accept the write locally</a:t>
             </a:r>
-            <a:endParaRPr lang="en-US" sz="1400" dirty="0"/>
+            <a:endParaRPr lang="en-US" sz="1800" dirty="0"/>
           </a:p>
         </p:txBody>
       </p:sp>
@@ -4575,7 +4582,7 @@
               <a:buNone/>
             </a:pPr>
             <a:r>
-              <a:rPr lang="en-US" sz="1100" dirty="0">
+              <a:rPr lang="en-US" sz="1200" dirty="0">
                 <a:solidFill>
                   <a:srgbClr val="6B7480"/>
                 </a:solidFill>
@@ -4585,7 +4592,7 @@
               </a:rPr>
               <a:t>Karachi keeps serving requests using only its own local data</a:t>
             </a:r>
-            <a:endParaRPr lang="en-US" sz="1100" dirty="0"/>
+            <a:endParaRPr lang="en-US" sz="1200" dirty="0"/>
           </a:p>
         </p:txBody>
       </p:sp>
@@ -4692,7 +4699,7 @@
               <a:buNone/>
             </a:pPr>
             <a:r>
-              <a:rPr lang="en-US" sz="1400" b="1" dirty="0">
+              <a:rPr lang="en-US" sz="1800" b="1" dirty="0">
                 <a:solidFill>
                   <a:srgbClr val="1F2429"/>
                 </a:solidFill>
@@ -4702,7 +4709,7 @@
               </a:rPr>
               <a:t>Result: AP system</a:t>
             </a:r>
-            <a:endParaRPr lang="en-US" sz="1400" dirty="0"/>
+            <a:endParaRPr lang="en-US" sz="1800" dirty="0"/>
           </a:p>
         </p:txBody>
       </p:sp>
@@ -4734,7 +4741,7 @@
               <a:buNone/>
             </a:pPr>
             <a:r>
-              <a:rPr lang="en-US" sz="1100" dirty="0">
+              <a:rPr lang="en-US" sz="1200" dirty="0">
                 <a:solidFill>
                   <a:srgbClr val="6B7480"/>
                 </a:solidFill>
@@ -4744,7 +4751,7 @@
               </a:rPr>
               <a:t>Always responds, but Lahore and Karachi may briefly disagree</a:t>
             </a:r>
-            <a:endParaRPr lang="en-US" sz="1100" dirty="0"/>
+            <a:endParaRPr lang="en-US" sz="1200" dirty="0"/>
           </a:p>
         </p:txBody>
       </p:sp>
@@ -4827,7 +4834,7 @@
               <a:buNone/>
             </a:pPr>
             <a:r>
-              <a:rPr lang="en-US" sz="1050" b="1" spc="100" kern="0" dirty="0">
+              <a:rPr lang="en-US" sz="1200" b="1" spc="100" kern="0" dirty="0">
                 <a:solidFill>
                   <a:srgbClr val="8B7FD9"/>
                 </a:solidFill>
@@ -4837,7 +4844,7 @@
               </a:rPr>
               <a:t>EVENTUAL CONSISTENCY, AND THE CA OUTLIER</a:t>
             </a:r>
-            <a:endParaRPr lang="en-US" sz="1050" dirty="0"/>
+            <a:endParaRPr lang="en-US" sz="1200" dirty="0"/>
           </a:p>
         </p:txBody>
       </p:sp>
@@ -5021,7 +5028,7 @@
               <a:buNone/>
             </a:pPr>
             <a:r>
-              <a:rPr lang="en-US" sz="1550" dirty="0">
+              <a:rPr lang="en-US" sz="1800" dirty="0">
                 <a:solidFill>
                   <a:srgbClr val="FFFFFF"/>
                 </a:solidFill>
@@ -5031,7 +5038,7 @@
               </a:rPr>
               <a:t>Relational databases hit real limits at web scale: vertical scaling's ceiling, expensive joins, rigid schemas.</a:t>
             </a:r>
-            <a:endParaRPr lang="en-US" sz="1550" dirty="0"/>
+            <a:endParaRPr lang="en-US" sz="1800" dirty="0"/>
           </a:p>
         </p:txBody>
       </p:sp>
@@ -5080,7 +5087,7 @@
               <a:buNone/>
             </a:pPr>
             <a:r>
-              <a:rPr lang="en-US" sz="1550" dirty="0">
+              <a:rPr lang="en-US" sz="1800" dirty="0">
                 <a:solidFill>
                   <a:srgbClr val="FFFFFF"/>
                 </a:solidFill>
@@ -5090,7 +5097,7 @@
               </a:rPr>
               <a:t>NoSQL trades strict schema and strong consistency for horizontal scalability and schema flexibility — a deliberate trade-off, not a strict upgrade.</a:t>
             </a:r>
-            <a:endParaRPr lang="en-US" sz="1550" dirty="0"/>
+            <a:endParaRPr lang="en-US" sz="1800" dirty="0"/>
           </a:p>
         </p:txBody>
       </p:sp>
@@ -5139,7 +5146,7 @@
               <a:buNone/>
             </a:pPr>
             <a:r>
-              <a:rPr lang="en-US" sz="1550" dirty="0">
+              <a:rPr lang="en-US" sz="1800" dirty="0">
                 <a:solidFill>
                   <a:srgbClr val="FFFFFF"/>
                 </a:solidFill>
@@ -5149,7 +5156,7 @@
               </a:rPr>
               <a:t>Four major families: document (MongoDB), key-value (DynamoDB, Redis), column-family (Cassandra), graph (Neo4j).</a:t>
             </a:r>
-            <a:endParaRPr lang="en-US" sz="1550" dirty="0"/>
+            <a:endParaRPr lang="en-US" sz="1800" dirty="0"/>
           </a:p>
         </p:txBody>
       </p:sp>
@@ -5198,7 +5205,7 @@
               <a:buNone/>
             </a:pPr>
             <a:r>
-              <a:rPr lang="en-US" sz="1550" dirty="0">
+              <a:rPr lang="en-US" sz="1800" dirty="0">
                 <a:solidFill>
                   <a:srgbClr val="FFFFFF"/>
                 </a:solidFill>
@@ -5208,7 +5215,7 @@
               </a:rPr>
               <a:t>CAP theorem: a distributed system guarantees only two of Consistency, Availability, Partition tolerance during an actual partition.</a:t>
             </a:r>
-            <a:endParaRPr lang="en-US" sz="1550" dirty="0"/>
+            <a:endParaRPr lang="en-US" sz="1800" dirty="0"/>
           </a:p>
         </p:txBody>
       </p:sp>
@@ -5257,7 +5264,7 @@
               <a:buNone/>
             </a:pPr>
             <a:r>
-              <a:rPr lang="en-US" sz="1550" dirty="0">
+              <a:rPr lang="en-US" sz="1800" dirty="0">
                 <a:solidFill>
                   <a:srgbClr val="FFFFFF"/>
                 </a:solidFill>
@@ -5267,7 +5274,7 @@
               </a:rPr>
               <a:t>NoSQL fits content management, analytics, flexible catalogs, and social graphs — the right tool for specific workloads, not a universal replacement.</a:t>
             </a:r>
-            <a:endParaRPr lang="en-US" sz="1550" dirty="0"/>
+            <a:endParaRPr lang="en-US" sz="1800" dirty="0"/>
           </a:p>
         </p:txBody>
       </p:sp>
@@ -5296,7 +5303,7 @@
               <a:buNone/>
             </a:pPr>
             <a:r>
-              <a:rPr lang="en-US" sz="1000" u="sng" dirty="0">
+              <a:rPr lang="en-US" sz="1200" u="sng" dirty="0">
                 <a:solidFill>
                   <a:srgbClr val="8A939B"/>
                 </a:solidFill>
@@ -5317,7 +5324,7 @@
               <a:buNone/>
             </a:pPr>
             <a:r>
-              <a:rPr lang="en-US" sz="1000" dirty="0">
+              <a:rPr lang="en-US" sz="1200" dirty="0">
                 <a:solidFill>
                   <a:srgbClr val="8A939B"/>
                 </a:solidFill>
@@ -5325,9 +5332,5030 @@
                 <a:ea typeface="Calibri" pitchFamily="34" charset="-122"/>
                 <a:cs typeface="Calibri" pitchFamily="34" charset="-120"/>
               </a:rPr>
+              <a:t>  ·  20</a:t>
+            </a:r>
+            <a:endParaRPr lang="en-US" sz="1200" dirty="0"/>
+          </a:p>
+        </p:txBody>
+      </p:sp>
+    </p:spTree>
+  </p:cSld>
+  <p:clrMapOvr>
+    <a:masterClrMapping/>
+  </p:clrMapOvr>
+</p:sld>
+</file>
+
+<file path=ppt/slides/slide14.xml><?xml version="1.0" encoding="utf-8"?>
+<p:sld xmlns:a="http://schemas.openxmlformats.org/drawingml/2006/main" xmlns:r="http://schemas.openxmlformats.org/officeDocument/2006/relationships" xmlns:p="http://schemas.openxmlformats.org/presentationml/2006/main">
+  <p:cSld name="Slide 13">
+    <p:bg>
+      <p:bgPr>
+        <a:solidFill>
+          <a:srgbClr val="14181C"/>
+        </a:solidFill>
+      </p:bgPr>
+    </p:bg>
+    <p:spTree>
+      <p:nvGrpSpPr>
+        <p:cNvPr id="1" name=""/>
+        <p:cNvGrpSpPr/>
+        <p:nvPr/>
+      </p:nvGrpSpPr>
+      <p:grpSpPr>
+        <a:xfrm>
+          <a:off x="0" y="0"/>
+          <a:ext cx="0" cy="0"/>
+          <a:chOff x="0" y="0"/>
+          <a:chExt cx="0" cy="0"/>
+        </a:xfrm>
+      </p:grpSpPr>
+      <p:sp>
+        <p:nvSpPr>
+          <p:cNvPr id="2" name="Shape 0"/>
+          <p:cNvSpPr/>
+          <p:nvPr/>
+        </p:nvSpPr>
+        <p:spPr>
+          <a:xfrm>
+            <a:off x="9265615" y="3931920"/>
+            <a:ext cx="3840480" cy="3840480"/>
+          </a:xfrm>
+          <a:prstGeom prst="ellipse">
+            <a:avLst/>
+          </a:prstGeom>
+          <a:solidFill>
+            <a:srgbClr val="2FE6C4">
+              <a:alpha val="10000"/>
+            </a:srgbClr>
+          </a:solidFill>
+          <a:ln/>
+        </p:spPr>
+      </p:sp>
+      <p:sp>
+        <p:nvSpPr>
+          <p:cNvPr id="3" name="Text 1"/>
+          <p:cNvSpPr txBox="1"/>
+          <p:nvPr/>
+        </p:nvSpPr>
+        <p:spPr>
+          <a:xfrm>
+            <a:off x="822960" y="548640"/>
+            <a:ext cx="10058400" cy="731520"/>
+          </a:xfrm>
+          <a:prstGeom prst="rect">
+            <a:avLst/>
+          </a:prstGeom>
+          <a:noFill/>
+          <a:ln/>
+        </p:spPr>
+        <p:txBody>
+          <a:bodyPr wrap="square" rtlCol="0" anchor="ctr"/>
+          <a:lstStyle/>
+          <a:p>
+            <a:pPr indent="0" marL="0">
+              <a:buNone/>
+            </a:pPr>
+            <a:r>
+              <a:rPr lang="en-US" sz="3200" b="1" dirty="0">
+                <a:solidFill>
+                  <a:srgbClr val="FFFFFF"/>
+                </a:solidFill>
+                <a:latin typeface="Calibri" pitchFamily="34" charset="0"/>
+                <a:ea typeface="Calibri" pitchFamily="34" charset="-122"/>
+                <a:cs typeface="Calibri" pitchFamily="34" charset="-120"/>
+              </a:rPr>
+              <a:t>Recap: Where We Left Off</a:t>
+            </a:r>
+            <a:endParaRPr lang="en-US" sz="3200" dirty="0"/>
+          </a:p>
+        </p:txBody>
+      </p:sp>
+      <p:sp>
+        <p:nvSpPr>
+          <p:cNvPr id="4" name="Shape 2"/>
+          <p:cNvSpPr/>
+          <p:nvPr/>
+        </p:nvSpPr>
+        <p:spPr>
+          <a:xfrm>
+            <a:off x="822960" y="2025396"/>
+            <a:ext cx="109728" cy="109728"/>
+          </a:xfrm>
+          <a:prstGeom prst="rect">
+            <a:avLst/>
+          </a:prstGeom>
+          <a:solidFill>
+            <a:srgbClr val="2FE6C4"/>
+          </a:solidFill>
+          <a:ln/>
+        </p:spPr>
+      </p:sp>
+      <p:sp>
+        <p:nvSpPr>
+          <p:cNvPr id="5" name="Text 3"/>
+          <p:cNvSpPr txBox="1"/>
+          <p:nvPr/>
+        </p:nvSpPr>
+        <p:spPr>
+          <a:xfrm>
+            <a:off x="1143000" y="1600200"/>
+            <a:ext cx="9875520" cy="941832"/>
+          </a:xfrm>
+          <a:prstGeom prst="rect">
+            <a:avLst/>
+          </a:prstGeom>
+          <a:noFill/>
+          <a:ln/>
+        </p:spPr>
+        <p:txBody>
+          <a:bodyPr wrap="square" rtlCol="0" anchor="ctr"/>
+          <a:lstStyle/>
+          <a:p>
+            <a:pPr indent="0" marL="0">
+              <a:buNone/>
+            </a:pPr>
+            <a:r>
+              <a:rPr lang="en-US" sz="1800" dirty="0">
+                <a:solidFill>
+                  <a:srgbClr val="FFFFFF"/>
+                </a:solidFill>
+                <a:latin typeface="Calibri" pitchFamily="34" charset="0"/>
+                <a:ea typeface="Calibri" pitchFamily="34" charset="-122"/>
+                <a:cs typeface="Calibri" pitchFamily="34" charset="-120"/>
+              </a:rPr>
+              <a:t>Relational design works well for normalized data on one strong server.</a:t>
+            </a:r>
+            <a:endParaRPr lang="en-US" sz="1800" dirty="0"/>
+          </a:p>
+        </p:txBody>
+      </p:sp>
+      <p:sp>
+        <p:nvSpPr>
+          <p:cNvPr id="6" name="Shape 4"/>
+          <p:cNvSpPr/>
+          <p:nvPr/>
+        </p:nvSpPr>
+        <p:spPr>
+          <a:xfrm>
+            <a:off x="822960" y="2967228"/>
+            <a:ext cx="109728" cy="109728"/>
+          </a:xfrm>
+          <a:prstGeom prst="rect">
+            <a:avLst/>
+          </a:prstGeom>
+          <a:solidFill>
+            <a:srgbClr val="8B7FD9"/>
+          </a:solidFill>
+          <a:ln/>
+        </p:spPr>
+      </p:sp>
+      <p:sp>
+        <p:nvSpPr>
+          <p:cNvPr id="7" name="Text 5"/>
+          <p:cNvSpPr txBox="1"/>
+          <p:nvPr/>
+        </p:nvSpPr>
+        <p:spPr>
+          <a:xfrm>
+            <a:off x="1143000" y="2542032"/>
+            <a:ext cx="9875520" cy="941832"/>
+          </a:xfrm>
+          <a:prstGeom prst="rect">
+            <a:avLst/>
+          </a:prstGeom>
+          <a:noFill/>
+          <a:ln/>
+        </p:spPr>
+        <p:txBody>
+          <a:bodyPr wrap="square" rtlCol="0" anchor="ctr"/>
+          <a:lstStyle/>
+          <a:p>
+            <a:pPr indent="0" marL="0">
+              <a:buNone/>
+            </a:pPr>
+            <a:r>
+              <a:rPr lang="en-US" sz="1800" dirty="0">
+                <a:solidFill>
+                  <a:srgbClr val="FFFFFF"/>
+                </a:solidFill>
+                <a:latin typeface="Calibri" pitchFamily="34" charset="0"/>
+                <a:ea typeface="Calibri" pitchFamily="34" charset="-122"/>
+                <a:cs typeface="Calibri" pitchFamily="34" charset="-120"/>
+              </a:rPr>
+              <a:t>At web scale it strains: vertical scaling has a ceiling, joins get expensive, schemas resist change.</a:t>
+            </a:r>
+            <a:endParaRPr lang="en-US" sz="1800" dirty="0"/>
+          </a:p>
+        </p:txBody>
+      </p:sp>
+      <p:sp>
+        <p:nvSpPr>
+          <p:cNvPr id="8" name="Shape 6"/>
+          <p:cNvSpPr/>
+          <p:nvPr/>
+        </p:nvSpPr>
+        <p:spPr>
+          <a:xfrm>
+            <a:off x="822960" y="3909060"/>
+            <a:ext cx="109728" cy="109728"/>
+          </a:xfrm>
+          <a:prstGeom prst="rect">
+            <a:avLst/>
+          </a:prstGeom>
+          <a:solidFill>
+            <a:srgbClr val="E8A33D"/>
+          </a:solidFill>
+          <a:ln/>
+        </p:spPr>
+      </p:sp>
+      <p:sp>
+        <p:nvSpPr>
+          <p:cNvPr id="9" name="Text 7"/>
+          <p:cNvSpPr txBox="1"/>
+          <p:nvPr/>
+        </p:nvSpPr>
+        <p:spPr>
+          <a:xfrm>
+            <a:off x="1143000" y="3483864"/>
+            <a:ext cx="9875520" cy="941832"/>
+          </a:xfrm>
+          <a:prstGeom prst="rect">
+            <a:avLst/>
+          </a:prstGeom>
+          <a:noFill/>
+          <a:ln/>
+        </p:spPr>
+        <p:txBody>
+          <a:bodyPr wrap="square" rtlCol="0" anchor="ctr"/>
+          <a:lstStyle/>
+          <a:p>
+            <a:pPr indent="0" marL="0">
+              <a:buNone/>
+            </a:pPr>
+            <a:r>
+              <a:rPr lang="en-US" sz="1800" dirty="0">
+                <a:solidFill>
+                  <a:srgbClr val="FFFFFF"/>
+                </a:solidFill>
+                <a:latin typeface="Calibri" pitchFamily="34" charset="0"/>
+                <a:ea typeface="Calibri" pitchFamily="34" charset="-122"/>
+                <a:cs typeface="Calibri" pitchFamily="34" charset="-120"/>
+              </a:rPr>
+              <a:t>NoSQL trades strict schema and strong consistency for horizontal scale and flexibility.</a:t>
+            </a:r>
+            <a:endParaRPr lang="en-US" sz="1800" dirty="0"/>
+          </a:p>
+        </p:txBody>
+      </p:sp>
+      <p:sp>
+        <p:nvSpPr>
+          <p:cNvPr id="10" name="Shape 8"/>
+          <p:cNvSpPr/>
+          <p:nvPr/>
+        </p:nvSpPr>
+        <p:spPr>
+          <a:xfrm>
+            <a:off x="822960" y="4850892"/>
+            <a:ext cx="109728" cy="109728"/>
+          </a:xfrm>
+          <a:prstGeom prst="rect">
+            <a:avLst/>
+          </a:prstGeom>
+          <a:solidFill>
+            <a:srgbClr val="2FE6C4"/>
+          </a:solidFill>
+          <a:ln/>
+        </p:spPr>
+      </p:sp>
+      <p:sp>
+        <p:nvSpPr>
+          <p:cNvPr id="11" name="Text 9"/>
+          <p:cNvSpPr txBox="1"/>
+          <p:nvPr/>
+        </p:nvSpPr>
+        <p:spPr>
+          <a:xfrm>
+            <a:off x="1143000" y="4425696"/>
+            <a:ext cx="9875520" cy="941832"/>
+          </a:xfrm>
+          <a:prstGeom prst="rect">
+            <a:avLst/>
+          </a:prstGeom>
+          <a:noFill/>
+          <a:ln/>
+        </p:spPr>
+        <p:txBody>
+          <a:bodyPr wrap="square" rtlCol="0" anchor="ctr"/>
+          <a:lstStyle/>
+          <a:p>
+            <a:pPr indent="0" marL="0">
+              <a:buNone/>
+            </a:pPr>
+            <a:r>
+              <a:rPr lang="en-US" sz="1800" dirty="0">
+                <a:solidFill>
+                  <a:srgbClr val="FFFFFF"/>
+                </a:solidFill>
+                <a:latin typeface="Calibri" pitchFamily="34" charset="0"/>
+                <a:ea typeface="Calibri" pitchFamily="34" charset="-122"/>
+                <a:cs typeface="Calibri" pitchFamily="34" charset="-120"/>
+              </a:rPr>
+              <a:t>Four families — document, key-value, column-family, graph — each tuned to one access pattern.</a:t>
+            </a:r>
+            <a:endParaRPr lang="en-US" sz="1800" dirty="0"/>
+          </a:p>
+        </p:txBody>
+      </p:sp>
+      <p:sp>
+        <p:nvSpPr>
+          <p:cNvPr id="12" name="Shape 10"/>
+          <p:cNvSpPr/>
+          <p:nvPr/>
+        </p:nvSpPr>
+        <p:spPr>
+          <a:xfrm>
+            <a:off x="822960" y="5792724"/>
+            <a:ext cx="109728" cy="109728"/>
+          </a:xfrm>
+          <a:prstGeom prst="rect">
+            <a:avLst/>
+          </a:prstGeom>
+          <a:solidFill>
+            <a:srgbClr val="8B7FD9"/>
+          </a:solidFill>
+          <a:ln/>
+        </p:spPr>
+      </p:sp>
+      <p:sp>
+        <p:nvSpPr>
+          <p:cNvPr id="13" name="Text 11"/>
+          <p:cNvSpPr txBox="1"/>
+          <p:nvPr/>
+        </p:nvSpPr>
+        <p:spPr>
+          <a:xfrm>
+            <a:off x="1143000" y="5367528"/>
+            <a:ext cx="9875520" cy="941832"/>
+          </a:xfrm>
+          <a:prstGeom prst="rect">
+            <a:avLst/>
+          </a:prstGeom>
+          <a:noFill/>
+          <a:ln/>
+        </p:spPr>
+        <p:txBody>
+          <a:bodyPr wrap="square" rtlCol="0" anchor="ctr"/>
+          <a:lstStyle/>
+          <a:p>
+            <a:pPr indent="0" marL="0">
+              <a:buNone/>
+            </a:pPr>
+            <a:r>
+              <a:rPr lang="en-US" sz="1800" dirty="0">
+                <a:solidFill>
+                  <a:srgbClr val="FFFFFF"/>
+                </a:solidFill>
+                <a:latin typeface="Calibri" pitchFamily="34" charset="0"/>
+                <a:ea typeface="Calibri" pitchFamily="34" charset="-122"/>
+                <a:cs typeface="Calibri" pitchFamily="34" charset="-120"/>
+              </a:rPr>
+              <a:t>Next: how one document database, MongoDB, works in practice.</a:t>
+            </a:r>
+            <a:endParaRPr lang="en-US" sz="1800" dirty="0"/>
+          </a:p>
+        </p:txBody>
+      </p:sp>
+      <p:sp>
+        <p:nvSpPr>
+          <p:cNvPr id="14" name="Text 12"/>
+          <p:cNvSpPr txBox="1"/>
+          <p:nvPr/>
+        </p:nvSpPr>
+        <p:spPr>
+          <a:xfrm>
+            <a:off x="9951415" y="6455664"/>
+            <a:ext cx="2011680" cy="292608"/>
+          </a:xfrm>
+          <a:prstGeom prst="rect">
+            <a:avLst/>
+          </a:prstGeom>
+          <a:noFill/>
+          <a:ln/>
+        </p:spPr>
+        <p:txBody>
+          <a:bodyPr wrap="square" rtlCol="0" anchor="ctr"/>
+          <a:lstStyle/>
+          <a:p>
+            <a:pPr algn="r" indent="0" marL="0">
+              <a:buNone/>
+            </a:pPr>
+            <a:r>
+              <a:rPr lang="en-US" sz="1200" u="sng" dirty="0">
+                <a:solidFill>
+                  <a:srgbClr val="8A939B"/>
+                </a:solidFill>
+                <a:latin typeface="Calibri" pitchFamily="34" charset="0"/>
+                <a:ea typeface="Calibri" pitchFamily="34" charset="-122"/>
+                <a:cs typeface="Calibri" pitchFamily="34" charset="-120"/>
+                <a:hlinkClick r:id="rId1" invalidUrl="" action="" tgtFrame="" tooltip="" history="1" highlightClick="0" endSnd="0">
+                  <a:extLst>
+                    <a:ext uri="{A12FA001-AC4F-418D-AE19-62706E023703}">
+                      <ahyp:hlinkClr xmlns:ahyp="http://schemas.microsoft.com/office/drawing/2018/hyperlinkcolor" val="tx"/>
+                    </a:ext>
+                  </a:extLst>
+                </a:hlinkClick>
+              </a:rPr>
+              <a:t>cuinotes.com</a:t>
+            </a:r>
+            <a:pPr algn="r" indent="0" marL="0">
+              <a:buNone/>
+            </a:pPr>
+            <a:r>
+              <a:rPr lang="en-US" sz="1200" dirty="0">
+                <a:solidFill>
+                  <a:srgbClr val="8A939B"/>
+                </a:solidFill>
+                <a:latin typeface="Calibri" pitchFamily="34" charset="0"/>
+                <a:ea typeface="Calibri" pitchFamily="34" charset="-122"/>
+                <a:cs typeface="Calibri" pitchFamily="34" charset="-120"/>
+              </a:rPr>
+              <a:t>  ·  3</a:t>
+            </a:r>
+            <a:endParaRPr lang="en-US" sz="1200" dirty="0"/>
+          </a:p>
+        </p:txBody>
+      </p:sp>
+    </p:spTree>
+  </p:cSld>
+  <p:clrMapOvr>
+    <a:masterClrMapping/>
+  </p:clrMapOvr>
+</p:sld>
+</file>
+
+<file path=ppt/slides/slide15.xml><?xml version="1.0" encoding="utf-8"?>
+<p:sld xmlns:a="http://schemas.openxmlformats.org/drawingml/2006/main" xmlns:r="http://schemas.openxmlformats.org/officeDocument/2006/relationships" xmlns:p="http://schemas.openxmlformats.org/presentationml/2006/main">
+  <p:cSld name="Slide 3">
+    <p:bg>
+      <p:bgPr>
+        <a:solidFill>
+          <a:srgbClr val="F7F8F9"/>
+        </a:solidFill>
+      </p:bgPr>
+    </p:bg>
+    <p:spTree>
+      <p:nvGrpSpPr>
+        <p:cNvPr id="1" name=""/>
+        <p:cNvGrpSpPr/>
+        <p:nvPr/>
+      </p:nvGrpSpPr>
+      <p:grpSpPr>
+        <a:xfrm>
+          <a:off x="0" y="0"/>
+          <a:ext cx="0" cy="0"/>
+          <a:chOff x="0" y="0"/>
+          <a:chExt cx="0" cy="0"/>
+        </a:xfrm>
+      </p:grpSpPr>
+      <p:sp>
+        <p:nvSpPr>
+          <p:cNvPr id="2" name="Text 0"/>
+          <p:cNvSpPr txBox="1"/>
+          <p:nvPr/>
+        </p:nvSpPr>
+        <p:spPr>
+          <a:xfrm>
+            <a:off x="548640" y="320040"/>
+            <a:ext cx="9144000" cy="292608"/>
+          </a:xfrm>
+          <a:prstGeom prst="rect">
+            <a:avLst/>
+          </a:prstGeom>
+          <a:noFill/>
+          <a:ln/>
+        </p:spPr>
+        <p:txBody>
+          <a:bodyPr wrap="square" rtlCol="0" anchor="ctr"/>
+          <a:lstStyle/>
+          <a:p>
+            <a:pPr indent="0" marL="0">
+              <a:buNone/>
+            </a:pPr>
+            <a:r>
+              <a:rPr lang="en-US" sz="1200" b="1" spc="150" kern="0" dirty="0">
+                <a:solidFill>
+                  <a:srgbClr val="8B7FD9"/>
+                </a:solidFill>
+                <a:latin typeface="Calibri" pitchFamily="34" charset="0"/>
+                <a:ea typeface="Calibri" pitchFamily="34" charset="-122"/>
+                <a:cs typeface="Calibri" pitchFamily="34" charset="-120"/>
+              </a:rPr>
+              <a:t>WORKED EXAMPLE</a:t>
+            </a:r>
+            <a:endParaRPr lang="en-US" sz="1200" dirty="0"/>
+          </a:p>
+        </p:txBody>
+      </p:sp>
+      <p:sp>
+        <p:nvSpPr>
+          <p:cNvPr id="3" name="Text 1"/>
+          <p:cNvSpPr txBox="1"/>
+          <p:nvPr/>
+        </p:nvSpPr>
+        <p:spPr>
+          <a:xfrm>
+            <a:off x="548640" y="566928"/>
+            <a:ext cx="11064240" cy="640080"/>
+          </a:xfrm>
+          <a:prstGeom prst="rect">
+            <a:avLst/>
+          </a:prstGeom>
+          <a:noFill/>
+          <a:ln/>
+        </p:spPr>
+        <p:txBody>
+          <a:bodyPr wrap="square" rtlCol="0" anchor="ctr"/>
+          <a:lstStyle/>
+          <a:p>
+            <a:pPr indent="0" marL="0">
+              <a:buNone/>
+            </a:pPr>
+            <a:r>
+              <a:rPr lang="en-US" sz="2500" b="1" dirty="0">
+                <a:solidFill>
+                  <a:srgbClr val="1F2429"/>
+                </a:solidFill>
+                <a:latin typeface="Calibri" pitchFamily="34" charset="0"/>
+                <a:ea typeface="Calibri" pitchFamily="34" charset="-122"/>
+                <a:cs typeface="Calibri" pitchFamily="34" charset="-120"/>
+              </a:rPr>
+              <a:t>Scaling One Feature: Posting Photos</a:t>
+            </a:r>
+            <a:endParaRPr lang="en-US" sz="2500" dirty="0"/>
+          </a:p>
+        </p:txBody>
+      </p:sp>
+      <p:sp>
+        <p:nvSpPr>
+          <p:cNvPr id="4" name="Text 2"/>
+          <p:cNvSpPr txBox="1"/>
+          <p:nvPr/>
+        </p:nvSpPr>
+        <p:spPr>
+          <a:xfrm>
+            <a:off x="9951415" y="6455664"/>
+            <a:ext cx="2011680" cy="292608"/>
+          </a:xfrm>
+          <a:prstGeom prst="rect">
+            <a:avLst/>
+          </a:prstGeom>
+          <a:noFill/>
+          <a:ln/>
+        </p:spPr>
+        <p:txBody>
+          <a:bodyPr wrap="square" rtlCol="0" anchor="ctr"/>
+          <a:lstStyle/>
+          <a:p>
+            <a:pPr algn="r" indent="0" marL="0">
+              <a:buNone/>
+            </a:pPr>
+            <a:r>
+              <a:rPr lang="en-US" sz="1200" u="sng" dirty="0">
+                <a:solidFill>
+                  <a:srgbClr val="8A939B"/>
+                </a:solidFill>
+                <a:latin typeface="Calibri" pitchFamily="34" charset="0"/>
+                <a:ea typeface="Calibri" pitchFamily="34" charset="-122"/>
+                <a:cs typeface="Calibri" pitchFamily="34" charset="-120"/>
+                <a:hlinkClick r:id="rId1" invalidUrl="" action="" tgtFrame="" tooltip="" history="1" highlightClick="0" endSnd="0">
+                  <a:extLst>
+                    <a:ext uri="{A12FA001-AC4F-418D-AE19-62706E023703}">
+                      <ahyp:hlinkClr xmlns:ahyp="http://schemas.microsoft.com/office/drawing/2018/hyperlinkcolor" val="tx"/>
+                    </a:ext>
+                  </a:extLst>
+                </a:hlinkClick>
+              </a:rPr>
+              <a:t>cuinotes.com</a:t>
+            </a:r>
+            <a:pPr algn="r" indent="0" marL="0">
+              <a:buNone/>
+            </a:pPr>
+            <a:r>
+              <a:rPr lang="en-US" sz="1200" dirty="0">
+                <a:solidFill>
+                  <a:srgbClr val="8A939B"/>
+                </a:solidFill>
+                <a:latin typeface="Calibri" pitchFamily="34" charset="0"/>
+                <a:ea typeface="Calibri" pitchFamily="34" charset="-122"/>
+                <a:cs typeface="Calibri" pitchFamily="34" charset="-120"/>
+              </a:rPr>
+              <a:t>  ·  6</a:t>
+            </a:r>
+            <a:endParaRPr lang="en-US" sz="1200" dirty="0"/>
+          </a:p>
+        </p:txBody>
+      </p:sp>
+      <p:sp>
+        <p:nvSpPr>
+          <p:cNvPr id="5" name="Shape 3"/>
+          <p:cNvSpPr/>
+          <p:nvPr/>
+        </p:nvSpPr>
+        <p:spPr>
+          <a:xfrm>
+            <a:off x="548640" y="1280160"/>
+            <a:ext cx="3474720" cy="2286000"/>
+          </a:xfrm>
+          <a:prstGeom prst="roundRect">
+            <a:avLst>
+              <a:gd name="adj" fmla="val 3200"/>
+            </a:avLst>
+          </a:prstGeom>
+          <a:solidFill>
+            <a:srgbClr val="FFFFFF"/>
+          </a:solidFill>
+          <a:ln w="22225">
+            <a:solidFill>
+              <a:srgbClr val="2FE6C4"/>
+            </a:solidFill>
+            <a:prstDash val="solid"/>
+          </a:ln>
+          <a:effectLst>
+            <a:outerShdw sx="100000" sy="100000" kx="0" ky="0" algn="bl" rotWithShape="0" blurRad="63500" dist="25400" dir="5400000">
+              <a:srgbClr val="1F2429">
+                <a:alpha val="15000"/>
+              </a:srgbClr>
+            </a:outerShdw>
+          </a:effectLst>
+        </p:spPr>
+      </p:sp>
+      <p:sp>
+        <p:nvSpPr>
+          <p:cNvPr id="6" name="Shape 4"/>
+          <p:cNvSpPr/>
+          <p:nvPr/>
+        </p:nvSpPr>
+        <p:spPr>
+          <a:xfrm>
+            <a:off x="713232" y="1426464"/>
+            <a:ext cx="201168" cy="201168"/>
+          </a:xfrm>
+          <a:prstGeom prst="ellipse">
+            <a:avLst/>
+          </a:prstGeom>
+          <a:solidFill>
+            <a:srgbClr val="2FE6C4"/>
+          </a:solidFill>
+          <a:ln/>
+        </p:spPr>
+      </p:sp>
+      <p:sp>
+        <p:nvSpPr>
+          <p:cNvPr id="7" name="Text 5"/>
+          <p:cNvSpPr txBox="1"/>
+          <p:nvPr/>
+        </p:nvSpPr>
+        <p:spPr>
+          <a:xfrm>
+            <a:off x="1005840" y="1371600"/>
+            <a:ext cx="2834640" cy="365760"/>
+          </a:xfrm>
+          <a:prstGeom prst="rect">
+            <a:avLst/>
+          </a:prstGeom>
+          <a:noFill/>
+          <a:ln/>
+        </p:spPr>
+        <p:txBody>
+          <a:bodyPr wrap="square" rtlCol="0" anchor="t"/>
+          <a:lstStyle/>
+          <a:p>
+            <a:pPr indent="0" marL="0">
+              <a:buNone/>
+            </a:pPr>
+            <a:r>
+              <a:rPr lang="en-US" sz="1800" b="1" dirty="0">
+                <a:solidFill>
+                  <a:srgbClr val="1F2429"/>
+                </a:solidFill>
+                <a:latin typeface="Calibri" pitchFamily="34" charset="0"/>
+                <a:ea typeface="Calibri" pitchFamily="34" charset="-122"/>
+                <a:cs typeface="Calibri" pitchFamily="34" charset="-120"/>
+              </a:rPr>
+              <a:t>1,000 users</a:t>
+            </a:r>
+            <a:endParaRPr lang="en-US" sz="1800" dirty="0"/>
+          </a:p>
+        </p:txBody>
+      </p:sp>
+      <p:sp>
+        <p:nvSpPr>
+          <p:cNvPr id="8" name="Text 6"/>
+          <p:cNvSpPr txBox="1"/>
+          <p:nvPr/>
+        </p:nvSpPr>
+        <p:spPr>
+          <a:xfrm>
+            <a:off x="749808" y="1783080"/>
+            <a:ext cx="3072384" cy="1691640"/>
+          </a:xfrm>
+          <a:prstGeom prst="rect">
+            <a:avLst/>
+          </a:prstGeom>
+          <a:noFill/>
+          <a:ln/>
+        </p:spPr>
+        <p:txBody>
+          <a:bodyPr wrap="square" rtlCol="0" anchor="t"/>
+          <a:lstStyle/>
+          <a:p>
+            <a:pPr indent="0" marL="0">
+              <a:lnSpc>
+                <a:spcPct val="112000"/>
+              </a:lnSpc>
+              <a:buNone/>
+            </a:pPr>
+            <a:r>
+              <a:rPr lang="en-US" sz="1200" dirty="0">
+                <a:solidFill>
+                  <a:srgbClr val="6B7480"/>
+                </a:solidFill>
+                <a:latin typeface="Calibri" pitchFamily="34" charset="0"/>
+                <a:ea typeface="Calibri" pitchFamily="34" charset="-122"/>
+                <a:cs typeface="Calibri" pitchFamily="34" charset="-120"/>
+              </a:rPr>
+              <a:t>One server handles photo writes in milliseconds. One table holds everything. No change needed.</a:t>
+            </a:r>
+            <a:endParaRPr lang="en-US" sz="1200" dirty="0"/>
+          </a:p>
+        </p:txBody>
+      </p:sp>
+      <p:sp>
+        <p:nvSpPr>
+          <p:cNvPr id="9" name="Shape 7"/>
+          <p:cNvSpPr/>
+          <p:nvPr/>
+        </p:nvSpPr>
+        <p:spPr>
+          <a:xfrm>
+            <a:off x="4343400" y="1280160"/>
+            <a:ext cx="3474720" cy="2286000"/>
+          </a:xfrm>
+          <a:prstGeom prst="roundRect">
+            <a:avLst>
+              <a:gd name="adj" fmla="val 3200"/>
+            </a:avLst>
+          </a:prstGeom>
+          <a:solidFill>
+            <a:srgbClr val="FFFFFF"/>
+          </a:solidFill>
+          <a:ln w="22225">
+            <a:solidFill>
+              <a:srgbClr val="8B7FD9"/>
+            </a:solidFill>
+            <a:prstDash val="solid"/>
+          </a:ln>
+          <a:effectLst>
+            <a:outerShdw sx="100000" sy="100000" kx="0" ky="0" algn="bl" rotWithShape="0" blurRad="63500" dist="25400" dir="5400000">
+              <a:srgbClr val="1F2429">
+                <a:alpha val="15000"/>
+              </a:srgbClr>
+            </a:outerShdw>
+          </a:effectLst>
+        </p:spPr>
+      </p:sp>
+      <p:sp>
+        <p:nvSpPr>
+          <p:cNvPr id="10" name="Shape 8"/>
+          <p:cNvSpPr/>
+          <p:nvPr/>
+        </p:nvSpPr>
+        <p:spPr>
+          <a:xfrm>
+            <a:off x="4507992" y="1426464"/>
+            <a:ext cx="201168" cy="201168"/>
+          </a:xfrm>
+          <a:prstGeom prst="ellipse">
+            <a:avLst/>
+          </a:prstGeom>
+          <a:solidFill>
+            <a:srgbClr val="8B7FD9"/>
+          </a:solidFill>
+          <a:ln/>
+        </p:spPr>
+      </p:sp>
+      <p:sp>
+        <p:nvSpPr>
+          <p:cNvPr id="11" name="Text 9"/>
+          <p:cNvSpPr txBox="1"/>
+          <p:nvPr/>
+        </p:nvSpPr>
+        <p:spPr>
+          <a:xfrm>
+            <a:off x="4800600" y="1371600"/>
+            <a:ext cx="2834640" cy="365760"/>
+          </a:xfrm>
+          <a:prstGeom prst="rect">
+            <a:avLst/>
+          </a:prstGeom>
+          <a:noFill/>
+          <a:ln/>
+        </p:spPr>
+        <p:txBody>
+          <a:bodyPr wrap="square" rtlCol="0" anchor="t"/>
+          <a:lstStyle/>
+          <a:p>
+            <a:pPr indent="0" marL="0">
+              <a:buNone/>
+            </a:pPr>
+            <a:r>
+              <a:rPr lang="en-US" sz="1800" b="1" dirty="0">
+                <a:solidFill>
+                  <a:srgbClr val="1F2429"/>
+                </a:solidFill>
+                <a:latin typeface="Calibri" pitchFamily="34" charset="0"/>
+                <a:ea typeface="Calibri" pitchFamily="34" charset="-122"/>
+                <a:cs typeface="Calibri" pitchFamily="34" charset="-120"/>
+              </a:rPr>
+              <a:t>10 million users</a:t>
+            </a:r>
+            <a:endParaRPr lang="en-US" sz="1800" dirty="0"/>
+          </a:p>
+        </p:txBody>
+      </p:sp>
+      <p:sp>
+        <p:nvSpPr>
+          <p:cNvPr id="12" name="Text 10"/>
+          <p:cNvSpPr txBox="1"/>
+          <p:nvPr/>
+        </p:nvSpPr>
+        <p:spPr>
+          <a:xfrm>
+            <a:off x="4544568" y="1783080"/>
+            <a:ext cx="3072384" cy="1691640"/>
+          </a:xfrm>
+          <a:prstGeom prst="rect">
+            <a:avLst/>
+          </a:prstGeom>
+          <a:noFill/>
+          <a:ln/>
+        </p:spPr>
+        <p:txBody>
+          <a:bodyPr wrap="square" rtlCol="0" anchor="t"/>
+          <a:lstStyle/>
+          <a:p>
+            <a:pPr indent="0" marL="0">
+              <a:lnSpc>
+                <a:spcPct val="112000"/>
+              </a:lnSpc>
+              <a:buNone/>
+            </a:pPr>
+            <a:r>
+              <a:rPr lang="en-US" sz="1200" dirty="0">
+                <a:solidFill>
+                  <a:srgbClr val="6B7480"/>
+                </a:solidFill>
+                <a:latin typeface="Calibri" pitchFamily="34" charset="0"/>
+                <a:ea typeface="Calibri" pitchFamily="34" charset="-122"/>
+                <a:cs typeface="Calibri" pitchFamily="34" charset="-120"/>
+              </a:rPr>
+              <a:t>Peak-hour writes spike. Vertical scaling buys time, but the ceiling is close.</a:t>
+            </a:r>
+            <a:endParaRPr lang="en-US" sz="1200" dirty="0"/>
+          </a:p>
+        </p:txBody>
+      </p:sp>
+      <p:sp>
+        <p:nvSpPr>
+          <p:cNvPr id="13" name="Shape 11"/>
+          <p:cNvSpPr/>
+          <p:nvPr/>
+        </p:nvSpPr>
+        <p:spPr>
+          <a:xfrm>
+            <a:off x="8138160" y="1280160"/>
+            <a:ext cx="3474720" cy="2286000"/>
+          </a:xfrm>
+          <a:prstGeom prst="roundRect">
+            <a:avLst>
+              <a:gd name="adj" fmla="val 3200"/>
+            </a:avLst>
+          </a:prstGeom>
+          <a:solidFill>
+            <a:srgbClr val="FFFFFF"/>
+          </a:solidFill>
+          <a:ln w="22225">
+            <a:solidFill>
+              <a:srgbClr val="E8A33D"/>
+            </a:solidFill>
+            <a:prstDash val="solid"/>
+          </a:ln>
+          <a:effectLst>
+            <a:outerShdw sx="100000" sy="100000" kx="0" ky="0" algn="bl" rotWithShape="0" blurRad="63500" dist="25400" dir="5400000">
+              <a:srgbClr val="1F2429">
+                <a:alpha val="15000"/>
+              </a:srgbClr>
+            </a:outerShdw>
+          </a:effectLst>
+        </p:spPr>
+      </p:sp>
+      <p:sp>
+        <p:nvSpPr>
+          <p:cNvPr id="14" name="Shape 12"/>
+          <p:cNvSpPr/>
+          <p:nvPr/>
+        </p:nvSpPr>
+        <p:spPr>
+          <a:xfrm>
+            <a:off x="8302752" y="1426464"/>
+            <a:ext cx="201168" cy="201168"/>
+          </a:xfrm>
+          <a:prstGeom prst="ellipse">
+            <a:avLst/>
+          </a:prstGeom>
+          <a:solidFill>
+            <a:srgbClr val="E8A33D"/>
+          </a:solidFill>
+          <a:ln/>
+        </p:spPr>
+      </p:sp>
+      <p:sp>
+        <p:nvSpPr>
+          <p:cNvPr id="15" name="Text 13"/>
+          <p:cNvSpPr txBox="1"/>
+          <p:nvPr/>
+        </p:nvSpPr>
+        <p:spPr>
+          <a:xfrm>
+            <a:off x="8595360" y="1371600"/>
+            <a:ext cx="2834640" cy="365760"/>
+          </a:xfrm>
+          <a:prstGeom prst="rect">
+            <a:avLst/>
+          </a:prstGeom>
+          <a:noFill/>
+          <a:ln/>
+        </p:spPr>
+        <p:txBody>
+          <a:bodyPr wrap="square" rtlCol="0" anchor="t"/>
+          <a:lstStyle/>
+          <a:p>
+            <a:pPr indent="0" marL="0">
+              <a:buNone/>
+            </a:pPr>
+            <a:r>
+              <a:rPr lang="en-US" sz="1800" b="1" dirty="0">
+                <a:solidFill>
+                  <a:srgbClr val="1F2429"/>
+                </a:solidFill>
+                <a:latin typeface="Calibri" pitchFamily="34" charset="0"/>
+                <a:ea typeface="Calibri" pitchFamily="34" charset="-122"/>
+                <a:cs typeface="Calibri" pitchFamily="34" charset="-120"/>
+              </a:rPr>
+              <a:t>500 million users</a:t>
+            </a:r>
+            <a:endParaRPr lang="en-US" sz="1800" dirty="0"/>
+          </a:p>
+        </p:txBody>
+      </p:sp>
+      <p:sp>
+        <p:nvSpPr>
+          <p:cNvPr id="16" name="Text 14"/>
+          <p:cNvSpPr txBox="1"/>
+          <p:nvPr/>
+        </p:nvSpPr>
+        <p:spPr>
+          <a:xfrm>
+            <a:off x="8339328" y="1783080"/>
+            <a:ext cx="3072384" cy="1691640"/>
+          </a:xfrm>
+          <a:prstGeom prst="rect">
+            <a:avLst/>
+          </a:prstGeom>
+          <a:noFill/>
+          <a:ln/>
+        </p:spPr>
+        <p:txBody>
+          <a:bodyPr wrap="square" rtlCol="0" anchor="t"/>
+          <a:lstStyle/>
+          <a:p>
+            <a:pPr indent="0" marL="0">
+              <a:lnSpc>
+                <a:spcPct val="112000"/>
+              </a:lnSpc>
+              <a:buNone/>
+            </a:pPr>
+            <a:r>
+              <a:rPr lang="en-US" sz="1200" dirty="0">
+                <a:solidFill>
+                  <a:srgbClr val="6B7480"/>
+                </a:solidFill>
+                <a:latin typeface="Calibri" pitchFamily="34" charset="0"/>
+                <a:ea typeface="Calibri" pitchFamily="34" charset="-122"/>
+                <a:cs typeface="Calibri" pitchFamily="34" charset="-120"/>
+              </a:rPr>
+              <a:t>Shard photos by user ID across many servers. Document storage avoids a migration per new post type.</a:t>
+            </a:r>
+            <a:endParaRPr lang="en-US" sz="1200" dirty="0"/>
+          </a:p>
+        </p:txBody>
+      </p:sp>
+      <p:sp>
+        <p:nvSpPr>
+          <p:cNvPr id="17" name="Shape 15"/>
+          <p:cNvSpPr/>
+          <p:nvPr/>
+        </p:nvSpPr>
+        <p:spPr>
+          <a:xfrm>
+            <a:off x="548640" y="3749040"/>
+            <a:ext cx="11064240" cy="2011680"/>
+          </a:xfrm>
+          <a:prstGeom prst="roundRect">
+            <a:avLst>
+              <a:gd name="adj" fmla="val 3182"/>
+            </a:avLst>
+          </a:prstGeom>
+          <a:solidFill>
+            <a:srgbClr val="FFFFFF"/>
+          </a:solidFill>
+          <a:ln w="19050">
+            <a:solidFill>
+              <a:srgbClr val="8B7FD9"/>
+            </a:solidFill>
+            <a:prstDash val="solid"/>
+          </a:ln>
+          <a:effectLst>
+            <a:outerShdw sx="100000" sy="100000" kx="0" ky="0" algn="bl" rotWithShape="0" blurRad="50800" dist="12700" dir="5400000">
+              <a:srgbClr val="1F2429">
+                <a:alpha val="12000"/>
+              </a:srgbClr>
+            </a:outerShdw>
+          </a:effectLst>
+        </p:spPr>
+      </p:sp>
+      <p:sp>
+        <p:nvSpPr>
+          <p:cNvPr id="18" name="Shape 16"/>
+          <p:cNvSpPr/>
+          <p:nvPr/>
+        </p:nvSpPr>
+        <p:spPr>
+          <a:xfrm>
+            <a:off x="731520" y="3913632"/>
+            <a:ext cx="274320" cy="82296"/>
+          </a:xfrm>
+          <a:prstGeom prst="rect">
+            <a:avLst/>
+          </a:prstGeom>
+          <a:solidFill>
+            <a:srgbClr val="8B7FD9"/>
+          </a:solidFill>
+          <a:ln/>
+        </p:spPr>
+      </p:sp>
+      <p:sp>
+        <p:nvSpPr>
+          <p:cNvPr id="19" name="Text 17"/>
+          <p:cNvSpPr txBox="1"/>
+          <p:nvPr/>
+        </p:nvSpPr>
+        <p:spPr>
+          <a:xfrm>
+            <a:off x="731520" y="4041648"/>
+            <a:ext cx="10698480" cy="237744"/>
+          </a:xfrm>
+          <a:prstGeom prst="rect">
+            <a:avLst/>
+          </a:prstGeom>
+          <a:noFill/>
+          <a:ln/>
+        </p:spPr>
+        <p:txBody>
+          <a:bodyPr wrap="square" rtlCol="0" anchor="ctr"/>
+          <a:lstStyle/>
+          <a:p>
+            <a:pPr indent="0" marL="0">
+              <a:buNone/>
+            </a:pPr>
+            <a:r>
+              <a:rPr lang="en-US" sz="1200" b="1" spc="100" kern="0" dirty="0">
+                <a:solidFill>
+                  <a:srgbClr val="8B7FD9"/>
+                </a:solidFill>
+                <a:latin typeface="Calibri" pitchFamily="34" charset="0"/>
+                <a:ea typeface="Calibri" pitchFamily="34" charset="-122"/>
+                <a:cs typeface="Calibri" pitchFamily="34" charset="-120"/>
+              </a:rPr>
+              <a:t>WHY THE ARITHMETIC MATTERS</a:t>
+            </a:r>
+            <a:endParaRPr lang="en-US" sz="1200" dirty="0"/>
+          </a:p>
+        </p:txBody>
+      </p:sp>
+      <p:sp>
+        <p:nvSpPr>
+          <p:cNvPr id="20" name="Text 18"/>
+          <p:cNvSpPr txBox="1"/>
+          <p:nvPr/>
+        </p:nvSpPr>
+        <p:spPr>
+          <a:xfrm>
+            <a:off x="731520" y="4297680"/>
+            <a:ext cx="10698480" cy="1325880"/>
+          </a:xfrm>
+          <a:prstGeom prst="rect">
+            <a:avLst/>
+          </a:prstGeom>
+          <a:noFill/>
+          <a:ln/>
+        </p:spPr>
+        <p:txBody>
+          <a:bodyPr wrap="square" rtlCol="0" anchor="t"/>
+          <a:lstStyle/>
+          <a:p>
+            <a:pPr indent="0" marL="0">
+              <a:lnSpc>
+                <a:spcPct val="118000"/>
+              </a:lnSpc>
+              <a:buNone/>
+            </a:pPr>
+            <a:r>
+              <a:rPr lang="en-US" sz="1200" dirty="0">
+                <a:solidFill>
+                  <a:srgbClr val="1F2429"/>
+                </a:solidFill>
+                <a:latin typeface="Calibri" pitchFamily="34" charset="0"/>
+                <a:ea typeface="Calibri" pitchFamily="34" charset="-122"/>
+                <a:cs typeface="Calibri" pitchFamily="34" charset="-120"/>
+              </a:rPr>
+              <a:t>If peak writes double every year, a server with 2x headroom today is full in about 12 months. Growth rate, not size alone, forces the move to horizontal scaling. (Figures are illustrative.)</a:t>
+            </a:r>
+            <a:endParaRPr lang="en-US" sz="1200" dirty="0"/>
+          </a:p>
+        </p:txBody>
+      </p:sp>
+    </p:spTree>
+  </p:cSld>
+  <p:clrMapOvr>
+    <a:masterClrMapping/>
+  </p:clrMapOvr>
+</p:sld>
+</file>
+
+<file path=ppt/slides/slide16.xml><?xml version="1.0" encoding="utf-8"?>
+<p:sld xmlns:a="http://schemas.openxmlformats.org/drawingml/2006/main" xmlns:r="http://schemas.openxmlformats.org/officeDocument/2006/relationships" xmlns:p="http://schemas.openxmlformats.org/presentationml/2006/main">
+  <p:cSld name="Slide 9">
+    <p:bg>
+      <p:bgPr>
+        <a:solidFill>
+          <a:srgbClr val="F7F8F9"/>
+        </a:solidFill>
+      </p:bgPr>
+    </p:bg>
+    <p:spTree>
+      <p:nvGrpSpPr>
+        <p:cNvPr id="1" name=""/>
+        <p:cNvGrpSpPr/>
+        <p:nvPr/>
+      </p:nvGrpSpPr>
+      <p:grpSpPr>
+        <a:xfrm>
+          <a:off x="0" y="0"/>
+          <a:ext cx="0" cy="0"/>
+          <a:chOff x="0" y="0"/>
+          <a:chExt cx="0" cy="0"/>
+        </a:xfrm>
+      </p:grpSpPr>
+      <p:sp>
+        <p:nvSpPr>
+          <p:cNvPr id="2" name="Text 0"/>
+          <p:cNvSpPr txBox="1"/>
+          <p:nvPr/>
+        </p:nvSpPr>
+        <p:spPr>
+          <a:xfrm>
+            <a:off x="548640" y="320040"/>
+            <a:ext cx="9144000" cy="292608"/>
+          </a:xfrm>
+          <a:prstGeom prst="rect">
+            <a:avLst/>
+          </a:prstGeom>
+          <a:noFill/>
+          <a:ln/>
+        </p:spPr>
+        <p:txBody>
+          <a:bodyPr wrap="square" rtlCol="0" anchor="ctr"/>
+          <a:lstStyle/>
+          <a:p>
+            <a:pPr indent="0" marL="0">
+              <a:buNone/>
+            </a:pPr>
+            <a:r>
+              <a:rPr lang="en-US" sz="1200" b="1" spc="150" kern="0" dirty="0">
+                <a:solidFill>
+                  <a:srgbClr val="8B7FD9"/>
+                </a:solidFill>
+                <a:latin typeface="Calibri" pitchFamily="34" charset="0"/>
+                <a:ea typeface="Calibri" pitchFamily="34" charset="-122"/>
+                <a:cs typeface="Calibri" pitchFamily="34" charset="-120"/>
+              </a:rPr>
+              <a:t>WORKED EXAMPLE</a:t>
+            </a:r>
+            <a:endParaRPr lang="en-US" sz="1200" dirty="0"/>
+          </a:p>
+        </p:txBody>
+      </p:sp>
+      <p:sp>
+        <p:nvSpPr>
+          <p:cNvPr id="3" name="Text 1"/>
+          <p:cNvSpPr txBox="1"/>
+          <p:nvPr/>
+        </p:nvSpPr>
+        <p:spPr>
+          <a:xfrm>
+            <a:off x="548640" y="566928"/>
+            <a:ext cx="11064240" cy="640080"/>
+          </a:xfrm>
+          <a:prstGeom prst="rect">
+            <a:avLst/>
+          </a:prstGeom>
+          <a:noFill/>
+          <a:ln/>
+        </p:spPr>
+        <p:txBody>
+          <a:bodyPr wrap="square" rtlCol="0" anchor="ctr"/>
+          <a:lstStyle/>
+          <a:p>
+            <a:pPr indent="0" marL="0">
+              <a:buNone/>
+            </a:pPr>
+            <a:r>
+              <a:rPr lang="en-US" sz="2500" b="1" dirty="0">
+                <a:solidFill>
+                  <a:srgbClr val="1F2429"/>
+                </a:solidFill>
+                <a:latin typeface="Calibri" pitchFamily="34" charset="0"/>
+                <a:ea typeface="Calibri" pitchFamily="34" charset="-122"/>
+                <a:cs typeface="Calibri" pitchFamily="34" charset="-120"/>
+              </a:rPr>
+              <a:t>One User Profile, Four Data Models</a:t>
+            </a:r>
+            <a:endParaRPr lang="en-US" sz="2500" dirty="0"/>
+          </a:p>
+        </p:txBody>
+      </p:sp>
+      <p:sp>
+        <p:nvSpPr>
+          <p:cNvPr id="4" name="Text 2"/>
+          <p:cNvSpPr txBox="1"/>
+          <p:nvPr/>
+        </p:nvSpPr>
+        <p:spPr>
+          <a:xfrm>
+            <a:off x="9951415" y="6455664"/>
+            <a:ext cx="2011680" cy="292608"/>
+          </a:xfrm>
+          <a:prstGeom prst="rect">
+            <a:avLst/>
+          </a:prstGeom>
+          <a:noFill/>
+          <a:ln/>
+        </p:spPr>
+        <p:txBody>
+          <a:bodyPr wrap="square" rtlCol="0" anchor="ctr"/>
+          <a:lstStyle/>
+          <a:p>
+            <a:pPr algn="r" indent="0" marL="0">
+              <a:buNone/>
+            </a:pPr>
+            <a:r>
+              <a:rPr lang="en-US" sz="1200" u="sng" dirty="0">
+                <a:solidFill>
+                  <a:srgbClr val="8A939B"/>
+                </a:solidFill>
+                <a:latin typeface="Calibri" pitchFamily="34" charset="0"/>
+                <a:ea typeface="Calibri" pitchFamily="34" charset="-122"/>
+                <a:cs typeface="Calibri" pitchFamily="34" charset="-120"/>
+                <a:hlinkClick r:id="rId1" invalidUrl="" action="" tgtFrame="" tooltip="" history="1" highlightClick="0" endSnd="0">
+                  <a:extLst>
+                    <a:ext uri="{A12FA001-AC4F-418D-AE19-62706E023703}">
+                      <ahyp:hlinkClr xmlns:ahyp="http://schemas.microsoft.com/office/drawing/2018/hyperlinkcolor" val="tx"/>
+                    </a:ext>
+                  </a:extLst>
+                </a:hlinkClick>
+              </a:rPr>
+              <a:t>cuinotes.com</a:t>
+            </a:r>
+            <a:pPr algn="r" indent="0" marL="0">
+              <a:buNone/>
+            </a:pPr>
+            <a:r>
+              <a:rPr lang="en-US" sz="1200" dirty="0">
+                <a:solidFill>
+                  <a:srgbClr val="8A939B"/>
+                </a:solidFill>
+                <a:latin typeface="Calibri" pitchFamily="34" charset="0"/>
+                <a:ea typeface="Calibri" pitchFamily="34" charset="-122"/>
+                <a:cs typeface="Calibri" pitchFamily="34" charset="-120"/>
+              </a:rPr>
+              <a:t>  ·  10</a:t>
+            </a:r>
+            <a:endParaRPr lang="en-US" sz="1200" dirty="0"/>
+          </a:p>
+        </p:txBody>
+      </p:sp>
+      <p:sp>
+        <p:nvSpPr>
+          <p:cNvPr id="5" name="Text 3"/>
+          <p:cNvSpPr txBox="1"/>
+          <p:nvPr/>
+        </p:nvSpPr>
+        <p:spPr>
+          <a:xfrm>
+            <a:off x="548640" y="1188720"/>
+            <a:ext cx="5349240" cy="274320"/>
+          </a:xfrm>
+          <a:prstGeom prst="rect">
+            <a:avLst/>
+          </a:prstGeom>
+          <a:noFill/>
+          <a:ln/>
+        </p:spPr>
+        <p:txBody>
+          <a:bodyPr wrap="square" rtlCol="0" anchor="ctr"/>
+          <a:lstStyle/>
+          <a:p>
+            <a:pPr indent="0" marL="0">
+              <a:buNone/>
+            </a:pPr>
+            <a:r>
+              <a:rPr lang="en-US" sz="1200" b="1" spc="100" kern="0" dirty="0">
+                <a:solidFill>
+                  <a:srgbClr val="2FE6C4"/>
+                </a:solidFill>
+                <a:latin typeface="Calibri" pitchFamily="34" charset="0"/>
+                <a:ea typeface="Calibri" pitchFamily="34" charset="-122"/>
+                <a:cs typeface="Calibri" pitchFamily="34" charset="-120"/>
+              </a:rPr>
+              <a:t>DOCUMENT (MONGODB)</a:t>
+            </a:r>
+            <a:endParaRPr lang="en-US" sz="1200" dirty="0"/>
+          </a:p>
+        </p:txBody>
+      </p:sp>
+      <p:sp>
+        <p:nvSpPr>
+          <p:cNvPr id="6" name="Shape 4"/>
+          <p:cNvSpPr/>
+          <p:nvPr/>
+        </p:nvSpPr>
+        <p:spPr>
+          <a:xfrm>
+            <a:off x="548640" y="1536192"/>
+            <a:ext cx="5349240" cy="1444752"/>
+          </a:xfrm>
+          <a:prstGeom prst="roundRect">
+            <a:avLst>
+              <a:gd name="adj" fmla="val 5063"/>
+            </a:avLst>
+          </a:prstGeom>
+          <a:solidFill>
+            <a:srgbClr val="FFFFFF"/>
+          </a:solidFill>
+          <a:ln w="22225">
+            <a:solidFill>
+              <a:srgbClr val="2FE6C4"/>
+            </a:solidFill>
+            <a:prstDash val="solid"/>
+          </a:ln>
+          <a:effectLst>
+            <a:outerShdw sx="100000" sy="100000" kx="0" ky="0" algn="bl" rotWithShape="0" blurRad="76200" dist="25400" dir="5400000">
+              <a:srgbClr val="1F2429">
+                <a:alpha val="16000"/>
+              </a:srgbClr>
+            </a:outerShdw>
+          </a:effectLst>
+        </p:spPr>
+      </p:sp>
+      <p:sp>
+        <p:nvSpPr>
+          <p:cNvPr id="7" name="Shape 5"/>
+          <p:cNvSpPr/>
+          <p:nvPr/>
+        </p:nvSpPr>
+        <p:spPr>
+          <a:xfrm>
+            <a:off x="694944" y="2057400"/>
+            <a:ext cx="91440" cy="310896"/>
+          </a:xfrm>
+          <a:prstGeom prst="rect">
+            <a:avLst/>
+          </a:prstGeom>
+          <a:solidFill>
+            <a:srgbClr val="2FE6C4"/>
+          </a:solidFill>
+          <a:ln/>
+        </p:spPr>
+      </p:sp>
+      <p:sp>
+        <p:nvSpPr>
+          <p:cNvPr id="8" name="Text 6"/>
+          <p:cNvSpPr txBox="1"/>
+          <p:nvPr/>
+        </p:nvSpPr>
+        <p:spPr>
+          <a:xfrm>
+            <a:off x="914400" y="1609344"/>
+            <a:ext cx="4800600" cy="650138"/>
+          </a:xfrm>
+          <a:prstGeom prst="rect">
+            <a:avLst/>
+          </a:prstGeom>
+          <a:noFill/>
+          <a:ln/>
+        </p:spPr>
+        <p:txBody>
+          <a:bodyPr wrap="square" rtlCol="0" anchor="t"/>
+          <a:lstStyle/>
+          <a:p>
+            <a:pPr indent="0" marL="0">
+              <a:buNone/>
+            </a:pPr>
+            <a:r>
+              <a:rPr lang="en-US" sz="1800" b="1" dirty="0">
+                <a:solidFill>
+                  <a:srgbClr val="1F2429"/>
+                </a:solidFill>
+                <a:latin typeface="Calibri" pitchFamily="34" charset="0"/>
+                <a:ea typeface="Calibri" pitchFamily="34" charset="-122"/>
+                <a:cs typeface="Calibri" pitchFamily="34" charset="-120"/>
+              </a:rPr>
+              <a:t>Nested, one read</a:t>
+            </a:r>
+            <a:endParaRPr lang="en-US" sz="1800" dirty="0"/>
+          </a:p>
+        </p:txBody>
+      </p:sp>
+      <p:sp>
+        <p:nvSpPr>
+          <p:cNvPr id="9" name="Text 7"/>
+          <p:cNvSpPr txBox="1"/>
+          <p:nvPr/>
+        </p:nvSpPr>
+        <p:spPr>
+          <a:xfrm>
+            <a:off x="914400" y="2142988"/>
+            <a:ext cx="4800600" cy="794614"/>
+          </a:xfrm>
+          <a:prstGeom prst="rect">
+            <a:avLst/>
+          </a:prstGeom>
+          <a:noFill/>
+          <a:ln/>
+        </p:spPr>
+        <p:txBody>
+          <a:bodyPr wrap="square" rtlCol="0" anchor="t"/>
+          <a:lstStyle/>
+          <a:p>
+            <a:pPr indent="0" marL="0">
+              <a:lnSpc>
+                <a:spcPct val="110000"/>
+              </a:lnSpc>
+              <a:buNone/>
+            </a:pPr>
+            <a:r>
+              <a:rPr lang="en-US" sz="1200" dirty="0">
+                <a:solidFill>
+                  <a:srgbClr val="6B7480"/>
+                </a:solidFill>
+                <a:latin typeface="Calibri" pitchFamily="34" charset="0"/>
+                <a:ea typeface="Calibri" pitchFamily="34" charset="-122"/>
+                <a:cs typeface="Calibri" pitchFamily="34" charset="-120"/>
+              </a:rPr>
+              <a:t>{ name, city, posts: [...] } is returned in a single fetch</a:t>
+            </a:r>
+            <a:endParaRPr lang="en-US" sz="1200" dirty="0"/>
+          </a:p>
+        </p:txBody>
+      </p:sp>
+      <p:sp>
+        <p:nvSpPr>
+          <p:cNvPr id="10" name="Shape 8"/>
+          <p:cNvSpPr/>
+          <p:nvPr/>
+        </p:nvSpPr>
+        <p:spPr>
+          <a:xfrm>
+            <a:off x="3223260" y="2980944"/>
+            <a:ext cx="0" cy="256032"/>
+          </a:xfrm>
+          <a:prstGeom prst="line">
+            <a:avLst/>
+          </a:prstGeom>
+          <a:noFill/>
+          <a:ln w="25400">
+            <a:solidFill>
+              <a:srgbClr val="8A939B"/>
+            </a:solidFill>
+            <a:prstDash val="solid"/>
+            <a:tailEnd type="triangle"/>
+          </a:ln>
+        </p:spPr>
+      </p:sp>
+      <p:sp>
+        <p:nvSpPr>
+          <p:cNvPr id="11" name="Shape 9"/>
+          <p:cNvSpPr/>
+          <p:nvPr/>
+        </p:nvSpPr>
+        <p:spPr>
+          <a:xfrm>
+            <a:off x="548640" y="3236976"/>
+            <a:ext cx="5349240" cy="1444752"/>
+          </a:xfrm>
+          <a:prstGeom prst="roundRect">
+            <a:avLst>
+              <a:gd name="adj" fmla="val 5063"/>
+            </a:avLst>
+          </a:prstGeom>
+          <a:solidFill>
+            <a:srgbClr val="FFFFFF"/>
+          </a:solidFill>
+          <a:ln w="22225">
+            <a:solidFill>
+              <a:srgbClr val="8B7FD9"/>
+            </a:solidFill>
+            <a:prstDash val="solid"/>
+          </a:ln>
+          <a:effectLst>
+            <a:outerShdw sx="100000" sy="100000" kx="0" ky="0" algn="bl" rotWithShape="0" blurRad="76200" dist="25400" dir="5400000">
+              <a:srgbClr val="1F2429">
+                <a:alpha val="16000"/>
+              </a:srgbClr>
+            </a:outerShdw>
+          </a:effectLst>
+        </p:spPr>
+      </p:sp>
+      <p:sp>
+        <p:nvSpPr>
+          <p:cNvPr id="12" name="Shape 10"/>
+          <p:cNvSpPr/>
+          <p:nvPr/>
+        </p:nvSpPr>
+        <p:spPr>
+          <a:xfrm>
+            <a:off x="694944" y="3758184"/>
+            <a:ext cx="91440" cy="310896"/>
+          </a:xfrm>
+          <a:prstGeom prst="rect">
+            <a:avLst/>
+          </a:prstGeom>
+          <a:solidFill>
+            <a:srgbClr val="8B7FD9"/>
+          </a:solidFill>
+          <a:ln/>
+        </p:spPr>
+      </p:sp>
+      <p:sp>
+        <p:nvSpPr>
+          <p:cNvPr id="13" name="Text 11"/>
+          <p:cNvSpPr txBox="1"/>
+          <p:nvPr/>
+        </p:nvSpPr>
+        <p:spPr>
+          <a:xfrm>
+            <a:off x="914400" y="3310128"/>
+            <a:ext cx="4800600" cy="650138"/>
+          </a:xfrm>
+          <a:prstGeom prst="rect">
+            <a:avLst/>
+          </a:prstGeom>
+          <a:noFill/>
+          <a:ln/>
+        </p:spPr>
+        <p:txBody>
+          <a:bodyPr wrap="square" rtlCol="0" anchor="t"/>
+          <a:lstStyle/>
+          <a:p>
+            <a:pPr indent="0" marL="0">
+              <a:buNone/>
+            </a:pPr>
+            <a:r>
+              <a:rPr lang="en-US" sz="1800" b="1" dirty="0">
+                <a:solidFill>
+                  <a:srgbClr val="1F2429"/>
+                </a:solidFill>
+                <a:latin typeface="Calibri" pitchFamily="34" charset="0"/>
+                <a:ea typeface="Calibri" pitchFamily="34" charset="-122"/>
+                <a:cs typeface="Calibri" pitchFamily="34" charset="-120"/>
+              </a:rPr>
+              <a:t>Flexible shape</a:t>
+            </a:r>
+            <a:endParaRPr lang="en-US" sz="1800" dirty="0"/>
+          </a:p>
+        </p:txBody>
+      </p:sp>
+      <p:sp>
+        <p:nvSpPr>
+          <p:cNvPr id="14" name="Text 12"/>
+          <p:cNvSpPr txBox="1"/>
+          <p:nvPr/>
+        </p:nvSpPr>
+        <p:spPr>
+          <a:xfrm>
+            <a:off x="914400" y="3843772"/>
+            <a:ext cx="4800600" cy="794614"/>
+          </a:xfrm>
+          <a:prstGeom prst="rect">
+            <a:avLst/>
+          </a:prstGeom>
+          <a:noFill/>
+          <a:ln/>
+        </p:spPr>
+        <p:txBody>
+          <a:bodyPr wrap="square" rtlCol="0" anchor="t"/>
+          <a:lstStyle/>
+          <a:p>
+            <a:pPr indent="0" marL="0">
+              <a:lnSpc>
+                <a:spcPct val="110000"/>
+              </a:lnSpc>
+              <a:buNone/>
+            </a:pPr>
+            <a:r>
+              <a:rPr lang="en-US" sz="1200" dirty="0">
+                <a:solidFill>
+                  <a:srgbClr val="6B7480"/>
+                </a:solidFill>
+                <a:latin typeface="Calibri" pitchFamily="34" charset="0"/>
+                <a:ea typeface="Calibri" pitchFamily="34" charset="-122"/>
+                <a:cs typeface="Calibri" pitchFamily="34" charset="-120"/>
+              </a:rPr>
+              <a:t>Each user document can hold different fields</a:t>
+            </a:r>
+            <a:endParaRPr lang="en-US" sz="1200" dirty="0"/>
+          </a:p>
+        </p:txBody>
+      </p:sp>
+      <p:sp>
+        <p:nvSpPr>
+          <p:cNvPr id="15" name="Shape 13"/>
+          <p:cNvSpPr/>
+          <p:nvPr/>
+        </p:nvSpPr>
+        <p:spPr>
+          <a:xfrm>
+            <a:off x="3223260" y="4681728"/>
+            <a:ext cx="0" cy="256032"/>
+          </a:xfrm>
+          <a:prstGeom prst="line">
+            <a:avLst/>
+          </a:prstGeom>
+          <a:noFill/>
+          <a:ln w="25400">
+            <a:solidFill>
+              <a:srgbClr val="8A939B"/>
+            </a:solidFill>
+            <a:prstDash val="solid"/>
+            <a:tailEnd type="triangle"/>
+          </a:ln>
+        </p:spPr>
+      </p:sp>
+      <p:sp>
+        <p:nvSpPr>
+          <p:cNvPr id="16" name="Shape 14"/>
+          <p:cNvSpPr/>
+          <p:nvPr/>
+        </p:nvSpPr>
+        <p:spPr>
+          <a:xfrm>
+            <a:off x="548640" y="4937760"/>
+            <a:ext cx="5349240" cy="1444752"/>
+          </a:xfrm>
+          <a:prstGeom prst="roundRect">
+            <a:avLst>
+              <a:gd name="adj" fmla="val 5063"/>
+            </a:avLst>
+          </a:prstGeom>
+          <a:solidFill>
+            <a:srgbClr val="FFFFFF"/>
+          </a:solidFill>
+          <a:ln w="22225">
+            <a:solidFill>
+              <a:srgbClr val="E8A33D"/>
+            </a:solidFill>
+            <a:prstDash val="solid"/>
+          </a:ln>
+          <a:effectLst>
+            <a:outerShdw sx="100000" sy="100000" kx="0" ky="0" algn="bl" rotWithShape="0" blurRad="76200" dist="25400" dir="5400000">
+              <a:srgbClr val="1F2429">
+                <a:alpha val="16000"/>
+              </a:srgbClr>
+            </a:outerShdw>
+          </a:effectLst>
+        </p:spPr>
+      </p:sp>
+      <p:sp>
+        <p:nvSpPr>
+          <p:cNvPr id="17" name="Shape 15"/>
+          <p:cNvSpPr/>
+          <p:nvPr/>
+        </p:nvSpPr>
+        <p:spPr>
+          <a:xfrm>
+            <a:off x="694944" y="5458968"/>
+            <a:ext cx="91440" cy="310896"/>
+          </a:xfrm>
+          <a:prstGeom prst="rect">
+            <a:avLst/>
+          </a:prstGeom>
+          <a:solidFill>
+            <a:srgbClr val="E8A33D"/>
+          </a:solidFill>
+          <a:ln/>
+        </p:spPr>
+      </p:sp>
+      <p:sp>
+        <p:nvSpPr>
+          <p:cNvPr id="18" name="Text 16"/>
+          <p:cNvSpPr txBox="1"/>
+          <p:nvPr/>
+        </p:nvSpPr>
+        <p:spPr>
+          <a:xfrm>
+            <a:off x="914400" y="5010912"/>
+            <a:ext cx="4800600" cy="650138"/>
+          </a:xfrm>
+          <a:prstGeom prst="rect">
+            <a:avLst/>
+          </a:prstGeom>
+          <a:noFill/>
+          <a:ln/>
+        </p:spPr>
+        <p:txBody>
+          <a:bodyPr wrap="square" rtlCol="0" anchor="t"/>
+          <a:lstStyle/>
+          <a:p>
+            <a:pPr indent="0" marL="0">
+              <a:buNone/>
+            </a:pPr>
+            <a:r>
+              <a:rPr lang="en-US" sz="1800" b="1" dirty="0">
+                <a:solidFill>
+                  <a:srgbClr val="1F2429"/>
+                </a:solidFill>
+                <a:latin typeface="Calibri" pitchFamily="34" charset="0"/>
+                <a:ea typeface="Calibri" pitchFamily="34" charset="-122"/>
+                <a:cs typeface="Calibri" pitchFamily="34" charset="-120"/>
+              </a:rPr>
+              <a:t>Maps directly to objects</a:t>
+            </a:r>
+            <a:endParaRPr lang="en-US" sz="1800" dirty="0"/>
+          </a:p>
+        </p:txBody>
+      </p:sp>
+      <p:sp>
+        <p:nvSpPr>
+          <p:cNvPr id="19" name="Text 17"/>
+          <p:cNvSpPr txBox="1"/>
+          <p:nvPr/>
+        </p:nvSpPr>
+        <p:spPr>
+          <a:xfrm>
+            <a:off x="914400" y="5544556"/>
+            <a:ext cx="4800600" cy="794614"/>
+          </a:xfrm>
+          <a:prstGeom prst="rect">
+            <a:avLst/>
+          </a:prstGeom>
+          <a:noFill/>
+          <a:ln/>
+        </p:spPr>
+        <p:txBody>
+          <a:bodyPr wrap="square" rtlCol="0" anchor="t"/>
+          <a:lstStyle/>
+          <a:p>
+            <a:pPr indent="0" marL="0">
+              <a:lnSpc>
+                <a:spcPct val="110000"/>
+              </a:lnSpc>
+              <a:buNone/>
+            </a:pPr>
+            <a:r>
+              <a:rPr lang="en-US" sz="1200" dirty="0">
+                <a:solidFill>
+                  <a:srgbClr val="6B7480"/>
+                </a:solidFill>
+                <a:latin typeface="Calibri" pitchFamily="34" charset="0"/>
+                <a:ea typeface="Calibri" pitchFamily="34" charset="-122"/>
+                <a:cs typeface="Calibri" pitchFamily="34" charset="-120"/>
+              </a:rPr>
+              <a:t>Application objects map straight onto JSON-like documents</a:t>
+            </a:r>
+            <a:endParaRPr lang="en-US" sz="1200" dirty="0"/>
+          </a:p>
+        </p:txBody>
+      </p:sp>
+      <p:sp>
+        <p:nvSpPr>
+          <p:cNvPr id="20" name="Text 18"/>
+          <p:cNvSpPr txBox="1"/>
+          <p:nvPr/>
+        </p:nvSpPr>
+        <p:spPr>
+          <a:xfrm>
+            <a:off x="6263640" y="1188720"/>
+            <a:ext cx="5349240" cy="274320"/>
+          </a:xfrm>
+          <a:prstGeom prst="rect">
+            <a:avLst/>
+          </a:prstGeom>
+          <a:noFill/>
+          <a:ln/>
+        </p:spPr>
+        <p:txBody>
+          <a:bodyPr wrap="square" rtlCol="0" anchor="ctr"/>
+          <a:lstStyle/>
+          <a:p>
+            <a:pPr indent="0" marL="0">
+              <a:buNone/>
+            </a:pPr>
+            <a:r>
+              <a:rPr lang="en-US" sz="1200" b="1" spc="100" kern="0" dirty="0">
+                <a:solidFill>
+                  <a:srgbClr val="E8A33D"/>
+                </a:solidFill>
+                <a:latin typeface="Calibri" pitchFamily="34" charset="0"/>
+                <a:ea typeface="Calibri" pitchFamily="34" charset="-122"/>
+                <a:cs typeface="Calibri" pitchFamily="34" charset="-120"/>
+              </a:rPr>
+              <a:t>KEY-VALUE  /  COLUMN-FAMILY  /  GRAPH</a:t>
+            </a:r>
+            <a:endParaRPr lang="en-US" sz="1200" dirty="0"/>
+          </a:p>
+        </p:txBody>
+      </p:sp>
+      <p:sp>
+        <p:nvSpPr>
+          <p:cNvPr id="21" name="Shape 19"/>
+          <p:cNvSpPr/>
+          <p:nvPr/>
+        </p:nvSpPr>
+        <p:spPr>
+          <a:xfrm>
+            <a:off x="6263640" y="1536192"/>
+            <a:ext cx="5349240" cy="1444752"/>
+          </a:xfrm>
+          <a:prstGeom prst="roundRect">
+            <a:avLst>
+              <a:gd name="adj" fmla="val 5063"/>
+            </a:avLst>
+          </a:prstGeom>
+          <a:solidFill>
+            <a:srgbClr val="FFFFFF"/>
+          </a:solidFill>
+          <a:ln w="22225">
+            <a:solidFill>
+              <a:srgbClr val="2FE6C4"/>
+            </a:solidFill>
+            <a:prstDash val="solid"/>
+          </a:ln>
+          <a:effectLst>
+            <a:outerShdw sx="100000" sy="100000" kx="0" ky="0" algn="bl" rotWithShape="0" blurRad="76200" dist="25400" dir="5400000">
+              <a:srgbClr val="1F2429">
+                <a:alpha val="16000"/>
+              </a:srgbClr>
+            </a:outerShdw>
+          </a:effectLst>
+        </p:spPr>
+      </p:sp>
+      <p:sp>
+        <p:nvSpPr>
+          <p:cNvPr id="22" name="Shape 20"/>
+          <p:cNvSpPr/>
+          <p:nvPr/>
+        </p:nvSpPr>
+        <p:spPr>
+          <a:xfrm>
+            <a:off x="6409944" y="2057400"/>
+            <a:ext cx="91440" cy="310896"/>
+          </a:xfrm>
+          <a:prstGeom prst="rect">
+            <a:avLst/>
+          </a:prstGeom>
+          <a:solidFill>
+            <a:srgbClr val="2FE6C4"/>
+          </a:solidFill>
+          <a:ln/>
+        </p:spPr>
+      </p:sp>
+      <p:sp>
+        <p:nvSpPr>
+          <p:cNvPr id="23" name="Text 21"/>
+          <p:cNvSpPr txBox="1"/>
+          <p:nvPr/>
+        </p:nvSpPr>
+        <p:spPr>
+          <a:xfrm>
+            <a:off x="6629400" y="1609344"/>
+            <a:ext cx="4800600" cy="650138"/>
+          </a:xfrm>
+          <a:prstGeom prst="rect">
+            <a:avLst/>
+          </a:prstGeom>
+          <a:noFill/>
+          <a:ln/>
+        </p:spPr>
+        <p:txBody>
+          <a:bodyPr wrap="square" rtlCol="0" anchor="t"/>
+          <a:lstStyle/>
+          <a:p>
+            <a:pPr indent="0" marL="0">
+              <a:buNone/>
+            </a:pPr>
+            <a:r>
+              <a:rPr lang="en-US" sz="1800" b="1" dirty="0">
+                <a:solidFill>
+                  <a:srgbClr val="1F2429"/>
+                </a:solidFill>
+                <a:latin typeface="Calibri" pitchFamily="34" charset="0"/>
+                <a:ea typeface="Calibri" pitchFamily="34" charset="-122"/>
+                <a:cs typeface="Calibri" pitchFamily="34" charset="-120"/>
+              </a:rPr>
+              <a:t>Key-value: fast, opaque</a:t>
+            </a:r>
+            <a:endParaRPr lang="en-US" sz="1800" dirty="0"/>
+          </a:p>
+        </p:txBody>
+      </p:sp>
+      <p:sp>
+        <p:nvSpPr>
+          <p:cNvPr id="24" name="Text 22"/>
+          <p:cNvSpPr txBox="1"/>
+          <p:nvPr/>
+        </p:nvSpPr>
+        <p:spPr>
+          <a:xfrm>
+            <a:off x="6629400" y="2142988"/>
+            <a:ext cx="4800600" cy="794614"/>
+          </a:xfrm>
+          <a:prstGeom prst="rect">
+            <a:avLst/>
+          </a:prstGeom>
+          <a:noFill/>
+          <a:ln/>
+        </p:spPr>
+        <p:txBody>
+          <a:bodyPr wrap="square" rtlCol="0" anchor="t"/>
+          <a:lstStyle/>
+          <a:p>
+            <a:pPr indent="0" marL="0">
+              <a:lnSpc>
+                <a:spcPct val="110000"/>
+              </a:lnSpc>
+              <a:buNone/>
+            </a:pPr>
+            <a:r>
+              <a:rPr lang="en-US" sz="1200" dirty="0">
+                <a:solidFill>
+                  <a:srgbClr val="6B7480"/>
+                </a:solidFill>
+                <a:latin typeface="Calibri" pitchFamily="34" charset="0"/>
+                <a:ea typeface="Calibri" pitchFamily="34" charset="-122"/>
+                <a:cs typeface="Calibri" pitchFamily="34" charset="-120"/>
+              </a:rPr>
+              <a:t>user:4821 maps to one blob; nothing can be queried inside it</a:t>
+            </a:r>
+            <a:endParaRPr lang="en-US" sz="1200" dirty="0"/>
+          </a:p>
+        </p:txBody>
+      </p:sp>
+      <p:sp>
+        <p:nvSpPr>
+          <p:cNvPr id="25" name="Shape 23"/>
+          <p:cNvSpPr/>
+          <p:nvPr/>
+        </p:nvSpPr>
+        <p:spPr>
+          <a:xfrm>
+            <a:off x="8938260" y="2980944"/>
+            <a:ext cx="0" cy="256032"/>
+          </a:xfrm>
+          <a:prstGeom prst="line">
+            <a:avLst/>
+          </a:prstGeom>
+          <a:noFill/>
+          <a:ln w="25400">
+            <a:solidFill>
+              <a:srgbClr val="8A939B"/>
+            </a:solidFill>
+            <a:prstDash val="solid"/>
+            <a:tailEnd type="triangle"/>
+          </a:ln>
+        </p:spPr>
+      </p:sp>
+      <p:sp>
+        <p:nvSpPr>
+          <p:cNvPr id="26" name="Shape 24"/>
+          <p:cNvSpPr/>
+          <p:nvPr/>
+        </p:nvSpPr>
+        <p:spPr>
+          <a:xfrm>
+            <a:off x="6263640" y="3236976"/>
+            <a:ext cx="5349240" cy="1444752"/>
+          </a:xfrm>
+          <a:prstGeom prst="roundRect">
+            <a:avLst>
+              <a:gd name="adj" fmla="val 5063"/>
+            </a:avLst>
+          </a:prstGeom>
+          <a:solidFill>
+            <a:srgbClr val="FFFFFF"/>
+          </a:solidFill>
+          <a:ln w="22225">
+            <a:solidFill>
+              <a:srgbClr val="8B7FD9"/>
+            </a:solidFill>
+            <a:prstDash val="solid"/>
+          </a:ln>
+          <a:effectLst>
+            <a:outerShdw sx="100000" sy="100000" kx="0" ky="0" algn="bl" rotWithShape="0" blurRad="76200" dist="25400" dir="5400000">
+              <a:srgbClr val="1F2429">
+                <a:alpha val="16000"/>
+              </a:srgbClr>
+            </a:outerShdw>
+          </a:effectLst>
+        </p:spPr>
+      </p:sp>
+      <p:sp>
+        <p:nvSpPr>
+          <p:cNvPr id="27" name="Shape 25"/>
+          <p:cNvSpPr/>
+          <p:nvPr/>
+        </p:nvSpPr>
+        <p:spPr>
+          <a:xfrm>
+            <a:off x="6409944" y="3758184"/>
+            <a:ext cx="91440" cy="310896"/>
+          </a:xfrm>
+          <a:prstGeom prst="rect">
+            <a:avLst/>
+          </a:prstGeom>
+          <a:solidFill>
+            <a:srgbClr val="8B7FD9"/>
+          </a:solidFill>
+          <a:ln/>
+        </p:spPr>
+      </p:sp>
+      <p:sp>
+        <p:nvSpPr>
+          <p:cNvPr id="28" name="Text 26"/>
+          <p:cNvSpPr txBox="1"/>
+          <p:nvPr/>
+        </p:nvSpPr>
+        <p:spPr>
+          <a:xfrm>
+            <a:off x="6629400" y="3310128"/>
+            <a:ext cx="4800600" cy="650138"/>
+          </a:xfrm>
+          <a:prstGeom prst="rect">
+            <a:avLst/>
+          </a:prstGeom>
+          <a:noFill/>
+          <a:ln/>
+        </p:spPr>
+        <p:txBody>
+          <a:bodyPr wrap="square" rtlCol="0" anchor="t"/>
+          <a:lstStyle/>
+          <a:p>
+            <a:pPr indent="0" marL="0">
+              <a:buNone/>
+            </a:pPr>
+            <a:r>
+              <a:rPr lang="en-US" sz="1800" b="1" dirty="0">
+                <a:solidFill>
+                  <a:srgbClr val="1F2429"/>
+                </a:solidFill>
+                <a:latin typeface="Calibri" pitchFamily="34" charset="0"/>
+                <a:ea typeface="Calibri" pitchFamily="34" charset="-122"/>
+                <a:cs typeface="Calibri" pitchFamily="34" charset="-120"/>
+              </a:rPr>
+              <a:t>Column-family: wide rows</a:t>
+            </a:r>
+            <a:endParaRPr lang="en-US" sz="1800" dirty="0"/>
+          </a:p>
+        </p:txBody>
+      </p:sp>
+      <p:sp>
+        <p:nvSpPr>
+          <p:cNvPr id="29" name="Text 27"/>
+          <p:cNvSpPr txBox="1"/>
+          <p:nvPr/>
+        </p:nvSpPr>
+        <p:spPr>
+          <a:xfrm>
+            <a:off x="6629400" y="3843772"/>
+            <a:ext cx="4800600" cy="794614"/>
+          </a:xfrm>
+          <a:prstGeom prst="rect">
+            <a:avLst/>
+          </a:prstGeom>
+          <a:noFill/>
+          <a:ln/>
+        </p:spPr>
+        <p:txBody>
+          <a:bodyPr wrap="square" rtlCol="0" anchor="t"/>
+          <a:lstStyle/>
+          <a:p>
+            <a:pPr indent="0" marL="0">
+              <a:lnSpc>
+                <a:spcPct val="110000"/>
+              </a:lnSpc>
+              <a:buNone/>
+            </a:pPr>
+            <a:r>
+              <a:rPr lang="en-US" sz="1200" dirty="0">
+                <a:solidFill>
+                  <a:srgbClr val="6B7480"/>
+                </a:solidFill>
+                <a:latin typeface="Calibri" pitchFamily="34" charset="0"/>
+                <a:ea typeface="Calibri" pitchFamily="34" charset="-122"/>
+                <a:cs typeface="Calibri" pitchFamily="34" charset="-120"/>
+              </a:rPr>
+              <a:t>One row per user, with columns grouped by feature</a:t>
+            </a:r>
+            <a:endParaRPr lang="en-US" sz="1200" dirty="0"/>
+          </a:p>
+        </p:txBody>
+      </p:sp>
+      <p:sp>
+        <p:nvSpPr>
+          <p:cNvPr id="30" name="Shape 28"/>
+          <p:cNvSpPr/>
+          <p:nvPr/>
+        </p:nvSpPr>
+        <p:spPr>
+          <a:xfrm>
+            <a:off x="8938260" y="4681728"/>
+            <a:ext cx="0" cy="256032"/>
+          </a:xfrm>
+          <a:prstGeom prst="line">
+            <a:avLst/>
+          </a:prstGeom>
+          <a:noFill/>
+          <a:ln w="25400">
+            <a:solidFill>
+              <a:srgbClr val="8A939B"/>
+            </a:solidFill>
+            <a:prstDash val="solid"/>
+            <a:tailEnd type="triangle"/>
+          </a:ln>
+        </p:spPr>
+      </p:sp>
+      <p:sp>
+        <p:nvSpPr>
+          <p:cNvPr id="31" name="Shape 29"/>
+          <p:cNvSpPr/>
+          <p:nvPr/>
+        </p:nvSpPr>
+        <p:spPr>
+          <a:xfrm>
+            <a:off x="6263640" y="4937760"/>
+            <a:ext cx="5349240" cy="1444752"/>
+          </a:xfrm>
+          <a:prstGeom prst="roundRect">
+            <a:avLst>
+              <a:gd name="adj" fmla="val 5063"/>
+            </a:avLst>
+          </a:prstGeom>
+          <a:solidFill>
+            <a:srgbClr val="FFFFFF"/>
+          </a:solidFill>
+          <a:ln w="22225">
+            <a:solidFill>
+              <a:srgbClr val="E8A33D"/>
+            </a:solidFill>
+            <a:prstDash val="solid"/>
+          </a:ln>
+          <a:effectLst>
+            <a:outerShdw sx="100000" sy="100000" kx="0" ky="0" algn="bl" rotWithShape="0" blurRad="76200" dist="25400" dir="5400000">
+              <a:srgbClr val="1F2429">
+                <a:alpha val="16000"/>
+              </a:srgbClr>
+            </a:outerShdw>
+          </a:effectLst>
+        </p:spPr>
+      </p:sp>
+      <p:sp>
+        <p:nvSpPr>
+          <p:cNvPr id="32" name="Shape 30"/>
+          <p:cNvSpPr/>
+          <p:nvPr/>
+        </p:nvSpPr>
+        <p:spPr>
+          <a:xfrm>
+            <a:off x="6409944" y="5458968"/>
+            <a:ext cx="91440" cy="310896"/>
+          </a:xfrm>
+          <a:prstGeom prst="rect">
+            <a:avLst/>
+          </a:prstGeom>
+          <a:solidFill>
+            <a:srgbClr val="E8A33D"/>
+          </a:solidFill>
+          <a:ln/>
+        </p:spPr>
+      </p:sp>
+      <p:sp>
+        <p:nvSpPr>
+          <p:cNvPr id="33" name="Text 31"/>
+          <p:cNvSpPr txBox="1"/>
+          <p:nvPr/>
+        </p:nvSpPr>
+        <p:spPr>
+          <a:xfrm>
+            <a:off x="6629400" y="5010912"/>
+            <a:ext cx="4800600" cy="650138"/>
+          </a:xfrm>
+          <a:prstGeom prst="rect">
+            <a:avLst/>
+          </a:prstGeom>
+          <a:noFill/>
+          <a:ln/>
+        </p:spPr>
+        <p:txBody>
+          <a:bodyPr wrap="square" rtlCol="0" anchor="t"/>
+          <a:lstStyle/>
+          <a:p>
+            <a:pPr indent="0" marL="0">
+              <a:buNone/>
+            </a:pPr>
+            <a:r>
+              <a:rPr lang="en-US" sz="1800" b="1" dirty="0">
+                <a:solidFill>
+                  <a:srgbClr val="1F2429"/>
+                </a:solidFill>
+                <a:latin typeface="Calibri" pitchFamily="34" charset="0"/>
+                <a:ea typeface="Calibri" pitchFamily="34" charset="-122"/>
+                <a:cs typeface="Calibri" pitchFamily="34" charset="-120"/>
+              </a:rPr>
+              <a:t>Graph: relationships first</a:t>
+            </a:r>
+            <a:endParaRPr lang="en-US" sz="1800" dirty="0"/>
+          </a:p>
+        </p:txBody>
+      </p:sp>
+      <p:sp>
+        <p:nvSpPr>
+          <p:cNvPr id="34" name="Text 32"/>
+          <p:cNvSpPr txBox="1"/>
+          <p:nvPr/>
+        </p:nvSpPr>
+        <p:spPr>
+          <a:xfrm>
+            <a:off x="6629400" y="5544556"/>
+            <a:ext cx="4800600" cy="794614"/>
+          </a:xfrm>
+          <a:prstGeom prst="rect">
+            <a:avLst/>
+          </a:prstGeom>
+          <a:noFill/>
+          <a:ln/>
+        </p:spPr>
+        <p:txBody>
+          <a:bodyPr wrap="square" rtlCol="0" anchor="t"/>
+          <a:lstStyle/>
+          <a:p>
+            <a:pPr indent="0" marL="0">
+              <a:lnSpc>
+                <a:spcPct val="110000"/>
+              </a:lnSpc>
+              <a:buNone/>
+            </a:pPr>
+            <a:r>
+              <a:rPr lang="en-US" sz="1200" dirty="0">
+                <a:solidFill>
+                  <a:srgbClr val="6B7480"/>
+                </a:solidFill>
+                <a:latin typeface="Calibri" pitchFamily="34" charset="0"/>
+                <a:ea typeface="Calibri" pitchFamily="34" charset="-122"/>
+                <a:cs typeface="Calibri" pitchFamily="34" charset="-120"/>
+              </a:rPr>
+              <a:t>FOLLOWS edges are followed directly, hop by hop</a:t>
+            </a:r>
+            <a:endParaRPr lang="en-US" sz="1200" dirty="0"/>
+          </a:p>
+        </p:txBody>
+      </p:sp>
+    </p:spTree>
+  </p:cSld>
+  <p:clrMapOvr>
+    <a:masterClrMapping/>
+  </p:clrMapOvr>
+</p:sld>
+</file>
+
+<file path=ppt/slides/slide17.xml><?xml version="1.0" encoding="utf-8"?>
+<p:sld xmlns:a="http://schemas.openxmlformats.org/drawingml/2006/main" xmlns:r="http://schemas.openxmlformats.org/officeDocument/2006/relationships" xmlns:p="http://schemas.openxmlformats.org/presentationml/2006/main">
+  <p:cSld name="Slide 10">
+    <p:bg>
+      <p:bgPr>
+        <a:solidFill>
+          <a:srgbClr val="F7F8F9"/>
+        </a:solidFill>
+      </p:bgPr>
+    </p:bg>
+    <p:spTree>
+      <p:nvGrpSpPr>
+        <p:cNvPr id="1" name=""/>
+        <p:cNvGrpSpPr/>
+        <p:nvPr/>
+      </p:nvGrpSpPr>
+      <p:grpSpPr>
+        <a:xfrm>
+          <a:off x="0" y="0"/>
+          <a:ext cx="0" cy="0"/>
+          <a:chOff x="0" y="0"/>
+          <a:chExt cx="0" cy="0"/>
+        </a:xfrm>
+      </p:grpSpPr>
+      <p:sp>
+        <p:nvSpPr>
+          <p:cNvPr id="2" name="Text 0"/>
+          <p:cNvSpPr txBox="1"/>
+          <p:nvPr/>
+        </p:nvSpPr>
+        <p:spPr>
+          <a:xfrm>
+            <a:off x="548640" y="320040"/>
+            <a:ext cx="9144000" cy="292608"/>
+          </a:xfrm>
+          <a:prstGeom prst="rect">
+            <a:avLst/>
+          </a:prstGeom>
+          <a:noFill/>
+          <a:ln/>
+        </p:spPr>
+        <p:txBody>
+          <a:bodyPr wrap="square" rtlCol="0" anchor="ctr"/>
+          <a:lstStyle/>
+          <a:p>
+            <a:pPr indent="0" marL="0">
+              <a:buNone/>
+            </a:pPr>
+            <a:r>
+              <a:rPr lang="en-US" sz="1200" b="1" spc="150" kern="0" dirty="0">
+                <a:solidFill>
+                  <a:srgbClr val="8B7FD9"/>
+                </a:solidFill>
+                <a:latin typeface="Calibri" pitchFamily="34" charset="0"/>
+                <a:ea typeface="Calibri" pitchFamily="34" charset="-122"/>
+                <a:cs typeface="Calibri" pitchFamily="34" charset="-120"/>
+              </a:rPr>
+              <a:t>WORKED EXAMPLE</a:t>
+            </a:r>
+            <a:endParaRPr lang="en-US" sz="1200" dirty="0"/>
+          </a:p>
+        </p:txBody>
+      </p:sp>
+      <p:sp>
+        <p:nvSpPr>
+          <p:cNvPr id="3" name="Text 1"/>
+          <p:cNvSpPr txBox="1"/>
+          <p:nvPr/>
+        </p:nvSpPr>
+        <p:spPr>
+          <a:xfrm>
+            <a:off x="548640" y="566928"/>
+            <a:ext cx="11064240" cy="640080"/>
+          </a:xfrm>
+          <a:prstGeom prst="rect">
+            <a:avLst/>
+          </a:prstGeom>
+          <a:noFill/>
+          <a:ln/>
+        </p:spPr>
+        <p:txBody>
+          <a:bodyPr wrap="square" rtlCol="0" anchor="ctr"/>
+          <a:lstStyle/>
+          <a:p>
+            <a:pPr indent="0" marL="0">
+              <a:buNone/>
+            </a:pPr>
+            <a:r>
+              <a:rPr lang="en-US" sz="2500" b="1" dirty="0">
+                <a:solidFill>
+                  <a:srgbClr val="1F2429"/>
+                </a:solidFill>
+                <a:latin typeface="Calibri" pitchFamily="34" charset="0"/>
+                <a:ea typeface="Calibri" pitchFamily="34" charset="-122"/>
+                <a:cs typeface="Calibri" pitchFamily="34" charset="-120"/>
+              </a:rPr>
+              <a:t>Friend-of-Friend Query, Compared</a:t>
+            </a:r>
+            <a:endParaRPr lang="en-US" sz="2500" dirty="0"/>
+          </a:p>
+        </p:txBody>
+      </p:sp>
+      <p:sp>
+        <p:nvSpPr>
+          <p:cNvPr id="4" name="Text 2"/>
+          <p:cNvSpPr txBox="1"/>
+          <p:nvPr/>
+        </p:nvSpPr>
+        <p:spPr>
+          <a:xfrm>
+            <a:off x="9951415" y="6455664"/>
+            <a:ext cx="2011680" cy="292608"/>
+          </a:xfrm>
+          <a:prstGeom prst="rect">
+            <a:avLst/>
+          </a:prstGeom>
+          <a:noFill/>
+          <a:ln/>
+        </p:spPr>
+        <p:txBody>
+          <a:bodyPr wrap="square" rtlCol="0" anchor="ctr"/>
+          <a:lstStyle/>
+          <a:p>
+            <a:pPr algn="r" indent="0" marL="0">
+              <a:buNone/>
+            </a:pPr>
+            <a:r>
+              <a:rPr lang="en-US" sz="1200" u="sng" dirty="0">
+                <a:solidFill>
+                  <a:srgbClr val="8A939B"/>
+                </a:solidFill>
+                <a:latin typeface="Calibri" pitchFamily="34" charset="0"/>
+                <a:ea typeface="Calibri" pitchFamily="34" charset="-122"/>
+                <a:cs typeface="Calibri" pitchFamily="34" charset="-120"/>
+                <a:hlinkClick r:id="rId1" invalidUrl="" action="" tgtFrame="" tooltip="" history="1" highlightClick="0" endSnd="0">
+                  <a:extLst>
+                    <a:ext uri="{A12FA001-AC4F-418D-AE19-62706E023703}">
+                      <ahyp:hlinkClr xmlns:ahyp="http://schemas.microsoft.com/office/drawing/2018/hyperlinkcolor" val="tx"/>
+                    </a:ext>
+                  </a:extLst>
+                </a:hlinkClick>
+              </a:rPr>
+              <a:t>cuinotes.com</a:t>
+            </a:r>
+            <a:pPr algn="r" indent="0" marL="0">
+              <a:buNone/>
+            </a:pPr>
+            <a:r>
+              <a:rPr lang="en-US" sz="1200" dirty="0">
+                <a:solidFill>
+                  <a:srgbClr val="8A939B"/>
+                </a:solidFill>
+                <a:latin typeface="Calibri" pitchFamily="34" charset="0"/>
+                <a:ea typeface="Calibri" pitchFamily="34" charset="-122"/>
+                <a:cs typeface="Calibri" pitchFamily="34" charset="-120"/>
+              </a:rPr>
               <a:t>  ·  13</a:t>
             </a:r>
-            <a:endParaRPr lang="en-US" sz="1000" dirty="0"/>
+            <a:endParaRPr lang="en-US" sz="1200" dirty="0"/>
+          </a:p>
+        </p:txBody>
+      </p:sp>
+      <p:sp>
+        <p:nvSpPr>
+          <p:cNvPr id="5" name="Shape 3"/>
+          <p:cNvSpPr/>
+          <p:nvPr/>
+        </p:nvSpPr>
+        <p:spPr>
+          <a:xfrm>
+            <a:off x="548640" y="1280160"/>
+            <a:ext cx="3474720" cy="2286000"/>
+          </a:xfrm>
+          <a:prstGeom prst="roundRect">
+            <a:avLst>
+              <a:gd name="adj" fmla="val 3200"/>
+            </a:avLst>
+          </a:prstGeom>
+          <a:solidFill>
+            <a:srgbClr val="FFFFFF"/>
+          </a:solidFill>
+          <a:ln w="22225">
+            <a:solidFill>
+              <a:srgbClr val="2FE6C4"/>
+            </a:solidFill>
+            <a:prstDash val="solid"/>
+          </a:ln>
+          <a:effectLst>
+            <a:outerShdw sx="100000" sy="100000" kx="0" ky="0" algn="bl" rotWithShape="0" blurRad="63500" dist="25400" dir="5400000">
+              <a:srgbClr val="1F2429">
+                <a:alpha val="15000"/>
+              </a:srgbClr>
+            </a:outerShdw>
+          </a:effectLst>
+        </p:spPr>
+      </p:sp>
+      <p:sp>
+        <p:nvSpPr>
+          <p:cNvPr id="6" name="Shape 4"/>
+          <p:cNvSpPr/>
+          <p:nvPr/>
+        </p:nvSpPr>
+        <p:spPr>
+          <a:xfrm>
+            <a:off x="713232" y="1426464"/>
+            <a:ext cx="201168" cy="201168"/>
+          </a:xfrm>
+          <a:prstGeom prst="ellipse">
+            <a:avLst/>
+          </a:prstGeom>
+          <a:solidFill>
+            <a:srgbClr val="2FE6C4"/>
+          </a:solidFill>
+          <a:ln/>
+        </p:spPr>
+      </p:sp>
+      <p:sp>
+        <p:nvSpPr>
+          <p:cNvPr id="7" name="Text 5"/>
+          <p:cNvSpPr txBox="1"/>
+          <p:nvPr/>
+        </p:nvSpPr>
+        <p:spPr>
+          <a:xfrm>
+            <a:off x="1005840" y="1371600"/>
+            <a:ext cx="2834640" cy="365760"/>
+          </a:xfrm>
+          <a:prstGeom prst="rect">
+            <a:avLst/>
+          </a:prstGeom>
+          <a:noFill/>
+          <a:ln/>
+        </p:spPr>
+        <p:txBody>
+          <a:bodyPr wrap="square" rtlCol="0" anchor="t"/>
+          <a:lstStyle/>
+          <a:p>
+            <a:pPr indent="0" marL="0">
+              <a:buNone/>
+            </a:pPr>
+            <a:r>
+              <a:rPr lang="en-US" sz="1800" b="1" dirty="0">
+                <a:solidFill>
+                  <a:srgbClr val="1F2429"/>
+                </a:solidFill>
+                <a:latin typeface="Calibri" pitchFamily="34" charset="0"/>
+                <a:ea typeface="Calibri" pitchFamily="34" charset="-122"/>
+                <a:cs typeface="Calibri" pitchFamily="34" charset="-120"/>
+              </a:rPr>
+              <a:t>Relational (SQL)</a:t>
+            </a:r>
+            <a:endParaRPr lang="en-US" sz="1800" dirty="0"/>
+          </a:p>
+        </p:txBody>
+      </p:sp>
+      <p:sp>
+        <p:nvSpPr>
+          <p:cNvPr id="8" name="Text 6"/>
+          <p:cNvSpPr txBox="1"/>
+          <p:nvPr/>
+        </p:nvSpPr>
+        <p:spPr>
+          <a:xfrm>
+            <a:off x="749808" y="1783080"/>
+            <a:ext cx="3072384" cy="1691640"/>
+          </a:xfrm>
+          <a:prstGeom prst="rect">
+            <a:avLst/>
+          </a:prstGeom>
+          <a:noFill/>
+          <a:ln/>
+        </p:spPr>
+        <p:txBody>
+          <a:bodyPr wrap="square" rtlCol="0" anchor="t"/>
+          <a:lstStyle/>
+          <a:p>
+            <a:pPr indent="0" marL="0">
+              <a:lnSpc>
+                <a:spcPct val="112000"/>
+              </a:lnSpc>
+              <a:buNone/>
+            </a:pPr>
+            <a:r>
+              <a:rPr lang="en-US" sz="1200" dirty="0">
+                <a:solidFill>
+                  <a:srgbClr val="6B7480"/>
+                </a:solidFill>
+                <a:latin typeface="Calibri" pitchFamily="34" charset="0"/>
+                <a:ea typeface="Calibri" pitchFamily="34" charset="-122"/>
+                <a:cs typeface="Calibri" pitchFamily="34" charset="-120"/>
+              </a:rPr>
+              <a:t>Two self-joins on a Friendships table; cost grows with each extra hop</a:t>
+            </a:r>
+            <a:endParaRPr lang="en-US" sz="1200" dirty="0"/>
+          </a:p>
+        </p:txBody>
+      </p:sp>
+      <p:sp>
+        <p:nvSpPr>
+          <p:cNvPr id="9" name="Shape 7"/>
+          <p:cNvSpPr/>
+          <p:nvPr/>
+        </p:nvSpPr>
+        <p:spPr>
+          <a:xfrm>
+            <a:off x="4343400" y="1280160"/>
+            <a:ext cx="3474720" cy="2286000"/>
+          </a:xfrm>
+          <a:prstGeom prst="roundRect">
+            <a:avLst>
+              <a:gd name="adj" fmla="val 3200"/>
+            </a:avLst>
+          </a:prstGeom>
+          <a:solidFill>
+            <a:srgbClr val="FFFFFF"/>
+          </a:solidFill>
+          <a:ln w="22225">
+            <a:solidFill>
+              <a:srgbClr val="8B7FD9"/>
+            </a:solidFill>
+            <a:prstDash val="solid"/>
+          </a:ln>
+          <a:effectLst>
+            <a:outerShdw sx="100000" sy="100000" kx="0" ky="0" algn="bl" rotWithShape="0" blurRad="63500" dist="25400" dir="5400000">
+              <a:srgbClr val="1F2429">
+                <a:alpha val="15000"/>
+              </a:srgbClr>
+            </a:outerShdw>
+          </a:effectLst>
+        </p:spPr>
+      </p:sp>
+      <p:sp>
+        <p:nvSpPr>
+          <p:cNvPr id="10" name="Shape 8"/>
+          <p:cNvSpPr/>
+          <p:nvPr/>
+        </p:nvSpPr>
+        <p:spPr>
+          <a:xfrm>
+            <a:off x="4507992" y="1426464"/>
+            <a:ext cx="201168" cy="201168"/>
+          </a:xfrm>
+          <a:prstGeom prst="ellipse">
+            <a:avLst/>
+          </a:prstGeom>
+          <a:solidFill>
+            <a:srgbClr val="8B7FD9"/>
+          </a:solidFill>
+          <a:ln/>
+        </p:spPr>
+      </p:sp>
+      <p:sp>
+        <p:nvSpPr>
+          <p:cNvPr id="11" name="Text 9"/>
+          <p:cNvSpPr txBox="1"/>
+          <p:nvPr/>
+        </p:nvSpPr>
+        <p:spPr>
+          <a:xfrm>
+            <a:off x="4800600" y="1371600"/>
+            <a:ext cx="2834640" cy="365760"/>
+          </a:xfrm>
+          <a:prstGeom prst="rect">
+            <a:avLst/>
+          </a:prstGeom>
+          <a:noFill/>
+          <a:ln/>
+        </p:spPr>
+        <p:txBody>
+          <a:bodyPr wrap="square" rtlCol="0" anchor="t"/>
+          <a:lstStyle/>
+          <a:p>
+            <a:pPr indent="0" marL="0">
+              <a:buNone/>
+            </a:pPr>
+            <a:r>
+              <a:rPr lang="en-US" sz="1800" b="1" dirty="0">
+                <a:solidFill>
+                  <a:srgbClr val="1F2429"/>
+                </a:solidFill>
+                <a:latin typeface="Calibri" pitchFamily="34" charset="0"/>
+                <a:ea typeface="Calibri" pitchFamily="34" charset="-122"/>
+                <a:cs typeface="Calibri" pitchFamily="34" charset="-120"/>
+              </a:rPr>
+              <a:t>Graph (Neo4j)</a:t>
+            </a:r>
+            <a:endParaRPr lang="en-US" sz="1800" dirty="0"/>
+          </a:p>
+        </p:txBody>
+      </p:sp>
+      <p:sp>
+        <p:nvSpPr>
+          <p:cNvPr id="12" name="Text 10"/>
+          <p:cNvSpPr txBox="1"/>
+          <p:nvPr/>
+        </p:nvSpPr>
+        <p:spPr>
+          <a:xfrm>
+            <a:off x="4544568" y="1783080"/>
+            <a:ext cx="3072384" cy="1691640"/>
+          </a:xfrm>
+          <a:prstGeom prst="rect">
+            <a:avLst/>
+          </a:prstGeom>
+          <a:noFill/>
+          <a:ln/>
+        </p:spPr>
+        <p:txBody>
+          <a:bodyPr wrap="square" rtlCol="0" anchor="t"/>
+          <a:lstStyle/>
+          <a:p>
+            <a:pPr indent="0" marL="0">
+              <a:lnSpc>
+                <a:spcPct val="112000"/>
+              </a:lnSpc>
+              <a:buNone/>
+            </a:pPr>
+            <a:r>
+              <a:rPr lang="en-US" sz="1200" dirty="0">
+                <a:solidFill>
+                  <a:srgbClr val="6B7480"/>
+                </a:solidFill>
+                <a:latin typeface="Calibri" pitchFamily="34" charset="0"/>
+                <a:ea typeface="Calibri" pitchFamily="34" charset="-122"/>
+                <a:cs typeface="Calibri" pitchFamily="34" charset="-120"/>
+              </a:rPr>
+              <a:t>Traverse FOLLOWS edges directly; each hop is a pointer follow</a:t>
+            </a:r>
+            <a:endParaRPr lang="en-US" sz="1200" dirty="0"/>
+          </a:p>
+        </p:txBody>
+      </p:sp>
+      <p:sp>
+        <p:nvSpPr>
+          <p:cNvPr id="13" name="Shape 11"/>
+          <p:cNvSpPr/>
+          <p:nvPr/>
+        </p:nvSpPr>
+        <p:spPr>
+          <a:xfrm>
+            <a:off x="8138160" y="1280160"/>
+            <a:ext cx="3474720" cy="2286000"/>
+          </a:xfrm>
+          <a:prstGeom prst="roundRect">
+            <a:avLst>
+              <a:gd name="adj" fmla="val 3200"/>
+            </a:avLst>
+          </a:prstGeom>
+          <a:solidFill>
+            <a:srgbClr val="FFFFFF"/>
+          </a:solidFill>
+          <a:ln w="22225">
+            <a:solidFill>
+              <a:srgbClr val="E8A33D"/>
+            </a:solidFill>
+            <a:prstDash val="solid"/>
+          </a:ln>
+          <a:effectLst>
+            <a:outerShdw sx="100000" sy="100000" kx="0" ky="0" algn="bl" rotWithShape="0" blurRad="63500" dist="25400" dir="5400000">
+              <a:srgbClr val="1F2429">
+                <a:alpha val="15000"/>
+              </a:srgbClr>
+            </a:outerShdw>
+          </a:effectLst>
+        </p:spPr>
+      </p:sp>
+      <p:sp>
+        <p:nvSpPr>
+          <p:cNvPr id="14" name="Shape 12"/>
+          <p:cNvSpPr/>
+          <p:nvPr/>
+        </p:nvSpPr>
+        <p:spPr>
+          <a:xfrm>
+            <a:off x="8302752" y="1426464"/>
+            <a:ext cx="201168" cy="201168"/>
+          </a:xfrm>
+          <a:prstGeom prst="ellipse">
+            <a:avLst/>
+          </a:prstGeom>
+          <a:solidFill>
+            <a:srgbClr val="E8A33D"/>
+          </a:solidFill>
+          <a:ln/>
+        </p:spPr>
+      </p:sp>
+      <p:sp>
+        <p:nvSpPr>
+          <p:cNvPr id="15" name="Text 13"/>
+          <p:cNvSpPr txBox="1"/>
+          <p:nvPr/>
+        </p:nvSpPr>
+        <p:spPr>
+          <a:xfrm>
+            <a:off x="8595360" y="1371600"/>
+            <a:ext cx="2834640" cy="365760"/>
+          </a:xfrm>
+          <a:prstGeom prst="rect">
+            <a:avLst/>
+          </a:prstGeom>
+          <a:noFill/>
+          <a:ln/>
+        </p:spPr>
+        <p:txBody>
+          <a:bodyPr wrap="square" rtlCol="0" anchor="t"/>
+          <a:lstStyle/>
+          <a:p>
+            <a:pPr indent="0" marL="0">
+              <a:buNone/>
+            </a:pPr>
+            <a:r>
+              <a:rPr lang="en-US" sz="1800" b="1" dirty="0">
+                <a:solidFill>
+                  <a:srgbClr val="1F2429"/>
+                </a:solidFill>
+                <a:latin typeface="Calibri" pitchFamily="34" charset="0"/>
+                <a:ea typeface="Calibri" pitchFamily="34" charset="-122"/>
+                <a:cs typeface="Calibri" pitchFamily="34" charset="-120"/>
+              </a:rPr>
+              <a:t>Document (MongoDB)</a:t>
+            </a:r>
+            <a:endParaRPr lang="en-US" sz="1800" dirty="0"/>
+          </a:p>
+        </p:txBody>
+      </p:sp>
+      <p:sp>
+        <p:nvSpPr>
+          <p:cNvPr id="16" name="Text 14"/>
+          <p:cNvSpPr txBox="1"/>
+          <p:nvPr/>
+        </p:nvSpPr>
+        <p:spPr>
+          <a:xfrm>
+            <a:off x="8339328" y="1783080"/>
+            <a:ext cx="3072384" cy="1691640"/>
+          </a:xfrm>
+          <a:prstGeom prst="rect">
+            <a:avLst/>
+          </a:prstGeom>
+          <a:noFill/>
+          <a:ln/>
+        </p:spPr>
+        <p:txBody>
+          <a:bodyPr wrap="square" rtlCol="0" anchor="t"/>
+          <a:lstStyle/>
+          <a:p>
+            <a:pPr indent="0" marL="0">
+              <a:lnSpc>
+                <a:spcPct val="112000"/>
+              </a:lnSpc>
+              <a:buNone/>
+            </a:pPr>
+            <a:r>
+              <a:rPr lang="en-US" sz="1200" dirty="0">
+                <a:solidFill>
+                  <a:srgbClr val="6B7480"/>
+                </a:solidFill>
+                <a:latin typeface="Calibri" pitchFamily="34" charset="0"/>
+                <a:ea typeface="Calibri" pitchFamily="34" charset="-122"/>
+                <a:cs typeface="Calibri" pitchFamily="34" charset="-120"/>
+              </a:rPr>
+              <a:t>Store a friends array per user: one fetch, but large friend lists grow heavy</a:t>
+            </a:r>
+            <a:endParaRPr lang="en-US" sz="1200" dirty="0"/>
+          </a:p>
+        </p:txBody>
+      </p:sp>
+      <p:sp>
+        <p:nvSpPr>
+          <p:cNvPr id="17" name="Shape 15"/>
+          <p:cNvSpPr/>
+          <p:nvPr/>
+        </p:nvSpPr>
+        <p:spPr>
+          <a:xfrm>
+            <a:off x="548640" y="3840480"/>
+            <a:ext cx="3474720" cy="2286000"/>
+          </a:xfrm>
+          <a:prstGeom prst="roundRect">
+            <a:avLst>
+              <a:gd name="adj" fmla="val 3200"/>
+            </a:avLst>
+          </a:prstGeom>
+          <a:solidFill>
+            <a:srgbClr val="FFFFFF"/>
+          </a:solidFill>
+          <a:ln w="22225">
+            <a:solidFill>
+              <a:srgbClr val="2FE6C4"/>
+            </a:solidFill>
+            <a:prstDash val="solid"/>
+          </a:ln>
+          <a:effectLst>
+            <a:outerShdw sx="100000" sy="100000" kx="0" ky="0" algn="bl" rotWithShape="0" blurRad="63500" dist="25400" dir="5400000">
+              <a:srgbClr val="1F2429">
+                <a:alpha val="15000"/>
+              </a:srgbClr>
+            </a:outerShdw>
+          </a:effectLst>
+        </p:spPr>
+      </p:sp>
+      <p:sp>
+        <p:nvSpPr>
+          <p:cNvPr id="18" name="Shape 16"/>
+          <p:cNvSpPr/>
+          <p:nvPr/>
+        </p:nvSpPr>
+        <p:spPr>
+          <a:xfrm>
+            <a:off x="713232" y="3986784"/>
+            <a:ext cx="201168" cy="201168"/>
+          </a:xfrm>
+          <a:prstGeom prst="ellipse">
+            <a:avLst/>
+          </a:prstGeom>
+          <a:solidFill>
+            <a:srgbClr val="2FE6C4"/>
+          </a:solidFill>
+          <a:ln/>
+        </p:spPr>
+      </p:sp>
+      <p:sp>
+        <p:nvSpPr>
+          <p:cNvPr id="19" name="Text 17"/>
+          <p:cNvSpPr txBox="1"/>
+          <p:nvPr/>
+        </p:nvSpPr>
+        <p:spPr>
+          <a:xfrm>
+            <a:off x="1005840" y="3931920"/>
+            <a:ext cx="2834640" cy="365760"/>
+          </a:xfrm>
+          <a:prstGeom prst="rect">
+            <a:avLst/>
+          </a:prstGeom>
+          <a:noFill/>
+          <a:ln/>
+        </p:spPr>
+        <p:txBody>
+          <a:bodyPr wrap="square" rtlCol="0" anchor="t"/>
+          <a:lstStyle/>
+          <a:p>
+            <a:pPr indent="0" marL="0">
+              <a:buNone/>
+            </a:pPr>
+            <a:r>
+              <a:rPr lang="en-US" sz="1800" b="1" dirty="0">
+                <a:solidFill>
+                  <a:srgbClr val="1F2429"/>
+                </a:solidFill>
+                <a:latin typeface="Calibri" pitchFamily="34" charset="0"/>
+                <a:ea typeface="Calibri" pitchFamily="34" charset="-122"/>
+                <a:cs typeface="Calibri" pitchFamily="34" charset="-120"/>
+              </a:rPr>
+              <a:t>Why it matters</a:t>
+            </a:r>
+            <a:endParaRPr lang="en-US" sz="1800" dirty="0"/>
+          </a:p>
+        </p:txBody>
+      </p:sp>
+      <p:sp>
+        <p:nvSpPr>
+          <p:cNvPr id="20" name="Text 18"/>
+          <p:cNvSpPr txBox="1"/>
+          <p:nvPr/>
+        </p:nvSpPr>
+        <p:spPr>
+          <a:xfrm>
+            <a:off x="749808" y="4343400"/>
+            <a:ext cx="3072384" cy="1691640"/>
+          </a:xfrm>
+          <a:prstGeom prst="rect">
+            <a:avLst/>
+          </a:prstGeom>
+          <a:noFill/>
+          <a:ln/>
+        </p:spPr>
+        <p:txBody>
+          <a:bodyPr wrap="square" rtlCol="0" anchor="t"/>
+          <a:lstStyle/>
+          <a:p>
+            <a:pPr indent="0" marL="0">
+              <a:lnSpc>
+                <a:spcPct val="112000"/>
+              </a:lnSpc>
+              <a:buNone/>
+            </a:pPr>
+            <a:r>
+              <a:rPr lang="en-US" sz="1200" dirty="0">
+                <a:solidFill>
+                  <a:srgbClr val="6B7480"/>
+                </a:solidFill>
+                <a:latin typeface="Calibri" pitchFamily="34" charset="0"/>
+                <a:ea typeface="Calibri" pitchFamily="34" charset="-122"/>
+                <a:cs typeface="Calibri" pitchFamily="34" charset="-120"/>
+              </a:rPr>
+              <a:t>The query shape decides the model: join-heavy or traversal-heavy</a:t>
+            </a:r>
+            <a:endParaRPr lang="en-US" sz="1200" dirty="0"/>
+          </a:p>
+        </p:txBody>
+      </p:sp>
+      <p:sp>
+        <p:nvSpPr>
+          <p:cNvPr id="21" name="Shape 19"/>
+          <p:cNvSpPr/>
+          <p:nvPr/>
+        </p:nvSpPr>
+        <p:spPr>
+          <a:xfrm>
+            <a:off x="4343400" y="3840480"/>
+            <a:ext cx="3474720" cy="2286000"/>
+          </a:xfrm>
+          <a:prstGeom prst="roundRect">
+            <a:avLst>
+              <a:gd name="adj" fmla="val 3200"/>
+            </a:avLst>
+          </a:prstGeom>
+          <a:solidFill>
+            <a:srgbClr val="FFFFFF"/>
+          </a:solidFill>
+          <a:ln w="22225">
+            <a:solidFill>
+              <a:srgbClr val="8B7FD9"/>
+            </a:solidFill>
+            <a:prstDash val="solid"/>
+          </a:ln>
+          <a:effectLst>
+            <a:outerShdw sx="100000" sy="100000" kx="0" ky="0" algn="bl" rotWithShape="0" blurRad="63500" dist="25400" dir="5400000">
+              <a:srgbClr val="1F2429">
+                <a:alpha val="15000"/>
+              </a:srgbClr>
+            </a:outerShdw>
+          </a:effectLst>
+        </p:spPr>
+      </p:sp>
+      <p:sp>
+        <p:nvSpPr>
+          <p:cNvPr id="22" name="Shape 20"/>
+          <p:cNvSpPr/>
+          <p:nvPr/>
+        </p:nvSpPr>
+        <p:spPr>
+          <a:xfrm>
+            <a:off x="4507992" y="3986784"/>
+            <a:ext cx="201168" cy="201168"/>
+          </a:xfrm>
+          <a:prstGeom prst="ellipse">
+            <a:avLst/>
+          </a:prstGeom>
+          <a:solidFill>
+            <a:srgbClr val="8B7FD9"/>
+          </a:solidFill>
+          <a:ln/>
+        </p:spPr>
+      </p:sp>
+      <p:sp>
+        <p:nvSpPr>
+          <p:cNvPr id="23" name="Text 21"/>
+          <p:cNvSpPr txBox="1"/>
+          <p:nvPr/>
+        </p:nvSpPr>
+        <p:spPr>
+          <a:xfrm>
+            <a:off x="4800600" y="3931920"/>
+            <a:ext cx="2834640" cy="365760"/>
+          </a:xfrm>
+          <a:prstGeom prst="rect">
+            <a:avLst/>
+          </a:prstGeom>
+          <a:noFill/>
+          <a:ln/>
+        </p:spPr>
+        <p:txBody>
+          <a:bodyPr wrap="square" rtlCol="0" anchor="t"/>
+          <a:lstStyle/>
+          <a:p>
+            <a:pPr indent="0" marL="0">
+              <a:buNone/>
+            </a:pPr>
+            <a:r>
+              <a:rPr lang="en-US" sz="1800" b="1" dirty="0">
+                <a:solidFill>
+                  <a:srgbClr val="1F2429"/>
+                </a:solidFill>
+                <a:latin typeface="Calibri" pitchFamily="34" charset="0"/>
+                <a:ea typeface="Calibri" pitchFamily="34" charset="-122"/>
+                <a:cs typeface="Calibri" pitchFamily="34" charset="-120"/>
+              </a:rPr>
+              <a:t>Practical rule</a:t>
+            </a:r>
+            <a:endParaRPr lang="en-US" sz="1800" dirty="0"/>
+          </a:p>
+        </p:txBody>
+      </p:sp>
+      <p:sp>
+        <p:nvSpPr>
+          <p:cNvPr id="24" name="Text 22"/>
+          <p:cNvSpPr txBox="1"/>
+          <p:nvPr/>
+        </p:nvSpPr>
+        <p:spPr>
+          <a:xfrm>
+            <a:off x="4544568" y="4343400"/>
+            <a:ext cx="3072384" cy="1691640"/>
+          </a:xfrm>
+          <a:prstGeom prst="rect">
+            <a:avLst/>
+          </a:prstGeom>
+          <a:noFill/>
+          <a:ln/>
+        </p:spPr>
+        <p:txBody>
+          <a:bodyPr wrap="square" rtlCol="0" anchor="t"/>
+          <a:lstStyle/>
+          <a:p>
+            <a:pPr indent="0" marL="0">
+              <a:lnSpc>
+                <a:spcPct val="112000"/>
+              </a:lnSpc>
+              <a:buNone/>
+            </a:pPr>
+            <a:r>
+              <a:rPr lang="en-US" sz="1200" dirty="0">
+                <a:solidFill>
+                  <a:srgbClr val="6B7480"/>
+                </a:solidFill>
+                <a:latin typeface="Calibri" pitchFamily="34" charset="0"/>
+                <a:ea typeface="Calibri" pitchFamily="34" charset="-122"/>
+                <a:cs typeface="Calibri" pitchFamily="34" charset="-120"/>
+              </a:rPr>
+              <a:t>Start from the most frequent read path, then pick the model</a:t>
+            </a:r>
+            <a:endParaRPr lang="en-US" sz="1200" dirty="0"/>
+          </a:p>
+        </p:txBody>
+      </p:sp>
+    </p:spTree>
+  </p:cSld>
+  <p:clrMapOvr>
+    <a:masterClrMapping/>
+  </p:clrMapOvr>
+</p:sld>
+</file>
+
+<file path=ppt/slides/slide18.xml><?xml version="1.0" encoding="utf-8"?>
+<p:sld xmlns:a="http://schemas.openxmlformats.org/drawingml/2006/main" xmlns:r="http://schemas.openxmlformats.org/officeDocument/2006/relationships" xmlns:p="http://schemas.openxmlformats.org/presentationml/2006/main">
+  <p:cSld name="Slide 5">
+    <p:bg>
+      <p:bgPr>
+        <a:solidFill>
+          <a:srgbClr val="F7F8F9"/>
+        </a:solidFill>
+      </p:bgPr>
+    </p:bg>
+    <p:spTree>
+      <p:nvGrpSpPr>
+        <p:cNvPr id="1" name=""/>
+        <p:cNvGrpSpPr/>
+        <p:nvPr/>
+      </p:nvGrpSpPr>
+      <p:grpSpPr>
+        <a:xfrm>
+          <a:off x="0" y="0"/>
+          <a:ext cx="0" cy="0"/>
+          <a:chOff x="0" y="0"/>
+          <a:chExt cx="0" cy="0"/>
+        </a:xfrm>
+      </p:grpSpPr>
+      <p:sp>
+        <p:nvSpPr>
+          <p:cNvPr id="2" name="Text 0"/>
+          <p:cNvSpPr txBox="1"/>
+          <p:nvPr/>
+        </p:nvSpPr>
+        <p:spPr>
+          <a:xfrm>
+            <a:off x="548640" y="320040"/>
+            <a:ext cx="9144000" cy="292608"/>
+          </a:xfrm>
+          <a:prstGeom prst="rect">
+            <a:avLst/>
+          </a:prstGeom>
+          <a:noFill/>
+          <a:ln/>
+        </p:spPr>
+        <p:txBody>
+          <a:bodyPr wrap="square" rtlCol="0" anchor="ctr"/>
+          <a:lstStyle/>
+          <a:p>
+            <a:pPr indent="0" marL="0">
+              <a:buNone/>
+            </a:pPr>
+            <a:r>
+              <a:rPr lang="en-US" sz="1200" b="1" spc="150" kern="0" dirty="0">
+                <a:solidFill>
+                  <a:srgbClr val="8B7FD9"/>
+                </a:solidFill>
+                <a:latin typeface="Calibri" pitchFamily="34" charset="0"/>
+                <a:ea typeface="Calibri" pitchFamily="34" charset="-122"/>
+                <a:cs typeface="Calibri" pitchFamily="34" charset="-120"/>
+              </a:rPr>
+              <a:t>CONSISTENCY MODELS</a:t>
+            </a:r>
+            <a:endParaRPr lang="en-US" sz="1200" dirty="0"/>
+          </a:p>
+        </p:txBody>
+      </p:sp>
+      <p:sp>
+        <p:nvSpPr>
+          <p:cNvPr id="3" name="Text 1"/>
+          <p:cNvSpPr txBox="1"/>
+          <p:nvPr/>
+        </p:nvSpPr>
+        <p:spPr>
+          <a:xfrm>
+            <a:off x="548640" y="566928"/>
+            <a:ext cx="11064240" cy="640080"/>
+          </a:xfrm>
+          <a:prstGeom prst="rect">
+            <a:avLst/>
+          </a:prstGeom>
+          <a:noFill/>
+          <a:ln/>
+        </p:spPr>
+        <p:txBody>
+          <a:bodyPr wrap="square" rtlCol="0" anchor="ctr"/>
+          <a:lstStyle/>
+          <a:p>
+            <a:pPr indent="0" marL="0">
+              <a:buNone/>
+            </a:pPr>
+            <a:r>
+              <a:rPr lang="en-US" sz="2500" b="1" dirty="0">
+                <a:solidFill>
+                  <a:srgbClr val="1F2429"/>
+                </a:solidFill>
+                <a:latin typeface="Calibri" pitchFamily="34" charset="0"/>
+                <a:ea typeface="Calibri" pitchFamily="34" charset="-122"/>
+                <a:cs typeface="Calibri" pitchFamily="34" charset="-120"/>
+              </a:rPr>
+              <a:t>ACID vs. BASE</a:t>
+            </a:r>
+            <a:endParaRPr lang="en-US" sz="2500" dirty="0"/>
+          </a:p>
+        </p:txBody>
+      </p:sp>
+      <p:sp>
+        <p:nvSpPr>
+          <p:cNvPr id="4" name="Text 2"/>
+          <p:cNvSpPr txBox="1"/>
+          <p:nvPr/>
+        </p:nvSpPr>
+        <p:spPr>
+          <a:xfrm>
+            <a:off x="9951415" y="6455664"/>
+            <a:ext cx="2011680" cy="292608"/>
+          </a:xfrm>
+          <a:prstGeom prst="rect">
+            <a:avLst/>
+          </a:prstGeom>
+          <a:noFill/>
+          <a:ln/>
+        </p:spPr>
+        <p:txBody>
+          <a:bodyPr wrap="square" rtlCol="0" anchor="ctr"/>
+          <a:lstStyle/>
+          <a:p>
+            <a:pPr algn="r" indent="0" marL="0">
+              <a:buNone/>
+            </a:pPr>
+            <a:r>
+              <a:rPr lang="en-US" sz="1200" u="sng" dirty="0">
+                <a:solidFill>
+                  <a:srgbClr val="8A939B"/>
+                </a:solidFill>
+                <a:latin typeface="Calibri" pitchFamily="34" charset="0"/>
+                <a:ea typeface="Calibri" pitchFamily="34" charset="-122"/>
+                <a:cs typeface="Calibri" pitchFamily="34" charset="-120"/>
+                <a:hlinkClick r:id="rId1" invalidUrl="" action="" tgtFrame="" tooltip="" history="1" highlightClick="0" endSnd="0">
+                  <a:extLst>
+                    <a:ext uri="{A12FA001-AC4F-418D-AE19-62706E023703}">
+                      <ahyp:hlinkClr xmlns:ahyp="http://schemas.microsoft.com/office/drawing/2018/hyperlinkcolor" val="tx"/>
+                    </a:ext>
+                  </a:extLst>
+                </a:hlinkClick>
+              </a:rPr>
+              <a:t>cuinotes.com</a:t>
+            </a:r>
+            <a:pPr algn="r" indent="0" marL="0">
+              <a:buNone/>
+            </a:pPr>
+            <a:r>
+              <a:rPr lang="en-US" sz="1200" dirty="0">
+                <a:solidFill>
+                  <a:srgbClr val="8A939B"/>
+                </a:solidFill>
+                <a:latin typeface="Calibri" pitchFamily="34" charset="0"/>
+                <a:ea typeface="Calibri" pitchFamily="34" charset="-122"/>
+                <a:cs typeface="Calibri" pitchFamily="34" charset="-120"/>
+              </a:rPr>
+              <a:t>  ·  17</a:t>
+            </a:r>
+            <a:endParaRPr lang="en-US" sz="1200" dirty="0"/>
+          </a:p>
+        </p:txBody>
+      </p:sp>
+      <p:sp>
+        <p:nvSpPr>
+          <p:cNvPr id="5" name="Shape 3"/>
+          <p:cNvSpPr/>
+          <p:nvPr/>
+        </p:nvSpPr>
+        <p:spPr>
+          <a:xfrm>
+            <a:off x="548640" y="1280160"/>
+            <a:ext cx="5372100" cy="2286000"/>
+          </a:xfrm>
+          <a:prstGeom prst="roundRect">
+            <a:avLst>
+              <a:gd name="adj" fmla="val 3200"/>
+            </a:avLst>
+          </a:prstGeom>
+          <a:solidFill>
+            <a:srgbClr val="FFFFFF"/>
+          </a:solidFill>
+          <a:ln w="22225">
+            <a:solidFill>
+              <a:srgbClr val="2FE6C4"/>
+            </a:solidFill>
+            <a:prstDash val="solid"/>
+          </a:ln>
+          <a:effectLst>
+            <a:outerShdw sx="100000" sy="100000" kx="0" ky="0" algn="bl" rotWithShape="0" blurRad="63500" dist="25400" dir="5400000">
+              <a:srgbClr val="1F2429">
+                <a:alpha val="15000"/>
+              </a:srgbClr>
+            </a:outerShdw>
+          </a:effectLst>
+        </p:spPr>
+      </p:sp>
+      <p:sp>
+        <p:nvSpPr>
+          <p:cNvPr id="6" name="Shape 4"/>
+          <p:cNvSpPr/>
+          <p:nvPr/>
+        </p:nvSpPr>
+        <p:spPr>
+          <a:xfrm>
+            <a:off x="713232" y="1426464"/>
+            <a:ext cx="201168" cy="201168"/>
+          </a:xfrm>
+          <a:prstGeom prst="ellipse">
+            <a:avLst/>
+          </a:prstGeom>
+          <a:solidFill>
+            <a:srgbClr val="2FE6C4"/>
+          </a:solidFill>
+          <a:ln/>
+        </p:spPr>
+      </p:sp>
+      <p:sp>
+        <p:nvSpPr>
+          <p:cNvPr id="7" name="Text 5"/>
+          <p:cNvSpPr txBox="1"/>
+          <p:nvPr/>
+        </p:nvSpPr>
+        <p:spPr>
+          <a:xfrm>
+            <a:off x="1005840" y="1371600"/>
+            <a:ext cx="4732020" cy="365760"/>
+          </a:xfrm>
+          <a:prstGeom prst="rect">
+            <a:avLst/>
+          </a:prstGeom>
+          <a:noFill/>
+          <a:ln/>
+        </p:spPr>
+        <p:txBody>
+          <a:bodyPr wrap="square" rtlCol="0" anchor="t"/>
+          <a:lstStyle/>
+          <a:p>
+            <a:pPr indent="0" marL="0">
+              <a:buNone/>
+            </a:pPr>
+            <a:r>
+              <a:rPr lang="en-US" sz="1800" b="1" dirty="0">
+                <a:solidFill>
+                  <a:srgbClr val="1F2429"/>
+                </a:solidFill>
+                <a:latin typeface="Calibri" pitchFamily="34" charset="0"/>
+                <a:ea typeface="Calibri" pitchFamily="34" charset="-122"/>
+                <a:cs typeface="Calibri" pitchFamily="34" charset="-120"/>
+              </a:rPr>
+              <a:t>Atomicity  vs.  Basically Available</a:t>
+            </a:r>
+            <a:endParaRPr lang="en-US" sz="1800" dirty="0"/>
+          </a:p>
+        </p:txBody>
+      </p:sp>
+      <p:sp>
+        <p:nvSpPr>
+          <p:cNvPr id="8" name="Text 6"/>
+          <p:cNvSpPr txBox="1"/>
+          <p:nvPr/>
+        </p:nvSpPr>
+        <p:spPr>
+          <a:xfrm>
+            <a:off x="749808" y="1783080"/>
+            <a:ext cx="4969764" cy="1691640"/>
+          </a:xfrm>
+          <a:prstGeom prst="rect">
+            <a:avLst/>
+          </a:prstGeom>
+          <a:noFill/>
+          <a:ln/>
+        </p:spPr>
+        <p:txBody>
+          <a:bodyPr wrap="square" rtlCol="0" anchor="t"/>
+          <a:lstStyle/>
+          <a:p>
+            <a:pPr indent="0" marL="0">
+              <a:lnSpc>
+                <a:spcPct val="112000"/>
+              </a:lnSpc>
+              <a:buNone/>
+            </a:pPr>
+            <a:r>
+              <a:rPr lang="en-US" sz="1200" dirty="0">
+                <a:solidFill>
+                  <a:srgbClr val="6B7480"/>
+                </a:solidFill>
+                <a:latin typeface="Calibri" pitchFamily="34" charset="0"/>
+                <a:ea typeface="Calibri" pitchFamily="34" charset="-122"/>
+                <a:cs typeface="Calibri" pitchFamily="34" charset="-120"/>
+              </a:rPr>
+              <a:t>ACID: all-or-nothing commits. BASE: the system keeps answering, even during partial failure.</a:t>
+            </a:r>
+            <a:endParaRPr lang="en-US" sz="1200" dirty="0"/>
+          </a:p>
+        </p:txBody>
+      </p:sp>
+      <p:sp>
+        <p:nvSpPr>
+          <p:cNvPr id="9" name="Shape 7"/>
+          <p:cNvSpPr/>
+          <p:nvPr/>
+        </p:nvSpPr>
+        <p:spPr>
+          <a:xfrm>
+            <a:off x="6240780" y="1280160"/>
+            <a:ext cx="5372100" cy="2286000"/>
+          </a:xfrm>
+          <a:prstGeom prst="roundRect">
+            <a:avLst>
+              <a:gd name="adj" fmla="val 3200"/>
+            </a:avLst>
+          </a:prstGeom>
+          <a:solidFill>
+            <a:srgbClr val="FFFFFF"/>
+          </a:solidFill>
+          <a:ln w="22225">
+            <a:solidFill>
+              <a:srgbClr val="8B7FD9"/>
+            </a:solidFill>
+            <a:prstDash val="solid"/>
+          </a:ln>
+          <a:effectLst>
+            <a:outerShdw sx="100000" sy="100000" kx="0" ky="0" algn="bl" rotWithShape="0" blurRad="63500" dist="25400" dir="5400000">
+              <a:srgbClr val="1F2429">
+                <a:alpha val="15000"/>
+              </a:srgbClr>
+            </a:outerShdw>
+          </a:effectLst>
+        </p:spPr>
+      </p:sp>
+      <p:sp>
+        <p:nvSpPr>
+          <p:cNvPr id="10" name="Shape 8"/>
+          <p:cNvSpPr/>
+          <p:nvPr/>
+        </p:nvSpPr>
+        <p:spPr>
+          <a:xfrm>
+            <a:off x="6405372" y="1426464"/>
+            <a:ext cx="201168" cy="201168"/>
+          </a:xfrm>
+          <a:prstGeom prst="ellipse">
+            <a:avLst/>
+          </a:prstGeom>
+          <a:solidFill>
+            <a:srgbClr val="8B7FD9"/>
+          </a:solidFill>
+          <a:ln/>
+        </p:spPr>
+      </p:sp>
+      <p:sp>
+        <p:nvSpPr>
+          <p:cNvPr id="11" name="Text 9"/>
+          <p:cNvSpPr txBox="1"/>
+          <p:nvPr/>
+        </p:nvSpPr>
+        <p:spPr>
+          <a:xfrm>
+            <a:off x="6697980" y="1371600"/>
+            <a:ext cx="4732020" cy="365760"/>
+          </a:xfrm>
+          <a:prstGeom prst="rect">
+            <a:avLst/>
+          </a:prstGeom>
+          <a:noFill/>
+          <a:ln/>
+        </p:spPr>
+        <p:txBody>
+          <a:bodyPr wrap="square" rtlCol="0" anchor="t"/>
+          <a:lstStyle/>
+          <a:p>
+            <a:pPr indent="0" marL="0">
+              <a:buNone/>
+            </a:pPr>
+            <a:r>
+              <a:rPr lang="en-US" sz="1800" b="1" dirty="0">
+                <a:solidFill>
+                  <a:srgbClr val="1F2429"/>
+                </a:solidFill>
+                <a:latin typeface="Calibri" pitchFamily="34" charset="0"/>
+                <a:ea typeface="Calibri" pitchFamily="34" charset="-122"/>
+                <a:cs typeface="Calibri" pitchFamily="34" charset="-120"/>
+              </a:rPr>
+              <a:t>Consistency  vs.  Soft state</a:t>
+            </a:r>
+            <a:endParaRPr lang="en-US" sz="1800" dirty="0"/>
+          </a:p>
+        </p:txBody>
+      </p:sp>
+      <p:sp>
+        <p:nvSpPr>
+          <p:cNvPr id="12" name="Text 10"/>
+          <p:cNvSpPr txBox="1"/>
+          <p:nvPr/>
+        </p:nvSpPr>
+        <p:spPr>
+          <a:xfrm>
+            <a:off x="6441948" y="1783080"/>
+            <a:ext cx="4969764" cy="1691640"/>
+          </a:xfrm>
+          <a:prstGeom prst="rect">
+            <a:avLst/>
+          </a:prstGeom>
+          <a:noFill/>
+          <a:ln/>
+        </p:spPr>
+        <p:txBody>
+          <a:bodyPr wrap="square" rtlCol="0" anchor="t"/>
+          <a:lstStyle/>
+          <a:p>
+            <a:pPr indent="0" marL="0">
+              <a:lnSpc>
+                <a:spcPct val="112000"/>
+              </a:lnSpc>
+              <a:buNone/>
+            </a:pPr>
+            <a:r>
+              <a:rPr lang="en-US" sz="1200" dirty="0">
+                <a:solidFill>
+                  <a:srgbClr val="6B7480"/>
+                </a:solidFill>
+                <a:latin typeface="Calibri" pitchFamily="34" charset="0"/>
+                <a:ea typeface="Calibri" pitchFamily="34" charset="-122"/>
+                <a:cs typeface="Calibri" pitchFamily="34" charset="-120"/>
+              </a:rPr>
+              <a:t>ACID: every commit leaves data valid. BASE: replicas may briefly hold inconsistent state.</a:t>
+            </a:r>
+            <a:endParaRPr lang="en-US" sz="1200" dirty="0"/>
+          </a:p>
+        </p:txBody>
+      </p:sp>
+      <p:sp>
+        <p:nvSpPr>
+          <p:cNvPr id="13" name="Shape 11"/>
+          <p:cNvSpPr/>
+          <p:nvPr/>
+        </p:nvSpPr>
+        <p:spPr>
+          <a:xfrm>
+            <a:off x="548640" y="3840480"/>
+            <a:ext cx="5372100" cy="2286000"/>
+          </a:xfrm>
+          <a:prstGeom prst="roundRect">
+            <a:avLst>
+              <a:gd name="adj" fmla="val 3200"/>
+            </a:avLst>
+          </a:prstGeom>
+          <a:solidFill>
+            <a:srgbClr val="FFFFFF"/>
+          </a:solidFill>
+          <a:ln w="22225">
+            <a:solidFill>
+              <a:srgbClr val="E8A33D"/>
+            </a:solidFill>
+            <a:prstDash val="solid"/>
+          </a:ln>
+          <a:effectLst>
+            <a:outerShdw sx="100000" sy="100000" kx="0" ky="0" algn="bl" rotWithShape="0" blurRad="63500" dist="25400" dir="5400000">
+              <a:srgbClr val="1F2429">
+                <a:alpha val="15000"/>
+              </a:srgbClr>
+            </a:outerShdw>
+          </a:effectLst>
+        </p:spPr>
+      </p:sp>
+      <p:sp>
+        <p:nvSpPr>
+          <p:cNvPr id="14" name="Shape 12"/>
+          <p:cNvSpPr/>
+          <p:nvPr/>
+        </p:nvSpPr>
+        <p:spPr>
+          <a:xfrm>
+            <a:off x="713232" y="3986784"/>
+            <a:ext cx="201168" cy="201168"/>
+          </a:xfrm>
+          <a:prstGeom prst="ellipse">
+            <a:avLst/>
+          </a:prstGeom>
+          <a:solidFill>
+            <a:srgbClr val="E8A33D"/>
+          </a:solidFill>
+          <a:ln/>
+        </p:spPr>
+      </p:sp>
+      <p:sp>
+        <p:nvSpPr>
+          <p:cNvPr id="15" name="Text 13"/>
+          <p:cNvSpPr txBox="1"/>
+          <p:nvPr/>
+        </p:nvSpPr>
+        <p:spPr>
+          <a:xfrm>
+            <a:off x="1005840" y="3931920"/>
+            <a:ext cx="4732020" cy="365760"/>
+          </a:xfrm>
+          <a:prstGeom prst="rect">
+            <a:avLst/>
+          </a:prstGeom>
+          <a:noFill/>
+          <a:ln/>
+        </p:spPr>
+        <p:txBody>
+          <a:bodyPr wrap="square" rtlCol="0" anchor="t"/>
+          <a:lstStyle/>
+          <a:p>
+            <a:pPr indent="0" marL="0">
+              <a:buNone/>
+            </a:pPr>
+            <a:r>
+              <a:rPr lang="en-US" sz="1800" b="1" dirty="0">
+                <a:solidFill>
+                  <a:srgbClr val="1F2429"/>
+                </a:solidFill>
+                <a:latin typeface="Calibri" pitchFamily="34" charset="0"/>
+                <a:ea typeface="Calibri" pitchFamily="34" charset="-122"/>
+                <a:cs typeface="Calibri" pitchFamily="34" charset="-120"/>
+              </a:rPr>
+              <a:t>Isolation  vs.  Eventual consistency</a:t>
+            </a:r>
+            <a:endParaRPr lang="en-US" sz="1800" dirty="0"/>
+          </a:p>
+        </p:txBody>
+      </p:sp>
+      <p:sp>
+        <p:nvSpPr>
+          <p:cNvPr id="16" name="Text 14"/>
+          <p:cNvSpPr txBox="1"/>
+          <p:nvPr/>
+        </p:nvSpPr>
+        <p:spPr>
+          <a:xfrm>
+            <a:off x="749808" y="4343400"/>
+            <a:ext cx="4969764" cy="1691640"/>
+          </a:xfrm>
+          <a:prstGeom prst="rect">
+            <a:avLst/>
+          </a:prstGeom>
+          <a:noFill/>
+          <a:ln/>
+        </p:spPr>
+        <p:txBody>
+          <a:bodyPr wrap="square" rtlCol="0" anchor="t"/>
+          <a:lstStyle/>
+          <a:p>
+            <a:pPr indent="0" marL="0">
+              <a:lnSpc>
+                <a:spcPct val="112000"/>
+              </a:lnSpc>
+              <a:buNone/>
+            </a:pPr>
+            <a:r>
+              <a:rPr lang="en-US" sz="1200" dirty="0">
+                <a:solidFill>
+                  <a:srgbClr val="6B7480"/>
+                </a:solidFill>
+                <a:latin typeface="Calibri" pitchFamily="34" charset="0"/>
+                <a:ea typeface="Calibri" pitchFamily="34" charset="-122"/>
+                <a:cs typeface="Calibri" pitchFamily="34" charset="-120"/>
+              </a:rPr>
+              <a:t>ACID: concurrent transactions do not interfere. BASE: replicas converge given time.</a:t>
+            </a:r>
+            <a:endParaRPr lang="en-US" sz="1200" dirty="0"/>
+          </a:p>
+        </p:txBody>
+      </p:sp>
+      <p:sp>
+        <p:nvSpPr>
+          <p:cNvPr id="17" name="Shape 15"/>
+          <p:cNvSpPr/>
+          <p:nvPr/>
+        </p:nvSpPr>
+        <p:spPr>
+          <a:xfrm>
+            <a:off x="6240780" y="3840480"/>
+            <a:ext cx="5372100" cy="2286000"/>
+          </a:xfrm>
+          <a:prstGeom prst="roundRect">
+            <a:avLst>
+              <a:gd name="adj" fmla="val 3200"/>
+            </a:avLst>
+          </a:prstGeom>
+          <a:solidFill>
+            <a:srgbClr val="FFFFFF"/>
+          </a:solidFill>
+          <a:ln w="22225">
+            <a:solidFill>
+              <a:srgbClr val="2FE6C4"/>
+            </a:solidFill>
+            <a:prstDash val="solid"/>
+          </a:ln>
+          <a:effectLst>
+            <a:outerShdw sx="100000" sy="100000" kx="0" ky="0" algn="bl" rotWithShape="0" blurRad="63500" dist="25400" dir="5400000">
+              <a:srgbClr val="1F2429">
+                <a:alpha val="15000"/>
+              </a:srgbClr>
+            </a:outerShdw>
+          </a:effectLst>
+        </p:spPr>
+      </p:sp>
+      <p:sp>
+        <p:nvSpPr>
+          <p:cNvPr id="18" name="Shape 16"/>
+          <p:cNvSpPr/>
+          <p:nvPr/>
+        </p:nvSpPr>
+        <p:spPr>
+          <a:xfrm>
+            <a:off x="6405372" y="3986784"/>
+            <a:ext cx="201168" cy="201168"/>
+          </a:xfrm>
+          <a:prstGeom prst="ellipse">
+            <a:avLst/>
+          </a:prstGeom>
+          <a:solidFill>
+            <a:srgbClr val="2FE6C4"/>
+          </a:solidFill>
+          <a:ln/>
+        </p:spPr>
+      </p:sp>
+      <p:sp>
+        <p:nvSpPr>
+          <p:cNvPr id="19" name="Text 17"/>
+          <p:cNvSpPr txBox="1"/>
+          <p:nvPr/>
+        </p:nvSpPr>
+        <p:spPr>
+          <a:xfrm>
+            <a:off x="6697980" y="3931920"/>
+            <a:ext cx="4732020" cy="365760"/>
+          </a:xfrm>
+          <a:prstGeom prst="rect">
+            <a:avLst/>
+          </a:prstGeom>
+          <a:noFill/>
+          <a:ln/>
+        </p:spPr>
+        <p:txBody>
+          <a:bodyPr wrap="square" rtlCol="0" anchor="t"/>
+          <a:lstStyle/>
+          <a:p>
+            <a:pPr indent="0" marL="0">
+              <a:buNone/>
+            </a:pPr>
+            <a:r>
+              <a:rPr lang="en-US" sz="1800" b="1" dirty="0">
+                <a:solidFill>
+                  <a:srgbClr val="1F2429"/>
+                </a:solidFill>
+                <a:latin typeface="Calibri" pitchFamily="34" charset="0"/>
+                <a:ea typeface="Calibri" pitchFamily="34" charset="-122"/>
+                <a:cs typeface="Calibri" pitchFamily="34" charset="-120"/>
+              </a:rPr>
+              <a:t>Durability  vs.  Availability first</a:t>
+            </a:r>
+            <a:endParaRPr lang="en-US" sz="1800" dirty="0"/>
+          </a:p>
+        </p:txBody>
+      </p:sp>
+      <p:sp>
+        <p:nvSpPr>
+          <p:cNvPr id="20" name="Text 18"/>
+          <p:cNvSpPr txBox="1"/>
+          <p:nvPr/>
+        </p:nvSpPr>
+        <p:spPr>
+          <a:xfrm>
+            <a:off x="6441948" y="4343400"/>
+            <a:ext cx="4969764" cy="1691640"/>
+          </a:xfrm>
+          <a:prstGeom prst="rect">
+            <a:avLst/>
+          </a:prstGeom>
+          <a:noFill/>
+          <a:ln/>
+        </p:spPr>
+        <p:txBody>
+          <a:bodyPr wrap="square" rtlCol="0" anchor="t"/>
+          <a:lstStyle/>
+          <a:p>
+            <a:pPr indent="0" marL="0">
+              <a:lnSpc>
+                <a:spcPct val="112000"/>
+              </a:lnSpc>
+              <a:buNone/>
+            </a:pPr>
+            <a:r>
+              <a:rPr lang="en-US" sz="1200" dirty="0">
+                <a:solidFill>
+                  <a:srgbClr val="6B7480"/>
+                </a:solidFill>
+                <a:latin typeface="Calibri" pitchFamily="34" charset="0"/>
+                <a:ea typeface="Calibri" pitchFamily="34" charset="-122"/>
+                <a:cs typeface="Calibri" pitchFamily="34" charset="-120"/>
+              </a:rPr>
+              <a:t>ACID: committed work survives crashes. BASE: favors availability over immediate agreement.</a:t>
+            </a:r>
+            <a:endParaRPr lang="en-US" sz="1200" dirty="0"/>
+          </a:p>
+        </p:txBody>
+      </p:sp>
+    </p:spTree>
+  </p:cSld>
+  <p:clrMapOvr>
+    <a:masterClrMapping/>
+  </p:clrMapOvr>
+</p:sld>
+</file>
+
+<file path=ppt/slides/slide19.xml><?xml version="1.0" encoding="utf-8"?>
+<p:sld xmlns:a="http://schemas.openxmlformats.org/drawingml/2006/main" xmlns:r="http://schemas.openxmlformats.org/officeDocument/2006/relationships" xmlns:p="http://schemas.openxmlformats.org/presentationml/2006/main">
+  <p:cSld name="Slide 9">
+    <p:bg>
+      <p:bgPr>
+        <a:solidFill>
+          <a:srgbClr val="F7F8F9"/>
+        </a:solidFill>
+      </p:bgPr>
+    </p:bg>
+    <p:spTree>
+      <p:nvGrpSpPr>
+        <p:cNvPr id="1" name=""/>
+        <p:cNvGrpSpPr/>
+        <p:nvPr/>
+      </p:nvGrpSpPr>
+      <p:grpSpPr>
+        <a:xfrm>
+          <a:off x="0" y="0"/>
+          <a:ext cx="0" cy="0"/>
+          <a:chOff x="0" y="0"/>
+          <a:chExt cx="0" cy="0"/>
+        </a:xfrm>
+      </p:grpSpPr>
+      <p:sp>
+        <p:nvSpPr>
+          <p:cNvPr id="2" name="Text 0"/>
+          <p:cNvSpPr txBox="1"/>
+          <p:nvPr/>
+        </p:nvSpPr>
+        <p:spPr>
+          <a:xfrm>
+            <a:off x="548640" y="320040"/>
+            <a:ext cx="9144000" cy="292608"/>
+          </a:xfrm>
+          <a:prstGeom prst="rect">
+            <a:avLst/>
+          </a:prstGeom>
+          <a:noFill/>
+          <a:ln/>
+        </p:spPr>
+        <p:txBody>
+          <a:bodyPr wrap="square" rtlCol="0" anchor="ctr"/>
+          <a:lstStyle/>
+          <a:p>
+            <a:pPr indent="0" marL="0">
+              <a:buNone/>
+            </a:pPr>
+            <a:r>
+              <a:rPr lang="en-US" sz="1200" b="1" spc="150" kern="0" dirty="0">
+                <a:solidFill>
+                  <a:srgbClr val="8B7FD9"/>
+                </a:solidFill>
+                <a:latin typeface="Calibri" pitchFamily="34" charset="0"/>
+                <a:ea typeface="Calibri" pitchFamily="34" charset="-122"/>
+                <a:cs typeface="Calibri" pitchFamily="34" charset="-120"/>
+              </a:rPr>
+              <a:t>CAP IN PRACTICE</a:t>
+            </a:r>
+            <a:endParaRPr lang="en-US" sz="1200" dirty="0"/>
+          </a:p>
+        </p:txBody>
+      </p:sp>
+      <p:sp>
+        <p:nvSpPr>
+          <p:cNvPr id="3" name="Text 1"/>
+          <p:cNvSpPr txBox="1"/>
+          <p:nvPr/>
+        </p:nvSpPr>
+        <p:spPr>
+          <a:xfrm>
+            <a:off x="548640" y="566928"/>
+            <a:ext cx="11064240" cy="640080"/>
+          </a:xfrm>
+          <a:prstGeom prst="rect">
+            <a:avLst/>
+          </a:prstGeom>
+          <a:noFill/>
+          <a:ln/>
+        </p:spPr>
+        <p:txBody>
+          <a:bodyPr wrap="square" rtlCol="0" anchor="ctr"/>
+          <a:lstStyle/>
+          <a:p>
+            <a:pPr indent="0" marL="0">
+              <a:buNone/>
+            </a:pPr>
+            <a:r>
+              <a:rPr lang="en-US" sz="2500" b="1" dirty="0">
+                <a:solidFill>
+                  <a:srgbClr val="1F2429"/>
+                </a:solidFill>
+                <a:latin typeface="Calibri" pitchFamily="34" charset="0"/>
+                <a:ea typeface="Calibri" pitchFamily="34" charset="-122"/>
+                <a:cs typeface="Calibri" pitchFamily="34" charset="-120"/>
+              </a:rPr>
+              <a:t>Consistency or Availability During a Partition</a:t>
+            </a:r>
+            <a:endParaRPr lang="en-US" sz="2500" dirty="0"/>
+          </a:p>
+        </p:txBody>
+      </p:sp>
+      <p:sp>
+        <p:nvSpPr>
+          <p:cNvPr id="4" name="Text 2"/>
+          <p:cNvSpPr txBox="1"/>
+          <p:nvPr/>
+        </p:nvSpPr>
+        <p:spPr>
+          <a:xfrm>
+            <a:off x="9951415" y="6455664"/>
+            <a:ext cx="2011680" cy="292608"/>
+          </a:xfrm>
+          <a:prstGeom prst="rect">
+            <a:avLst/>
+          </a:prstGeom>
+          <a:noFill/>
+          <a:ln/>
+        </p:spPr>
+        <p:txBody>
+          <a:bodyPr wrap="square" rtlCol="0" anchor="ctr"/>
+          <a:lstStyle/>
+          <a:p>
+            <a:pPr algn="r" indent="0" marL="0">
+              <a:buNone/>
+            </a:pPr>
+            <a:r>
+              <a:rPr lang="en-US" sz="1200" u="sng" dirty="0">
+                <a:solidFill>
+                  <a:srgbClr val="8A939B"/>
+                </a:solidFill>
+                <a:latin typeface="Calibri" pitchFamily="34" charset="0"/>
+                <a:ea typeface="Calibri" pitchFamily="34" charset="-122"/>
+                <a:cs typeface="Calibri" pitchFamily="34" charset="-120"/>
+                <a:hlinkClick r:id="rId1" invalidUrl="" action="" tgtFrame="" tooltip="" history="1" highlightClick="0" endSnd="0">
+                  <a:extLst>
+                    <a:ext uri="{A12FA001-AC4F-418D-AE19-62706E023703}">
+                      <ahyp:hlinkClr xmlns:ahyp="http://schemas.microsoft.com/office/drawing/2018/hyperlinkcolor" val="tx"/>
+                    </a:ext>
+                  </a:extLst>
+                </a:hlinkClick>
+              </a:rPr>
+              <a:t>cuinotes.com</a:t>
+            </a:r>
+            <a:pPr algn="r" indent="0" marL="0">
+              <a:buNone/>
+            </a:pPr>
+            <a:r>
+              <a:rPr lang="en-US" sz="1200" dirty="0">
+                <a:solidFill>
+                  <a:srgbClr val="8A939B"/>
+                </a:solidFill>
+                <a:latin typeface="Calibri" pitchFamily="34" charset="0"/>
+                <a:ea typeface="Calibri" pitchFamily="34" charset="-122"/>
+                <a:cs typeface="Calibri" pitchFamily="34" charset="-120"/>
+              </a:rPr>
+              <a:t>  ·  19</a:t>
+            </a:r>
+            <a:endParaRPr lang="en-US" sz="1200" dirty="0"/>
+          </a:p>
+        </p:txBody>
+      </p:sp>
+      <p:sp>
+        <p:nvSpPr>
+          <p:cNvPr id="5" name="Text 3"/>
+          <p:cNvSpPr txBox="1"/>
+          <p:nvPr/>
+        </p:nvSpPr>
+        <p:spPr>
+          <a:xfrm>
+            <a:off x="548640" y="1188720"/>
+            <a:ext cx="5349240" cy="274320"/>
+          </a:xfrm>
+          <a:prstGeom prst="rect">
+            <a:avLst/>
+          </a:prstGeom>
+          <a:noFill/>
+          <a:ln/>
+        </p:spPr>
+        <p:txBody>
+          <a:bodyPr wrap="square" rtlCol="0" anchor="ctr"/>
+          <a:lstStyle/>
+          <a:p>
+            <a:pPr indent="0" marL="0">
+              <a:buNone/>
+            </a:pPr>
+            <a:r>
+              <a:rPr lang="en-US" sz="1200" b="1" spc="100" kern="0" dirty="0">
+                <a:solidFill>
+                  <a:srgbClr val="2FE6C4"/>
+                </a:solidFill>
+                <a:latin typeface="Calibri" pitchFamily="34" charset="0"/>
+                <a:ea typeface="Calibri" pitchFamily="34" charset="-122"/>
+                <a:cs typeface="Calibri" pitchFamily="34" charset="-120"/>
+              </a:rPr>
+              <a:t>CHOOSE CP WHEN</a:t>
+            </a:r>
+            <a:endParaRPr lang="en-US" sz="1200" dirty="0"/>
+          </a:p>
+        </p:txBody>
+      </p:sp>
+      <p:sp>
+        <p:nvSpPr>
+          <p:cNvPr id="6" name="Shape 4"/>
+          <p:cNvSpPr/>
+          <p:nvPr/>
+        </p:nvSpPr>
+        <p:spPr>
+          <a:xfrm>
+            <a:off x="548640" y="1536192"/>
+            <a:ext cx="5349240" cy="1444752"/>
+          </a:xfrm>
+          <a:prstGeom prst="roundRect">
+            <a:avLst>
+              <a:gd name="adj" fmla="val 5063"/>
+            </a:avLst>
+          </a:prstGeom>
+          <a:solidFill>
+            <a:srgbClr val="FFFFFF"/>
+          </a:solidFill>
+          <a:ln w="22225">
+            <a:solidFill>
+              <a:srgbClr val="2FE6C4"/>
+            </a:solidFill>
+            <a:prstDash val="solid"/>
+          </a:ln>
+          <a:effectLst>
+            <a:outerShdw sx="100000" sy="100000" kx="0" ky="0" algn="bl" rotWithShape="0" blurRad="76200" dist="25400" dir="5400000">
+              <a:srgbClr val="1F2429">
+                <a:alpha val="16000"/>
+              </a:srgbClr>
+            </a:outerShdw>
+          </a:effectLst>
+        </p:spPr>
+      </p:sp>
+      <p:sp>
+        <p:nvSpPr>
+          <p:cNvPr id="7" name="Shape 5"/>
+          <p:cNvSpPr/>
+          <p:nvPr/>
+        </p:nvSpPr>
+        <p:spPr>
+          <a:xfrm>
+            <a:off x="694944" y="2057400"/>
+            <a:ext cx="91440" cy="310896"/>
+          </a:xfrm>
+          <a:prstGeom prst="rect">
+            <a:avLst/>
+          </a:prstGeom>
+          <a:solidFill>
+            <a:srgbClr val="2FE6C4"/>
+          </a:solidFill>
+          <a:ln/>
+        </p:spPr>
+      </p:sp>
+      <p:sp>
+        <p:nvSpPr>
+          <p:cNvPr id="8" name="Text 6"/>
+          <p:cNvSpPr txBox="1"/>
+          <p:nvPr/>
+        </p:nvSpPr>
+        <p:spPr>
+          <a:xfrm>
+            <a:off x="914400" y="1609344"/>
+            <a:ext cx="4800600" cy="650138"/>
+          </a:xfrm>
+          <a:prstGeom prst="rect">
+            <a:avLst/>
+          </a:prstGeom>
+          <a:noFill/>
+          <a:ln/>
+        </p:spPr>
+        <p:txBody>
+          <a:bodyPr wrap="square" rtlCol="0" anchor="t"/>
+          <a:lstStyle/>
+          <a:p>
+            <a:pPr indent="0" marL="0">
+              <a:buNone/>
+            </a:pPr>
+            <a:r>
+              <a:rPr lang="en-US" sz="1800" b="1" dirty="0">
+                <a:solidFill>
+                  <a:srgbClr val="1F2429"/>
+                </a:solidFill>
+                <a:latin typeface="Calibri" pitchFamily="34" charset="0"/>
+                <a:ea typeface="Calibri" pitchFamily="34" charset="-122"/>
+                <a:cs typeface="Calibri" pitchFamily="34" charset="-120"/>
+              </a:rPr>
+              <a:t>Money and inventory</a:t>
+            </a:r>
+            <a:endParaRPr lang="en-US" sz="1800" dirty="0"/>
+          </a:p>
+        </p:txBody>
+      </p:sp>
+      <p:sp>
+        <p:nvSpPr>
+          <p:cNvPr id="9" name="Text 7"/>
+          <p:cNvSpPr txBox="1"/>
+          <p:nvPr/>
+        </p:nvSpPr>
+        <p:spPr>
+          <a:xfrm>
+            <a:off x="914400" y="2142988"/>
+            <a:ext cx="4800600" cy="794614"/>
+          </a:xfrm>
+          <a:prstGeom prst="rect">
+            <a:avLst/>
+          </a:prstGeom>
+          <a:noFill/>
+          <a:ln/>
+        </p:spPr>
+        <p:txBody>
+          <a:bodyPr wrap="square" rtlCol="0" anchor="t"/>
+          <a:lstStyle/>
+          <a:p>
+            <a:pPr indent="0" marL="0">
+              <a:lnSpc>
+                <a:spcPct val="110000"/>
+              </a:lnSpc>
+              <a:buNone/>
+            </a:pPr>
+            <a:r>
+              <a:rPr lang="en-US" sz="1200" dirty="0">
+                <a:solidFill>
+                  <a:srgbClr val="6B7480"/>
+                </a:solidFill>
+                <a:latin typeface="Calibri" pitchFamily="34" charset="0"/>
+                <a:ea typeface="Calibri" pitchFamily="34" charset="-122"/>
+                <a:cs typeface="Calibri" pitchFamily="34" charset="-120"/>
+              </a:rPr>
+              <a:t>A stale balance is worse than a refused request</a:t>
+            </a:r>
+            <a:endParaRPr lang="en-US" sz="1200" dirty="0"/>
+          </a:p>
+        </p:txBody>
+      </p:sp>
+      <p:sp>
+        <p:nvSpPr>
+          <p:cNvPr id="10" name="Shape 8"/>
+          <p:cNvSpPr/>
+          <p:nvPr/>
+        </p:nvSpPr>
+        <p:spPr>
+          <a:xfrm>
+            <a:off x="3223260" y="2980944"/>
+            <a:ext cx="0" cy="256032"/>
+          </a:xfrm>
+          <a:prstGeom prst="line">
+            <a:avLst/>
+          </a:prstGeom>
+          <a:noFill/>
+          <a:ln w="25400">
+            <a:solidFill>
+              <a:srgbClr val="8A939B"/>
+            </a:solidFill>
+            <a:prstDash val="solid"/>
+            <a:tailEnd type="triangle"/>
+          </a:ln>
+        </p:spPr>
+      </p:sp>
+      <p:sp>
+        <p:nvSpPr>
+          <p:cNvPr id="11" name="Shape 9"/>
+          <p:cNvSpPr/>
+          <p:nvPr/>
+        </p:nvSpPr>
+        <p:spPr>
+          <a:xfrm>
+            <a:off x="548640" y="3236976"/>
+            <a:ext cx="5349240" cy="1444752"/>
+          </a:xfrm>
+          <a:prstGeom prst="roundRect">
+            <a:avLst>
+              <a:gd name="adj" fmla="val 5063"/>
+            </a:avLst>
+          </a:prstGeom>
+          <a:solidFill>
+            <a:srgbClr val="FFFFFF"/>
+          </a:solidFill>
+          <a:ln w="22225">
+            <a:solidFill>
+              <a:srgbClr val="8B7FD9"/>
+            </a:solidFill>
+            <a:prstDash val="solid"/>
+          </a:ln>
+          <a:effectLst>
+            <a:outerShdw sx="100000" sy="100000" kx="0" ky="0" algn="bl" rotWithShape="0" blurRad="76200" dist="25400" dir="5400000">
+              <a:srgbClr val="1F2429">
+                <a:alpha val="16000"/>
+              </a:srgbClr>
+            </a:outerShdw>
+          </a:effectLst>
+        </p:spPr>
+      </p:sp>
+      <p:sp>
+        <p:nvSpPr>
+          <p:cNvPr id="12" name="Shape 10"/>
+          <p:cNvSpPr/>
+          <p:nvPr/>
+        </p:nvSpPr>
+        <p:spPr>
+          <a:xfrm>
+            <a:off x="694944" y="3758184"/>
+            <a:ext cx="91440" cy="310896"/>
+          </a:xfrm>
+          <a:prstGeom prst="rect">
+            <a:avLst/>
+          </a:prstGeom>
+          <a:solidFill>
+            <a:srgbClr val="8B7FD9"/>
+          </a:solidFill>
+          <a:ln/>
+        </p:spPr>
+      </p:sp>
+      <p:sp>
+        <p:nvSpPr>
+          <p:cNvPr id="13" name="Text 11"/>
+          <p:cNvSpPr txBox="1"/>
+          <p:nvPr/>
+        </p:nvSpPr>
+        <p:spPr>
+          <a:xfrm>
+            <a:off x="914400" y="3310128"/>
+            <a:ext cx="4800600" cy="650138"/>
+          </a:xfrm>
+          <a:prstGeom prst="rect">
+            <a:avLst/>
+          </a:prstGeom>
+          <a:noFill/>
+          <a:ln/>
+        </p:spPr>
+        <p:txBody>
+          <a:bodyPr wrap="square" rtlCol="0" anchor="t"/>
+          <a:lstStyle/>
+          <a:p>
+            <a:pPr indent="0" marL="0">
+              <a:buNone/>
+            </a:pPr>
+            <a:r>
+              <a:rPr lang="en-US" sz="1800" b="1" dirty="0">
+                <a:solidFill>
+                  <a:srgbClr val="1F2429"/>
+                </a:solidFill>
+                <a:latin typeface="Calibri" pitchFamily="34" charset="0"/>
+                <a:ea typeface="Calibri" pitchFamily="34" charset="-122"/>
+                <a:cs typeface="Calibri" pitchFamily="34" charset="-120"/>
+              </a:rPr>
+              <a:t>Coordinated writes</a:t>
+            </a:r>
+            <a:endParaRPr lang="en-US" sz="1800" dirty="0"/>
+          </a:p>
+        </p:txBody>
+      </p:sp>
+      <p:sp>
+        <p:nvSpPr>
+          <p:cNvPr id="14" name="Text 12"/>
+          <p:cNvSpPr txBox="1"/>
+          <p:nvPr/>
+        </p:nvSpPr>
+        <p:spPr>
+          <a:xfrm>
+            <a:off x="914400" y="3843772"/>
+            <a:ext cx="4800600" cy="794614"/>
+          </a:xfrm>
+          <a:prstGeom prst="rect">
+            <a:avLst/>
+          </a:prstGeom>
+          <a:noFill/>
+          <a:ln/>
+        </p:spPr>
+        <p:txBody>
+          <a:bodyPr wrap="square" rtlCol="0" anchor="t"/>
+          <a:lstStyle/>
+          <a:p>
+            <a:pPr indent="0" marL="0">
+              <a:lnSpc>
+                <a:spcPct val="110000"/>
+              </a:lnSpc>
+              <a:buNone/>
+            </a:pPr>
+            <a:r>
+              <a:rPr lang="en-US" sz="1200" dirty="0">
+                <a:solidFill>
+                  <a:srgbClr val="6B7480"/>
+                </a:solidFill>
+                <a:latin typeface="Calibri" pitchFamily="34" charset="0"/>
+                <a:ea typeface="Calibri" pitchFamily="34" charset="-122"/>
+                <a:cs typeface="Calibri" pitchFamily="34" charset="-120"/>
+              </a:rPr>
+              <a:t>The Lahore side must confirm before accepting a write</a:t>
+            </a:r>
+            <a:endParaRPr lang="en-US" sz="1200" dirty="0"/>
+          </a:p>
+        </p:txBody>
+      </p:sp>
+      <p:sp>
+        <p:nvSpPr>
+          <p:cNvPr id="15" name="Shape 13"/>
+          <p:cNvSpPr/>
+          <p:nvPr/>
+        </p:nvSpPr>
+        <p:spPr>
+          <a:xfrm>
+            <a:off x="3223260" y="4681728"/>
+            <a:ext cx="0" cy="256032"/>
+          </a:xfrm>
+          <a:prstGeom prst="line">
+            <a:avLst/>
+          </a:prstGeom>
+          <a:noFill/>
+          <a:ln w="25400">
+            <a:solidFill>
+              <a:srgbClr val="8A939B"/>
+            </a:solidFill>
+            <a:prstDash val="solid"/>
+            <a:tailEnd type="triangle"/>
+          </a:ln>
+        </p:spPr>
+      </p:sp>
+      <p:sp>
+        <p:nvSpPr>
+          <p:cNvPr id="16" name="Shape 14"/>
+          <p:cNvSpPr/>
+          <p:nvPr/>
+        </p:nvSpPr>
+        <p:spPr>
+          <a:xfrm>
+            <a:off x="548640" y="4937760"/>
+            <a:ext cx="5349240" cy="1444752"/>
+          </a:xfrm>
+          <a:prstGeom prst="roundRect">
+            <a:avLst>
+              <a:gd name="adj" fmla="val 5063"/>
+            </a:avLst>
+          </a:prstGeom>
+          <a:solidFill>
+            <a:srgbClr val="FFFFFF"/>
+          </a:solidFill>
+          <a:ln w="22225">
+            <a:solidFill>
+              <a:srgbClr val="E8A33D"/>
+            </a:solidFill>
+            <a:prstDash val="solid"/>
+          </a:ln>
+          <a:effectLst>
+            <a:outerShdw sx="100000" sy="100000" kx="0" ky="0" algn="bl" rotWithShape="0" blurRad="76200" dist="25400" dir="5400000">
+              <a:srgbClr val="1F2429">
+                <a:alpha val="16000"/>
+              </a:srgbClr>
+            </a:outerShdw>
+          </a:effectLst>
+        </p:spPr>
+      </p:sp>
+      <p:sp>
+        <p:nvSpPr>
+          <p:cNvPr id="17" name="Shape 15"/>
+          <p:cNvSpPr/>
+          <p:nvPr/>
+        </p:nvSpPr>
+        <p:spPr>
+          <a:xfrm>
+            <a:off x="694944" y="5458968"/>
+            <a:ext cx="91440" cy="310896"/>
+          </a:xfrm>
+          <a:prstGeom prst="rect">
+            <a:avLst/>
+          </a:prstGeom>
+          <a:solidFill>
+            <a:srgbClr val="E8A33D"/>
+          </a:solidFill>
+          <a:ln/>
+        </p:spPr>
+      </p:sp>
+      <p:sp>
+        <p:nvSpPr>
+          <p:cNvPr id="18" name="Text 16"/>
+          <p:cNvSpPr txBox="1"/>
+          <p:nvPr/>
+        </p:nvSpPr>
+        <p:spPr>
+          <a:xfrm>
+            <a:off x="914400" y="5010912"/>
+            <a:ext cx="4800600" cy="650138"/>
+          </a:xfrm>
+          <a:prstGeom prst="rect">
+            <a:avLst/>
+          </a:prstGeom>
+          <a:noFill/>
+          <a:ln/>
+        </p:spPr>
+        <p:txBody>
+          <a:bodyPr wrap="square" rtlCol="0" anchor="t"/>
+          <a:lstStyle/>
+          <a:p>
+            <a:pPr indent="0" marL="0">
+              <a:buNone/>
+            </a:pPr>
+            <a:r>
+              <a:rPr lang="en-US" sz="1800" b="1" dirty="0">
+                <a:solidFill>
+                  <a:srgbClr val="1F2429"/>
+                </a:solidFill>
+                <a:latin typeface="Calibri" pitchFamily="34" charset="0"/>
+                <a:ea typeface="Calibri" pitchFamily="34" charset="-122"/>
+                <a:cs typeface="Calibri" pitchFamily="34" charset="-120"/>
+              </a:rPr>
+              <a:t>Strict uniqueness</a:t>
+            </a:r>
+            <a:endParaRPr lang="en-US" sz="1800" dirty="0"/>
+          </a:p>
+        </p:txBody>
+      </p:sp>
+      <p:sp>
+        <p:nvSpPr>
+          <p:cNvPr id="19" name="Text 17"/>
+          <p:cNvSpPr txBox="1"/>
+          <p:nvPr/>
+        </p:nvSpPr>
+        <p:spPr>
+          <a:xfrm>
+            <a:off x="914400" y="5544556"/>
+            <a:ext cx="4800600" cy="794614"/>
+          </a:xfrm>
+          <a:prstGeom prst="rect">
+            <a:avLst/>
+          </a:prstGeom>
+          <a:noFill/>
+          <a:ln/>
+        </p:spPr>
+        <p:txBody>
+          <a:bodyPr wrap="square" rtlCol="0" anchor="t"/>
+          <a:lstStyle/>
+          <a:p>
+            <a:pPr indent="0" marL="0">
+              <a:lnSpc>
+                <a:spcPct val="110000"/>
+              </a:lnSpc>
+              <a:buNone/>
+            </a:pPr>
+            <a:r>
+              <a:rPr lang="en-US" sz="1200" dirty="0">
+                <a:solidFill>
+                  <a:srgbClr val="6B7480"/>
+                </a:solidFill>
+                <a:latin typeface="Calibri" pitchFamily="34" charset="0"/>
+                <a:ea typeface="Calibri" pitchFamily="34" charset="-122"/>
+                <a:cs typeface="Calibri" pitchFamily="34" charset="-120"/>
+              </a:rPr>
+              <a:t>Two users must never claim the same seat</a:t>
+            </a:r>
+            <a:endParaRPr lang="en-US" sz="1200" dirty="0"/>
+          </a:p>
+        </p:txBody>
+      </p:sp>
+      <p:sp>
+        <p:nvSpPr>
+          <p:cNvPr id="20" name="Text 18"/>
+          <p:cNvSpPr txBox="1"/>
+          <p:nvPr/>
+        </p:nvSpPr>
+        <p:spPr>
+          <a:xfrm>
+            <a:off x="6263640" y="1188720"/>
+            <a:ext cx="5349240" cy="274320"/>
+          </a:xfrm>
+          <a:prstGeom prst="rect">
+            <a:avLst/>
+          </a:prstGeom>
+          <a:noFill/>
+          <a:ln/>
+        </p:spPr>
+        <p:txBody>
+          <a:bodyPr wrap="square" rtlCol="0" anchor="ctr"/>
+          <a:lstStyle/>
+          <a:p>
+            <a:pPr indent="0" marL="0">
+              <a:buNone/>
+            </a:pPr>
+            <a:r>
+              <a:rPr lang="en-US" sz="1200" b="1" spc="100" kern="0" dirty="0">
+                <a:solidFill>
+                  <a:srgbClr val="E8A33D"/>
+                </a:solidFill>
+                <a:latin typeface="Calibri" pitchFamily="34" charset="0"/>
+                <a:ea typeface="Calibri" pitchFamily="34" charset="-122"/>
+                <a:cs typeface="Calibri" pitchFamily="34" charset="-120"/>
+              </a:rPr>
+              <a:t>CHOOSE AP WHEN</a:t>
+            </a:r>
+            <a:endParaRPr lang="en-US" sz="1200" dirty="0"/>
+          </a:p>
+        </p:txBody>
+      </p:sp>
+      <p:sp>
+        <p:nvSpPr>
+          <p:cNvPr id="21" name="Shape 19"/>
+          <p:cNvSpPr/>
+          <p:nvPr/>
+        </p:nvSpPr>
+        <p:spPr>
+          <a:xfrm>
+            <a:off x="6263640" y="1536192"/>
+            <a:ext cx="5349240" cy="1444752"/>
+          </a:xfrm>
+          <a:prstGeom prst="roundRect">
+            <a:avLst>
+              <a:gd name="adj" fmla="val 5063"/>
+            </a:avLst>
+          </a:prstGeom>
+          <a:solidFill>
+            <a:srgbClr val="FFFFFF"/>
+          </a:solidFill>
+          <a:ln w="22225">
+            <a:solidFill>
+              <a:srgbClr val="2FE6C4"/>
+            </a:solidFill>
+            <a:prstDash val="solid"/>
+          </a:ln>
+          <a:effectLst>
+            <a:outerShdw sx="100000" sy="100000" kx="0" ky="0" algn="bl" rotWithShape="0" blurRad="76200" dist="25400" dir="5400000">
+              <a:srgbClr val="1F2429">
+                <a:alpha val="16000"/>
+              </a:srgbClr>
+            </a:outerShdw>
+          </a:effectLst>
+        </p:spPr>
+      </p:sp>
+      <p:sp>
+        <p:nvSpPr>
+          <p:cNvPr id="22" name="Shape 20"/>
+          <p:cNvSpPr/>
+          <p:nvPr/>
+        </p:nvSpPr>
+        <p:spPr>
+          <a:xfrm>
+            <a:off x="6409944" y="2057400"/>
+            <a:ext cx="91440" cy="310896"/>
+          </a:xfrm>
+          <a:prstGeom prst="rect">
+            <a:avLst/>
+          </a:prstGeom>
+          <a:solidFill>
+            <a:srgbClr val="2FE6C4"/>
+          </a:solidFill>
+          <a:ln/>
+        </p:spPr>
+      </p:sp>
+      <p:sp>
+        <p:nvSpPr>
+          <p:cNvPr id="23" name="Text 21"/>
+          <p:cNvSpPr txBox="1"/>
+          <p:nvPr/>
+        </p:nvSpPr>
+        <p:spPr>
+          <a:xfrm>
+            <a:off x="6629400" y="1609344"/>
+            <a:ext cx="4800600" cy="650138"/>
+          </a:xfrm>
+          <a:prstGeom prst="rect">
+            <a:avLst/>
+          </a:prstGeom>
+          <a:noFill/>
+          <a:ln/>
+        </p:spPr>
+        <p:txBody>
+          <a:bodyPr wrap="square" rtlCol="0" anchor="t"/>
+          <a:lstStyle/>
+          <a:p>
+            <a:pPr indent="0" marL="0">
+              <a:buNone/>
+            </a:pPr>
+            <a:r>
+              <a:rPr lang="en-US" sz="1800" b="1" dirty="0">
+                <a:solidFill>
+                  <a:srgbClr val="1F2429"/>
+                </a:solidFill>
+                <a:latin typeface="Calibri" pitchFamily="34" charset="0"/>
+                <a:ea typeface="Calibri" pitchFamily="34" charset="-122"/>
+                <a:cs typeface="Calibri" pitchFamily="34" charset="-120"/>
+              </a:rPr>
+              <a:t>Feeds, likes, carts</a:t>
+            </a:r>
+            <a:endParaRPr lang="en-US" sz="1800" dirty="0"/>
+          </a:p>
+        </p:txBody>
+      </p:sp>
+      <p:sp>
+        <p:nvSpPr>
+          <p:cNvPr id="24" name="Text 22"/>
+          <p:cNvSpPr txBox="1"/>
+          <p:nvPr/>
+        </p:nvSpPr>
+        <p:spPr>
+          <a:xfrm>
+            <a:off x="6629400" y="2142988"/>
+            <a:ext cx="4800600" cy="794614"/>
+          </a:xfrm>
+          <a:prstGeom prst="rect">
+            <a:avLst/>
+          </a:prstGeom>
+          <a:noFill/>
+          <a:ln/>
+        </p:spPr>
+        <p:txBody>
+          <a:bodyPr wrap="square" rtlCol="0" anchor="t"/>
+          <a:lstStyle/>
+          <a:p>
+            <a:pPr indent="0" marL="0">
+              <a:lnSpc>
+                <a:spcPct val="110000"/>
+              </a:lnSpc>
+              <a:buNone/>
+            </a:pPr>
+            <a:r>
+              <a:rPr lang="en-US" sz="1200" dirty="0">
+                <a:solidFill>
+                  <a:srgbClr val="6B7480"/>
+                </a:solidFill>
+                <a:latin typeface="Calibri" pitchFamily="34" charset="0"/>
+                <a:ea typeface="Calibri" pitchFamily="34" charset="-122"/>
+                <a:cs typeface="Calibri" pitchFamily="34" charset="-120"/>
+              </a:rPr>
+              <a:t>Serving slightly stale data beats an error page</a:t>
+            </a:r>
+            <a:endParaRPr lang="en-US" sz="1200" dirty="0"/>
+          </a:p>
+        </p:txBody>
+      </p:sp>
+      <p:sp>
+        <p:nvSpPr>
+          <p:cNvPr id="25" name="Shape 23"/>
+          <p:cNvSpPr/>
+          <p:nvPr/>
+        </p:nvSpPr>
+        <p:spPr>
+          <a:xfrm>
+            <a:off x="8938260" y="2980944"/>
+            <a:ext cx="0" cy="256032"/>
+          </a:xfrm>
+          <a:prstGeom prst="line">
+            <a:avLst/>
+          </a:prstGeom>
+          <a:noFill/>
+          <a:ln w="25400">
+            <a:solidFill>
+              <a:srgbClr val="8A939B"/>
+            </a:solidFill>
+            <a:prstDash val="solid"/>
+            <a:tailEnd type="triangle"/>
+          </a:ln>
+        </p:spPr>
+      </p:sp>
+      <p:sp>
+        <p:nvSpPr>
+          <p:cNvPr id="26" name="Shape 24"/>
+          <p:cNvSpPr/>
+          <p:nvPr/>
+        </p:nvSpPr>
+        <p:spPr>
+          <a:xfrm>
+            <a:off x="6263640" y="3236976"/>
+            <a:ext cx="5349240" cy="1444752"/>
+          </a:xfrm>
+          <a:prstGeom prst="roundRect">
+            <a:avLst>
+              <a:gd name="adj" fmla="val 5063"/>
+            </a:avLst>
+          </a:prstGeom>
+          <a:solidFill>
+            <a:srgbClr val="FFFFFF"/>
+          </a:solidFill>
+          <a:ln w="22225">
+            <a:solidFill>
+              <a:srgbClr val="8B7FD9"/>
+            </a:solidFill>
+            <a:prstDash val="solid"/>
+          </a:ln>
+          <a:effectLst>
+            <a:outerShdw sx="100000" sy="100000" kx="0" ky="0" algn="bl" rotWithShape="0" blurRad="76200" dist="25400" dir="5400000">
+              <a:srgbClr val="1F2429">
+                <a:alpha val="16000"/>
+              </a:srgbClr>
+            </a:outerShdw>
+          </a:effectLst>
+        </p:spPr>
+      </p:sp>
+      <p:sp>
+        <p:nvSpPr>
+          <p:cNvPr id="27" name="Shape 25"/>
+          <p:cNvSpPr/>
+          <p:nvPr/>
+        </p:nvSpPr>
+        <p:spPr>
+          <a:xfrm>
+            <a:off x="6409944" y="3758184"/>
+            <a:ext cx="91440" cy="310896"/>
+          </a:xfrm>
+          <a:prstGeom prst="rect">
+            <a:avLst/>
+          </a:prstGeom>
+          <a:solidFill>
+            <a:srgbClr val="8B7FD9"/>
+          </a:solidFill>
+          <a:ln/>
+        </p:spPr>
+      </p:sp>
+      <p:sp>
+        <p:nvSpPr>
+          <p:cNvPr id="28" name="Text 26"/>
+          <p:cNvSpPr txBox="1"/>
+          <p:nvPr/>
+        </p:nvSpPr>
+        <p:spPr>
+          <a:xfrm>
+            <a:off x="6629400" y="3310128"/>
+            <a:ext cx="4800600" cy="650138"/>
+          </a:xfrm>
+          <a:prstGeom prst="rect">
+            <a:avLst/>
+          </a:prstGeom>
+          <a:noFill/>
+          <a:ln/>
+        </p:spPr>
+        <p:txBody>
+          <a:bodyPr wrap="square" rtlCol="0" anchor="t"/>
+          <a:lstStyle/>
+          <a:p>
+            <a:pPr indent="0" marL="0">
+              <a:buNone/>
+            </a:pPr>
+            <a:r>
+              <a:rPr lang="en-US" sz="1800" b="1" dirty="0">
+                <a:solidFill>
+                  <a:srgbClr val="1F2429"/>
+                </a:solidFill>
+                <a:latin typeface="Calibri" pitchFamily="34" charset="0"/>
+                <a:ea typeface="Calibri" pitchFamily="34" charset="-122"/>
+                <a:cs typeface="Calibri" pitchFamily="34" charset="-120"/>
+              </a:rPr>
+              <a:t>Read-heavy catalogs</a:t>
+            </a:r>
+            <a:endParaRPr lang="en-US" sz="1800" dirty="0"/>
+          </a:p>
+        </p:txBody>
+      </p:sp>
+      <p:sp>
+        <p:nvSpPr>
+          <p:cNvPr id="29" name="Text 27"/>
+          <p:cNvSpPr txBox="1"/>
+          <p:nvPr/>
+        </p:nvSpPr>
+        <p:spPr>
+          <a:xfrm>
+            <a:off x="6629400" y="3843772"/>
+            <a:ext cx="4800600" cy="794614"/>
+          </a:xfrm>
+          <a:prstGeom prst="rect">
+            <a:avLst/>
+          </a:prstGeom>
+          <a:noFill/>
+          <a:ln/>
+        </p:spPr>
+        <p:txBody>
+          <a:bodyPr wrap="square" rtlCol="0" anchor="t"/>
+          <a:lstStyle/>
+          <a:p>
+            <a:pPr indent="0" marL="0">
+              <a:lnSpc>
+                <a:spcPct val="110000"/>
+              </a:lnSpc>
+              <a:buNone/>
+            </a:pPr>
+            <a:r>
+              <a:rPr lang="en-US" sz="1200" dirty="0">
+                <a:solidFill>
+                  <a:srgbClr val="6B7480"/>
+                </a:solidFill>
+                <a:latin typeface="Calibri" pitchFamily="34" charset="0"/>
+                <a:ea typeface="Calibri" pitchFamily="34" charset="-122"/>
+                <a:cs typeface="Calibri" pitchFamily="34" charset="-120"/>
+              </a:rPr>
+              <a:t>Users prefer a fast answer over the newest answer</a:t>
+            </a:r>
+            <a:endParaRPr lang="en-US" sz="1200" dirty="0"/>
+          </a:p>
+        </p:txBody>
+      </p:sp>
+      <p:sp>
+        <p:nvSpPr>
+          <p:cNvPr id="30" name="Shape 28"/>
+          <p:cNvSpPr/>
+          <p:nvPr/>
+        </p:nvSpPr>
+        <p:spPr>
+          <a:xfrm>
+            <a:off x="8938260" y="4681728"/>
+            <a:ext cx="0" cy="256032"/>
+          </a:xfrm>
+          <a:prstGeom prst="line">
+            <a:avLst/>
+          </a:prstGeom>
+          <a:noFill/>
+          <a:ln w="25400">
+            <a:solidFill>
+              <a:srgbClr val="8A939B"/>
+            </a:solidFill>
+            <a:prstDash val="solid"/>
+            <a:tailEnd type="triangle"/>
+          </a:ln>
+        </p:spPr>
+      </p:sp>
+      <p:sp>
+        <p:nvSpPr>
+          <p:cNvPr id="31" name="Shape 29"/>
+          <p:cNvSpPr/>
+          <p:nvPr/>
+        </p:nvSpPr>
+        <p:spPr>
+          <a:xfrm>
+            <a:off x="6263640" y="4937760"/>
+            <a:ext cx="5349240" cy="1444752"/>
+          </a:xfrm>
+          <a:prstGeom prst="roundRect">
+            <a:avLst>
+              <a:gd name="adj" fmla="val 5063"/>
+            </a:avLst>
+          </a:prstGeom>
+          <a:solidFill>
+            <a:srgbClr val="FFFFFF"/>
+          </a:solidFill>
+          <a:ln w="22225">
+            <a:solidFill>
+              <a:srgbClr val="E8A33D"/>
+            </a:solidFill>
+            <a:prstDash val="solid"/>
+          </a:ln>
+          <a:effectLst>
+            <a:outerShdw sx="100000" sy="100000" kx="0" ky="0" algn="bl" rotWithShape="0" blurRad="76200" dist="25400" dir="5400000">
+              <a:srgbClr val="1F2429">
+                <a:alpha val="16000"/>
+              </a:srgbClr>
+            </a:outerShdw>
+          </a:effectLst>
+        </p:spPr>
+      </p:sp>
+      <p:sp>
+        <p:nvSpPr>
+          <p:cNvPr id="32" name="Shape 30"/>
+          <p:cNvSpPr/>
+          <p:nvPr/>
+        </p:nvSpPr>
+        <p:spPr>
+          <a:xfrm>
+            <a:off x="6409944" y="5458968"/>
+            <a:ext cx="91440" cy="310896"/>
+          </a:xfrm>
+          <a:prstGeom prst="rect">
+            <a:avLst/>
+          </a:prstGeom>
+          <a:solidFill>
+            <a:srgbClr val="E8A33D"/>
+          </a:solidFill>
+          <a:ln/>
+        </p:spPr>
+      </p:sp>
+      <p:sp>
+        <p:nvSpPr>
+          <p:cNvPr id="33" name="Text 31"/>
+          <p:cNvSpPr txBox="1"/>
+          <p:nvPr/>
+        </p:nvSpPr>
+        <p:spPr>
+          <a:xfrm>
+            <a:off x="6629400" y="5010912"/>
+            <a:ext cx="4800600" cy="650138"/>
+          </a:xfrm>
+          <a:prstGeom prst="rect">
+            <a:avLst/>
+          </a:prstGeom>
+          <a:noFill/>
+          <a:ln/>
+        </p:spPr>
+        <p:txBody>
+          <a:bodyPr wrap="square" rtlCol="0" anchor="t"/>
+          <a:lstStyle/>
+          <a:p>
+            <a:pPr indent="0" marL="0">
+              <a:buNone/>
+            </a:pPr>
+            <a:r>
+              <a:rPr lang="en-US" sz="1800" b="1" dirty="0">
+                <a:solidFill>
+                  <a:srgbClr val="1F2429"/>
+                </a:solidFill>
+                <a:latin typeface="Calibri" pitchFamily="34" charset="0"/>
+                <a:ea typeface="Calibri" pitchFamily="34" charset="-122"/>
+                <a:cs typeface="Calibri" pitchFamily="34" charset="-120"/>
+              </a:rPr>
+              <a:t>Reconciliation is feasible</a:t>
+            </a:r>
+            <a:endParaRPr lang="en-US" sz="1800" dirty="0"/>
+          </a:p>
+        </p:txBody>
+      </p:sp>
+      <p:sp>
+        <p:nvSpPr>
+          <p:cNvPr id="34" name="Text 32"/>
+          <p:cNvSpPr txBox="1"/>
+          <p:nvPr/>
+        </p:nvSpPr>
+        <p:spPr>
+          <a:xfrm>
+            <a:off x="6629400" y="5544556"/>
+            <a:ext cx="4800600" cy="794614"/>
+          </a:xfrm>
+          <a:prstGeom prst="rect">
+            <a:avLst/>
+          </a:prstGeom>
+          <a:noFill/>
+          <a:ln/>
+        </p:spPr>
+        <p:txBody>
+          <a:bodyPr wrap="square" rtlCol="0" anchor="t"/>
+          <a:lstStyle/>
+          <a:p>
+            <a:pPr indent="0" marL="0">
+              <a:lnSpc>
+                <a:spcPct val="110000"/>
+              </a:lnSpc>
+              <a:buNone/>
+            </a:pPr>
+            <a:r>
+              <a:rPr lang="en-US" sz="1200" dirty="0">
+                <a:solidFill>
+                  <a:srgbClr val="6B7480"/>
+                </a:solidFill>
+                <a:latin typeface="Calibri" pitchFamily="34" charset="0"/>
+                <a:ea typeface="Calibri" pitchFamily="34" charset="-122"/>
+                <a:cs typeface="Calibri" pitchFamily="34" charset="-120"/>
+              </a:rPr>
+              <a:t>Conflicting writes can be merged after the partition heals</a:t>
+            </a:r>
+            <a:endParaRPr lang="en-US" sz="1200" dirty="0"/>
           </a:p>
         </p:txBody>
       </p:sp>
@@ -5447,7 +10475,7 @@
               <a:buNone/>
             </a:pPr>
             <a:r>
-              <a:rPr lang="en-US" sz="1500" b="1" dirty="0">
+              <a:rPr lang="en-US" sz="1800" b="1" dirty="0">
                 <a:solidFill>
                   <a:srgbClr val="14181C"/>
                 </a:solidFill>
@@ -5457,7 +10485,7 @@
               </a:rPr>
               <a:t>1</a:t>
             </a:r>
-            <a:endParaRPr lang="en-US" sz="1500" dirty="0"/>
+            <a:endParaRPr lang="en-US" sz="1800" dirty="0"/>
           </a:p>
         </p:txBody>
       </p:sp>
@@ -5486,7 +10514,7 @@
               <a:buNone/>
             </a:pPr>
             <a:r>
-              <a:rPr lang="en-US" sz="1450" dirty="0">
+              <a:rPr lang="en-US" sz="1800" dirty="0">
                 <a:solidFill>
                   <a:srgbClr val="1F2429"/>
                 </a:solidFill>
@@ -5496,7 +10524,7 @@
               </a:rPr>
               <a:t>Where relational databases struggle at web scale</a:t>
             </a:r>
-            <a:endParaRPr lang="en-US" sz="1450" dirty="0"/>
+            <a:endParaRPr lang="en-US" sz="1800" dirty="0"/>
           </a:p>
         </p:txBody>
       </p:sp>
@@ -5545,7 +10573,7 @@
               <a:buNone/>
             </a:pPr>
             <a:r>
-              <a:rPr lang="en-US" sz="1500" b="1" dirty="0">
+              <a:rPr lang="en-US" sz="1800" b="1" dirty="0">
                 <a:solidFill>
                   <a:srgbClr val="14181C"/>
                 </a:solidFill>
@@ -5555,7 +10583,7 @@
               </a:rPr>
               <a:t>2</a:t>
             </a:r>
-            <a:endParaRPr lang="en-US" sz="1500" dirty="0"/>
+            <a:endParaRPr lang="en-US" sz="1800" dirty="0"/>
           </a:p>
         </p:txBody>
       </p:sp>
@@ -5584,7 +10612,7 @@
               <a:buNone/>
             </a:pPr>
             <a:r>
-              <a:rPr lang="en-US" sz="1450" dirty="0">
+              <a:rPr lang="en-US" sz="1800" dirty="0">
                 <a:solidFill>
                   <a:srgbClr val="1F2429"/>
                 </a:solidFill>
@@ -5594,7 +10622,7 @@
               </a:rPr>
               <a:t>The shared characteristics that define “NoSQL”</a:t>
             </a:r>
-            <a:endParaRPr lang="en-US" sz="1450" dirty="0"/>
+            <a:endParaRPr lang="en-US" sz="1800" dirty="0"/>
           </a:p>
         </p:txBody>
       </p:sp>
@@ -5643,7 +10671,7 @@
               <a:buNone/>
             </a:pPr>
             <a:r>
-              <a:rPr lang="en-US" sz="1500" b="1" dirty="0">
+              <a:rPr lang="en-US" sz="1800" b="1" dirty="0">
                 <a:solidFill>
                   <a:srgbClr val="14181C"/>
                 </a:solidFill>
@@ -5653,7 +10681,7 @@
               </a:rPr>
               <a:t>3</a:t>
             </a:r>
-            <a:endParaRPr lang="en-US" sz="1500" dirty="0"/>
+            <a:endParaRPr lang="en-US" sz="1800" dirty="0"/>
           </a:p>
         </p:txBody>
       </p:sp>
@@ -5682,7 +10710,7 @@
               <a:buNone/>
             </a:pPr>
             <a:r>
-              <a:rPr lang="en-US" sz="1450" dirty="0">
+              <a:rPr lang="en-US" sz="1800" dirty="0">
                 <a:solidFill>
                   <a:srgbClr val="1F2429"/>
                 </a:solidFill>
@@ -5692,7 +10720,7 @@
               </a:rPr>
               <a:t>Relational vs. NoSQL, dimension by dimension</a:t>
             </a:r>
-            <a:endParaRPr lang="en-US" sz="1450" dirty="0"/>
+            <a:endParaRPr lang="en-US" sz="1800" dirty="0"/>
           </a:p>
         </p:txBody>
       </p:sp>
@@ -5741,7 +10769,7 @@
               <a:buNone/>
             </a:pPr>
             <a:r>
-              <a:rPr lang="en-US" sz="1500" b="1" dirty="0">
+              <a:rPr lang="en-US" sz="1800" b="1" dirty="0">
                 <a:solidFill>
                   <a:srgbClr val="14181C"/>
                 </a:solidFill>
@@ -5751,7 +10779,7 @@
               </a:rPr>
               <a:t>4</a:t>
             </a:r>
-            <a:endParaRPr lang="en-US" sz="1500" dirty="0"/>
+            <a:endParaRPr lang="en-US" sz="1800" dirty="0"/>
           </a:p>
         </p:txBody>
       </p:sp>
@@ -5780,7 +10808,7 @@
               <a:buNone/>
             </a:pPr>
             <a:r>
-              <a:rPr lang="en-US" sz="1450" dirty="0">
+              <a:rPr lang="en-US" sz="1800" dirty="0">
                 <a:solidFill>
                   <a:srgbClr val="1F2429"/>
                 </a:solidFill>
@@ -5790,7 +10818,7 @@
               </a:rPr>
               <a:t>The four major NoSQL families, with real products</a:t>
             </a:r>
-            <a:endParaRPr lang="en-US" sz="1450" dirty="0"/>
+            <a:endParaRPr lang="en-US" sz="1800" dirty="0"/>
           </a:p>
         </p:txBody>
       </p:sp>
@@ -5839,7 +10867,7 @@
               <a:buNone/>
             </a:pPr>
             <a:r>
-              <a:rPr lang="en-US" sz="1500" b="1" dirty="0">
+              <a:rPr lang="en-US" sz="1800" b="1" dirty="0">
                 <a:solidFill>
                   <a:srgbClr val="14181C"/>
                 </a:solidFill>
@@ -5849,7 +10877,7 @@
               </a:rPr>
               <a:t>5</a:t>
             </a:r>
-            <a:endParaRPr lang="en-US" sz="1500" dirty="0"/>
+            <a:endParaRPr lang="en-US" sz="1800" dirty="0"/>
           </a:p>
         </p:txBody>
       </p:sp>
@@ -5878,7 +10906,7 @@
               <a:buNone/>
             </a:pPr>
             <a:r>
-              <a:rPr lang="en-US" sz="1450" dirty="0">
+              <a:rPr lang="en-US" sz="1800" dirty="0">
                 <a:solidFill>
                   <a:srgbClr val="1F2429"/>
                 </a:solidFill>
@@ -5888,7 +10916,7 @@
               </a:rPr>
               <a:t>Advantages traded for, and the limitations that come with them</a:t>
             </a:r>
-            <a:endParaRPr lang="en-US" sz="1450" dirty="0"/>
+            <a:endParaRPr lang="en-US" sz="1800" dirty="0"/>
           </a:p>
         </p:txBody>
       </p:sp>
@@ -5937,7 +10965,7 @@
               <a:buNone/>
             </a:pPr>
             <a:r>
-              <a:rPr lang="en-US" sz="1500" b="1" dirty="0">
+              <a:rPr lang="en-US" sz="1800" b="1" dirty="0">
                 <a:solidFill>
                   <a:srgbClr val="14181C"/>
                 </a:solidFill>
@@ -5947,7 +10975,7 @@
               </a:rPr>
               <a:t>6</a:t>
             </a:r>
-            <a:endParaRPr lang="en-US" sz="1500" dirty="0"/>
+            <a:endParaRPr lang="en-US" sz="1800" dirty="0"/>
           </a:p>
         </p:txBody>
       </p:sp>
@@ -5976,7 +11004,7 @@
               <a:buNone/>
             </a:pPr>
             <a:r>
-              <a:rPr lang="en-US" sz="1450" dirty="0">
+              <a:rPr lang="en-US" sz="1800" dirty="0">
                 <a:solidFill>
                   <a:srgbClr val="1F2429"/>
                 </a:solidFill>
@@ -5986,7 +11014,7 @@
               </a:rPr>
               <a:t>Realistic use cases for reaching for NoSQL</a:t>
             </a:r>
-            <a:endParaRPr lang="en-US" sz="1450" dirty="0"/>
+            <a:endParaRPr lang="en-US" sz="1800" dirty="0"/>
           </a:p>
         </p:txBody>
       </p:sp>
@@ -6035,7 +11063,7 @@
               <a:buNone/>
             </a:pPr>
             <a:r>
-              <a:rPr lang="en-US" sz="1500" b="1" dirty="0">
+              <a:rPr lang="en-US" sz="1800" b="1" dirty="0">
                 <a:solidFill>
                   <a:srgbClr val="14181C"/>
                 </a:solidFill>
@@ -6045,7 +11073,7 @@
               </a:rPr>
               <a:t>7</a:t>
             </a:r>
-            <a:endParaRPr lang="en-US" sz="1500" dirty="0"/>
+            <a:endParaRPr lang="en-US" sz="1800" dirty="0"/>
           </a:p>
         </p:txBody>
       </p:sp>
@@ -6074,7 +11102,7 @@
               <a:buNone/>
             </a:pPr>
             <a:r>
-              <a:rPr lang="en-US" sz="1450" dirty="0">
+              <a:rPr lang="en-US" sz="1800" dirty="0">
                 <a:solidFill>
                   <a:srgbClr val="1F2429"/>
                 </a:solidFill>
@@ -6084,7 +11112,7 @@
               </a:rPr>
               <a:t>The CAP theorem — why you can't have it all</a:t>
             </a:r>
-            <a:endParaRPr lang="en-US" sz="1450" dirty="0"/>
+            <a:endParaRPr lang="en-US" sz="1800" dirty="0"/>
           </a:p>
         </p:txBody>
       </p:sp>
@@ -6113,7 +11141,7 @@
               <a:buNone/>
             </a:pPr>
             <a:r>
-              <a:rPr lang="en-US" sz="1000" u="sng" dirty="0">
+              <a:rPr lang="en-US" sz="1200" u="sng" dirty="0">
                 <a:solidFill>
                   <a:srgbClr val="8A939B"/>
                 </a:solidFill>
@@ -6134,7 +11162,7 @@
               <a:buNone/>
             </a:pPr>
             <a:r>
-              <a:rPr lang="en-US" sz="1000" dirty="0">
+              <a:rPr lang="en-US" sz="1200" dirty="0">
                 <a:solidFill>
                   <a:srgbClr val="8A939B"/>
                 </a:solidFill>
@@ -6144,7 +11172,1161 @@
               </a:rPr>
               <a:t>  ·  2</a:t>
             </a:r>
-            <a:endParaRPr lang="en-US" sz="1000" dirty="0"/>
+            <a:endParaRPr lang="en-US" sz="1200" dirty="0"/>
+          </a:p>
+        </p:txBody>
+      </p:sp>
+    </p:spTree>
+  </p:cSld>
+  <p:clrMapOvr>
+    <a:masterClrMapping/>
+  </p:clrMapOvr>
+</p:sld>
+</file>
+
+<file path=ppt/slides/slide20.xml><?xml version="1.0" encoding="utf-8"?>
+<p:sld xmlns:a="http://schemas.openxmlformats.org/drawingml/2006/main" xmlns:r="http://schemas.openxmlformats.org/officeDocument/2006/relationships" xmlns:p="http://schemas.openxmlformats.org/presentationml/2006/main">
+  <p:cSld name="Slide 9">
+    <p:bg>
+      <p:bgPr>
+        <a:solidFill>
+          <a:srgbClr val="F7F8F9"/>
+        </a:solidFill>
+      </p:bgPr>
+    </p:bg>
+    <p:spTree>
+      <p:nvGrpSpPr>
+        <p:cNvPr id="1" name=""/>
+        <p:cNvGrpSpPr/>
+        <p:nvPr/>
+      </p:nvGrpSpPr>
+      <p:grpSpPr>
+        <a:xfrm>
+          <a:off x="0" y="0"/>
+          <a:ext cx="0" cy="0"/>
+          <a:chOff x="0" y="0"/>
+          <a:chExt cx="0" cy="0"/>
+        </a:xfrm>
+      </p:grpSpPr>
+      <p:sp>
+        <p:nvSpPr>
+          <p:cNvPr id="2" name="Text 0"/>
+          <p:cNvSpPr txBox="1"/>
+          <p:nvPr/>
+        </p:nvSpPr>
+        <p:spPr>
+          <a:xfrm>
+            <a:off x="548640" y="320040"/>
+            <a:ext cx="9144000" cy="292608"/>
+          </a:xfrm>
+          <a:prstGeom prst="rect">
+            <a:avLst/>
+          </a:prstGeom>
+          <a:noFill/>
+          <a:ln/>
+        </p:spPr>
+        <p:txBody>
+          <a:bodyPr wrap="square" rtlCol="0" anchor="ctr"/>
+          <a:lstStyle/>
+          <a:p>
+            <a:pPr indent="0" marL="0">
+              <a:buNone/>
+            </a:pPr>
+            <a:r>
+              <a:rPr lang="en-US" sz="1200" b="1" spc="150" kern="0" dirty="0">
+                <a:solidFill>
+                  <a:srgbClr val="8B7FD9"/>
+                </a:solidFill>
+                <a:latin typeface="Calibri" pitchFamily="34" charset="0"/>
+                <a:ea typeface="Calibri" pitchFamily="34" charset="-122"/>
+                <a:cs typeface="Calibri" pitchFamily="34" charset="-120"/>
+              </a:rPr>
+              <a:t>DECISION GUIDE</a:t>
+            </a:r>
+            <a:endParaRPr lang="en-US" sz="1200" dirty="0"/>
+          </a:p>
+        </p:txBody>
+      </p:sp>
+      <p:sp>
+        <p:nvSpPr>
+          <p:cNvPr id="3" name="Text 1"/>
+          <p:cNvSpPr txBox="1"/>
+          <p:nvPr/>
+        </p:nvSpPr>
+        <p:spPr>
+          <a:xfrm>
+            <a:off x="548640" y="566928"/>
+            <a:ext cx="11064240" cy="640080"/>
+          </a:xfrm>
+          <a:prstGeom prst="rect">
+            <a:avLst/>
+          </a:prstGeom>
+          <a:noFill/>
+          <a:ln/>
+        </p:spPr>
+        <p:txBody>
+          <a:bodyPr wrap="square" rtlCol="0" anchor="ctr"/>
+          <a:lstStyle/>
+          <a:p>
+            <a:pPr indent="0" marL="0">
+              <a:buNone/>
+            </a:pPr>
+            <a:r>
+              <a:rPr lang="en-US" sz="2500" b="1" dirty="0">
+                <a:solidFill>
+                  <a:srgbClr val="1F2429"/>
+                </a:solidFill>
+                <a:latin typeface="Calibri" pitchFamily="34" charset="0"/>
+                <a:ea typeface="Calibri" pitchFamily="34" charset="-122"/>
+                <a:cs typeface="Calibri" pitchFamily="34" charset="-120"/>
+              </a:rPr>
+              <a:t>Choosing a Database, Step by Step</a:t>
+            </a:r>
+            <a:endParaRPr lang="en-US" sz="2500" dirty="0"/>
+          </a:p>
+        </p:txBody>
+      </p:sp>
+      <p:sp>
+        <p:nvSpPr>
+          <p:cNvPr id="4" name="Text 2"/>
+          <p:cNvSpPr txBox="1"/>
+          <p:nvPr/>
+        </p:nvSpPr>
+        <p:spPr>
+          <a:xfrm>
+            <a:off x="9951415" y="6455664"/>
+            <a:ext cx="2011680" cy="292608"/>
+          </a:xfrm>
+          <a:prstGeom prst="rect">
+            <a:avLst/>
+          </a:prstGeom>
+          <a:noFill/>
+          <a:ln/>
+        </p:spPr>
+        <p:txBody>
+          <a:bodyPr wrap="square" rtlCol="0" anchor="ctr"/>
+          <a:lstStyle/>
+          <a:p>
+            <a:pPr algn="r" indent="0" marL="0">
+              <a:buNone/>
+            </a:pPr>
+            <a:r>
+              <a:rPr lang="en-US" sz="1200" u="sng" dirty="0">
+                <a:solidFill>
+                  <a:srgbClr val="8A939B"/>
+                </a:solidFill>
+                <a:latin typeface="Calibri" pitchFamily="34" charset="0"/>
+                <a:ea typeface="Calibri" pitchFamily="34" charset="-122"/>
+                <a:cs typeface="Calibri" pitchFamily="34" charset="-120"/>
+                <a:hlinkClick r:id="rId1" invalidUrl="" action="" tgtFrame="" tooltip="" history="1" highlightClick="0" endSnd="0">
+                  <a:extLst>
+                    <a:ext uri="{A12FA001-AC4F-418D-AE19-62706E023703}">
+                      <ahyp:hlinkClr xmlns:ahyp="http://schemas.microsoft.com/office/drawing/2018/hyperlinkcolor" val="tx"/>
+                    </a:ext>
+                  </a:extLst>
+                </a:hlinkClick>
+              </a:rPr>
+              <a:t>cuinotes.com</a:t>
+            </a:r>
+            <a:pPr algn="r" indent="0" marL="0">
+              <a:buNone/>
+            </a:pPr>
+            <a:r>
+              <a:rPr lang="en-US" sz="1200" dirty="0">
+                <a:solidFill>
+                  <a:srgbClr val="8A939B"/>
+                </a:solidFill>
+                <a:latin typeface="Calibri" pitchFamily="34" charset="0"/>
+                <a:ea typeface="Calibri" pitchFamily="34" charset="-122"/>
+                <a:cs typeface="Calibri" pitchFamily="34" charset="-120"/>
+              </a:rPr>
+              <a:t>  ·  15</a:t>
+            </a:r>
+            <a:endParaRPr lang="en-US" sz="1200" dirty="0"/>
+          </a:p>
+        </p:txBody>
+      </p:sp>
+      <p:sp>
+        <p:nvSpPr>
+          <p:cNvPr id="5" name="Text 3"/>
+          <p:cNvSpPr txBox="1"/>
+          <p:nvPr/>
+        </p:nvSpPr>
+        <p:spPr>
+          <a:xfrm>
+            <a:off x="548640" y="1188720"/>
+            <a:ext cx="5349240" cy="274320"/>
+          </a:xfrm>
+          <a:prstGeom prst="rect">
+            <a:avLst/>
+          </a:prstGeom>
+          <a:noFill/>
+          <a:ln/>
+        </p:spPr>
+        <p:txBody>
+          <a:bodyPr wrap="square" rtlCol="0" anchor="ctr"/>
+          <a:lstStyle/>
+          <a:p>
+            <a:pPr indent="0" marL="0">
+              <a:buNone/>
+            </a:pPr>
+            <a:r>
+              <a:rPr lang="en-US" sz="1200" b="1" spc="100" kern="0" dirty="0">
+                <a:solidFill>
+                  <a:srgbClr val="2FE6C4"/>
+                </a:solidFill>
+                <a:latin typeface="Calibri" pitchFamily="34" charset="0"/>
+                <a:ea typeface="Calibri" pitchFamily="34" charset="-122"/>
+                <a:cs typeface="Calibri" pitchFamily="34" charset="-120"/>
+              </a:rPr>
+              <a:t>USE RELATIONAL WHEN</a:t>
+            </a:r>
+            <a:endParaRPr lang="en-US" sz="1200" dirty="0"/>
+          </a:p>
+        </p:txBody>
+      </p:sp>
+      <p:sp>
+        <p:nvSpPr>
+          <p:cNvPr id="6" name="Shape 4"/>
+          <p:cNvSpPr/>
+          <p:nvPr/>
+        </p:nvSpPr>
+        <p:spPr>
+          <a:xfrm>
+            <a:off x="548640" y="1536192"/>
+            <a:ext cx="5349240" cy="1444752"/>
+          </a:xfrm>
+          <a:prstGeom prst="roundRect">
+            <a:avLst>
+              <a:gd name="adj" fmla="val 5063"/>
+            </a:avLst>
+          </a:prstGeom>
+          <a:solidFill>
+            <a:srgbClr val="FFFFFF"/>
+          </a:solidFill>
+          <a:ln w="22225">
+            <a:solidFill>
+              <a:srgbClr val="2FE6C4"/>
+            </a:solidFill>
+            <a:prstDash val="solid"/>
+          </a:ln>
+          <a:effectLst>
+            <a:outerShdw sx="100000" sy="100000" kx="0" ky="0" algn="bl" rotWithShape="0" blurRad="76200" dist="25400" dir="5400000">
+              <a:srgbClr val="1F2429">
+                <a:alpha val="16000"/>
+              </a:srgbClr>
+            </a:outerShdw>
+          </a:effectLst>
+        </p:spPr>
+      </p:sp>
+      <p:sp>
+        <p:nvSpPr>
+          <p:cNvPr id="7" name="Shape 5"/>
+          <p:cNvSpPr/>
+          <p:nvPr/>
+        </p:nvSpPr>
+        <p:spPr>
+          <a:xfrm>
+            <a:off x="694944" y="2057400"/>
+            <a:ext cx="91440" cy="310896"/>
+          </a:xfrm>
+          <a:prstGeom prst="rect">
+            <a:avLst/>
+          </a:prstGeom>
+          <a:solidFill>
+            <a:srgbClr val="2FE6C4"/>
+          </a:solidFill>
+          <a:ln/>
+        </p:spPr>
+      </p:sp>
+      <p:sp>
+        <p:nvSpPr>
+          <p:cNvPr id="8" name="Text 6"/>
+          <p:cNvSpPr txBox="1"/>
+          <p:nvPr/>
+        </p:nvSpPr>
+        <p:spPr>
+          <a:xfrm>
+            <a:off x="914400" y="1609344"/>
+            <a:ext cx="4800600" cy="650138"/>
+          </a:xfrm>
+          <a:prstGeom prst="rect">
+            <a:avLst/>
+          </a:prstGeom>
+          <a:noFill/>
+          <a:ln/>
+        </p:spPr>
+        <p:txBody>
+          <a:bodyPr wrap="square" rtlCol="0" anchor="t"/>
+          <a:lstStyle/>
+          <a:p>
+            <a:pPr indent="0" marL="0">
+              <a:buNone/>
+            </a:pPr>
+            <a:r>
+              <a:rPr lang="en-US" sz="1800" b="1" dirty="0">
+                <a:solidFill>
+                  <a:srgbClr val="1F2429"/>
+                </a:solidFill>
+                <a:latin typeface="Calibri" pitchFamily="34" charset="0"/>
+                <a:ea typeface="Calibri" pitchFamily="34" charset="-122"/>
+                <a:cs typeface="Calibri" pitchFamily="34" charset="-120"/>
+              </a:rPr>
+              <a:t>Data is highly structured</a:t>
+            </a:r>
+            <a:endParaRPr lang="en-US" sz="1800" dirty="0"/>
+          </a:p>
+        </p:txBody>
+      </p:sp>
+      <p:sp>
+        <p:nvSpPr>
+          <p:cNvPr id="9" name="Text 7"/>
+          <p:cNvSpPr txBox="1"/>
+          <p:nvPr/>
+        </p:nvSpPr>
+        <p:spPr>
+          <a:xfrm>
+            <a:off x="914400" y="2142988"/>
+            <a:ext cx="4800600" cy="794614"/>
+          </a:xfrm>
+          <a:prstGeom prst="rect">
+            <a:avLst/>
+          </a:prstGeom>
+          <a:noFill/>
+          <a:ln/>
+        </p:spPr>
+        <p:txBody>
+          <a:bodyPr wrap="square" rtlCol="0" anchor="t"/>
+          <a:lstStyle/>
+          <a:p>
+            <a:pPr indent="0" marL="0">
+              <a:lnSpc>
+                <a:spcPct val="110000"/>
+              </a:lnSpc>
+              <a:buNone/>
+            </a:pPr>
+            <a:r>
+              <a:rPr lang="en-US" sz="1200" dirty="0">
+                <a:solidFill>
+                  <a:srgbClr val="6B7480"/>
+                </a:solidFill>
+                <a:latin typeface="Calibri" pitchFamily="34" charset="0"/>
+                <a:ea typeface="Calibri" pitchFamily="34" charset="-122"/>
+                <a:cs typeface="Calibri" pitchFamily="34" charset="-120"/>
+              </a:rPr>
+              <a:t>The schema is stable and integrity rules matter most</a:t>
+            </a:r>
+            <a:endParaRPr lang="en-US" sz="1200" dirty="0"/>
+          </a:p>
+        </p:txBody>
+      </p:sp>
+      <p:sp>
+        <p:nvSpPr>
+          <p:cNvPr id="10" name="Shape 8"/>
+          <p:cNvSpPr/>
+          <p:nvPr/>
+        </p:nvSpPr>
+        <p:spPr>
+          <a:xfrm>
+            <a:off x="3223260" y="2980944"/>
+            <a:ext cx="0" cy="256032"/>
+          </a:xfrm>
+          <a:prstGeom prst="line">
+            <a:avLst/>
+          </a:prstGeom>
+          <a:noFill/>
+          <a:ln w="25400">
+            <a:solidFill>
+              <a:srgbClr val="8A939B"/>
+            </a:solidFill>
+            <a:prstDash val="solid"/>
+            <a:tailEnd type="triangle"/>
+          </a:ln>
+        </p:spPr>
+      </p:sp>
+      <p:sp>
+        <p:nvSpPr>
+          <p:cNvPr id="11" name="Shape 9"/>
+          <p:cNvSpPr/>
+          <p:nvPr/>
+        </p:nvSpPr>
+        <p:spPr>
+          <a:xfrm>
+            <a:off x="548640" y="3236976"/>
+            <a:ext cx="5349240" cy="1444752"/>
+          </a:xfrm>
+          <a:prstGeom prst="roundRect">
+            <a:avLst>
+              <a:gd name="adj" fmla="val 5063"/>
+            </a:avLst>
+          </a:prstGeom>
+          <a:solidFill>
+            <a:srgbClr val="FFFFFF"/>
+          </a:solidFill>
+          <a:ln w="22225">
+            <a:solidFill>
+              <a:srgbClr val="8B7FD9"/>
+            </a:solidFill>
+            <a:prstDash val="solid"/>
+          </a:ln>
+          <a:effectLst>
+            <a:outerShdw sx="100000" sy="100000" kx="0" ky="0" algn="bl" rotWithShape="0" blurRad="76200" dist="25400" dir="5400000">
+              <a:srgbClr val="1F2429">
+                <a:alpha val="16000"/>
+              </a:srgbClr>
+            </a:outerShdw>
+          </a:effectLst>
+        </p:spPr>
+      </p:sp>
+      <p:sp>
+        <p:nvSpPr>
+          <p:cNvPr id="12" name="Shape 10"/>
+          <p:cNvSpPr/>
+          <p:nvPr/>
+        </p:nvSpPr>
+        <p:spPr>
+          <a:xfrm>
+            <a:off x="694944" y="3758184"/>
+            <a:ext cx="91440" cy="310896"/>
+          </a:xfrm>
+          <a:prstGeom prst="rect">
+            <a:avLst/>
+          </a:prstGeom>
+          <a:solidFill>
+            <a:srgbClr val="8B7FD9"/>
+          </a:solidFill>
+          <a:ln/>
+        </p:spPr>
+      </p:sp>
+      <p:sp>
+        <p:nvSpPr>
+          <p:cNvPr id="13" name="Text 11"/>
+          <p:cNvSpPr txBox="1"/>
+          <p:nvPr/>
+        </p:nvSpPr>
+        <p:spPr>
+          <a:xfrm>
+            <a:off x="914400" y="3310128"/>
+            <a:ext cx="4800600" cy="650138"/>
+          </a:xfrm>
+          <a:prstGeom prst="rect">
+            <a:avLst/>
+          </a:prstGeom>
+          <a:noFill/>
+          <a:ln/>
+        </p:spPr>
+        <p:txBody>
+          <a:bodyPr wrap="square" rtlCol="0" anchor="t"/>
+          <a:lstStyle/>
+          <a:p>
+            <a:pPr indent="0" marL="0">
+              <a:buNone/>
+            </a:pPr>
+            <a:r>
+              <a:rPr lang="en-US" sz="1800" b="1" dirty="0">
+                <a:solidFill>
+                  <a:srgbClr val="1F2429"/>
+                </a:solidFill>
+                <a:latin typeface="Calibri" pitchFamily="34" charset="0"/>
+                <a:ea typeface="Calibri" pitchFamily="34" charset="-122"/>
+                <a:cs typeface="Calibri" pitchFamily="34" charset="-120"/>
+              </a:rPr>
+              <a:t>Transactions span many rows</a:t>
+            </a:r>
+            <a:endParaRPr lang="en-US" sz="1800" dirty="0"/>
+          </a:p>
+        </p:txBody>
+      </p:sp>
+      <p:sp>
+        <p:nvSpPr>
+          <p:cNvPr id="14" name="Text 12"/>
+          <p:cNvSpPr txBox="1"/>
+          <p:nvPr/>
+        </p:nvSpPr>
+        <p:spPr>
+          <a:xfrm>
+            <a:off x="914400" y="3843772"/>
+            <a:ext cx="4800600" cy="794614"/>
+          </a:xfrm>
+          <a:prstGeom prst="rect">
+            <a:avLst/>
+          </a:prstGeom>
+          <a:noFill/>
+          <a:ln/>
+        </p:spPr>
+        <p:txBody>
+          <a:bodyPr wrap="square" rtlCol="0" anchor="t"/>
+          <a:lstStyle/>
+          <a:p>
+            <a:pPr indent="0" marL="0">
+              <a:lnSpc>
+                <a:spcPct val="110000"/>
+              </a:lnSpc>
+              <a:buNone/>
+            </a:pPr>
+            <a:r>
+              <a:rPr lang="en-US" sz="1200" dirty="0">
+                <a:solidFill>
+                  <a:srgbClr val="6B7480"/>
+                </a:solidFill>
+                <a:latin typeface="Calibri" pitchFamily="34" charset="0"/>
+                <a:ea typeface="Calibri" pitchFamily="34" charset="-122"/>
+                <a:cs typeface="Calibri" pitchFamily="34" charset="-120"/>
+              </a:rPr>
+              <a:t>Money moves, orders, inventory: ACID is required</a:t>
+            </a:r>
+            <a:endParaRPr lang="en-US" sz="1200" dirty="0"/>
+          </a:p>
+        </p:txBody>
+      </p:sp>
+      <p:sp>
+        <p:nvSpPr>
+          <p:cNvPr id="15" name="Shape 13"/>
+          <p:cNvSpPr/>
+          <p:nvPr/>
+        </p:nvSpPr>
+        <p:spPr>
+          <a:xfrm>
+            <a:off x="3223260" y="4681728"/>
+            <a:ext cx="0" cy="256032"/>
+          </a:xfrm>
+          <a:prstGeom prst="line">
+            <a:avLst/>
+          </a:prstGeom>
+          <a:noFill/>
+          <a:ln w="25400">
+            <a:solidFill>
+              <a:srgbClr val="8A939B"/>
+            </a:solidFill>
+            <a:prstDash val="solid"/>
+            <a:tailEnd type="triangle"/>
+          </a:ln>
+        </p:spPr>
+      </p:sp>
+      <p:sp>
+        <p:nvSpPr>
+          <p:cNvPr id="16" name="Shape 14"/>
+          <p:cNvSpPr/>
+          <p:nvPr/>
+        </p:nvSpPr>
+        <p:spPr>
+          <a:xfrm>
+            <a:off x="548640" y="4937760"/>
+            <a:ext cx="5349240" cy="1444752"/>
+          </a:xfrm>
+          <a:prstGeom prst="roundRect">
+            <a:avLst>
+              <a:gd name="adj" fmla="val 5063"/>
+            </a:avLst>
+          </a:prstGeom>
+          <a:solidFill>
+            <a:srgbClr val="FFFFFF"/>
+          </a:solidFill>
+          <a:ln w="22225">
+            <a:solidFill>
+              <a:srgbClr val="E8A33D"/>
+            </a:solidFill>
+            <a:prstDash val="solid"/>
+          </a:ln>
+          <a:effectLst>
+            <a:outerShdw sx="100000" sy="100000" kx="0" ky="0" algn="bl" rotWithShape="0" blurRad="76200" dist="25400" dir="5400000">
+              <a:srgbClr val="1F2429">
+                <a:alpha val="16000"/>
+              </a:srgbClr>
+            </a:outerShdw>
+          </a:effectLst>
+        </p:spPr>
+      </p:sp>
+      <p:sp>
+        <p:nvSpPr>
+          <p:cNvPr id="17" name="Shape 15"/>
+          <p:cNvSpPr/>
+          <p:nvPr/>
+        </p:nvSpPr>
+        <p:spPr>
+          <a:xfrm>
+            <a:off x="694944" y="5458968"/>
+            <a:ext cx="91440" cy="310896"/>
+          </a:xfrm>
+          <a:prstGeom prst="rect">
+            <a:avLst/>
+          </a:prstGeom>
+          <a:solidFill>
+            <a:srgbClr val="E8A33D"/>
+          </a:solidFill>
+          <a:ln/>
+        </p:spPr>
+      </p:sp>
+      <p:sp>
+        <p:nvSpPr>
+          <p:cNvPr id="18" name="Text 16"/>
+          <p:cNvSpPr txBox="1"/>
+          <p:nvPr/>
+        </p:nvSpPr>
+        <p:spPr>
+          <a:xfrm>
+            <a:off x="914400" y="5010912"/>
+            <a:ext cx="4800600" cy="650138"/>
+          </a:xfrm>
+          <a:prstGeom prst="rect">
+            <a:avLst/>
+          </a:prstGeom>
+          <a:noFill/>
+          <a:ln/>
+        </p:spPr>
+        <p:txBody>
+          <a:bodyPr wrap="square" rtlCol="0" anchor="t"/>
+          <a:lstStyle/>
+          <a:p>
+            <a:pPr indent="0" marL="0">
+              <a:buNone/>
+            </a:pPr>
+            <a:r>
+              <a:rPr lang="en-US" sz="1800" b="1" dirty="0">
+                <a:solidFill>
+                  <a:srgbClr val="1F2429"/>
+                </a:solidFill>
+                <a:latin typeface="Calibri" pitchFamily="34" charset="0"/>
+                <a:ea typeface="Calibri" pitchFamily="34" charset="-122"/>
+                <a:cs typeface="Calibri" pitchFamily="34" charset="-120"/>
+              </a:rPr>
+              <a:t>Queries are ad-hoc</a:t>
+            </a:r>
+            <a:endParaRPr lang="en-US" sz="1800" dirty="0"/>
+          </a:p>
+        </p:txBody>
+      </p:sp>
+      <p:sp>
+        <p:nvSpPr>
+          <p:cNvPr id="19" name="Text 17"/>
+          <p:cNvSpPr txBox="1"/>
+          <p:nvPr/>
+        </p:nvSpPr>
+        <p:spPr>
+          <a:xfrm>
+            <a:off x="914400" y="5544556"/>
+            <a:ext cx="4800600" cy="794614"/>
+          </a:xfrm>
+          <a:prstGeom prst="rect">
+            <a:avLst/>
+          </a:prstGeom>
+          <a:noFill/>
+          <a:ln/>
+        </p:spPr>
+        <p:txBody>
+          <a:bodyPr wrap="square" rtlCol="0" anchor="t"/>
+          <a:lstStyle/>
+          <a:p>
+            <a:pPr indent="0" marL="0">
+              <a:lnSpc>
+                <a:spcPct val="110000"/>
+              </a:lnSpc>
+              <a:buNone/>
+            </a:pPr>
+            <a:r>
+              <a:rPr lang="en-US" sz="1200" dirty="0">
+                <a:solidFill>
+                  <a:srgbClr val="6B7480"/>
+                </a:solidFill>
+                <a:latin typeface="Calibri" pitchFamily="34" charset="0"/>
+                <a:ea typeface="Calibri" pitchFamily="34" charset="-122"/>
+                <a:cs typeface="Calibri" pitchFamily="34" charset="-120"/>
+              </a:rPr>
+              <a:t>Reporting and joins across many tables</a:t>
+            </a:r>
+            <a:endParaRPr lang="en-US" sz="1200" dirty="0"/>
+          </a:p>
+        </p:txBody>
+      </p:sp>
+      <p:sp>
+        <p:nvSpPr>
+          <p:cNvPr id="20" name="Text 18"/>
+          <p:cNvSpPr txBox="1"/>
+          <p:nvPr/>
+        </p:nvSpPr>
+        <p:spPr>
+          <a:xfrm>
+            <a:off x="6263640" y="1188720"/>
+            <a:ext cx="5349240" cy="274320"/>
+          </a:xfrm>
+          <a:prstGeom prst="rect">
+            <a:avLst/>
+          </a:prstGeom>
+          <a:noFill/>
+          <a:ln/>
+        </p:spPr>
+        <p:txBody>
+          <a:bodyPr wrap="square" rtlCol="0" anchor="ctr"/>
+          <a:lstStyle/>
+          <a:p>
+            <a:pPr indent="0" marL="0">
+              <a:buNone/>
+            </a:pPr>
+            <a:r>
+              <a:rPr lang="en-US" sz="1200" b="1" spc="100" kern="0" dirty="0">
+                <a:solidFill>
+                  <a:srgbClr val="E8A33D"/>
+                </a:solidFill>
+                <a:latin typeface="Calibri" pitchFamily="34" charset="0"/>
+                <a:ea typeface="Calibri" pitchFamily="34" charset="-122"/>
+                <a:cs typeface="Calibri" pitchFamily="34" charset="-120"/>
+              </a:rPr>
+              <a:t>USE NOSQL WHEN</a:t>
+            </a:r>
+            <a:endParaRPr lang="en-US" sz="1200" dirty="0"/>
+          </a:p>
+        </p:txBody>
+      </p:sp>
+      <p:sp>
+        <p:nvSpPr>
+          <p:cNvPr id="21" name="Shape 19"/>
+          <p:cNvSpPr/>
+          <p:nvPr/>
+        </p:nvSpPr>
+        <p:spPr>
+          <a:xfrm>
+            <a:off x="6263640" y="1536192"/>
+            <a:ext cx="5349240" cy="1444752"/>
+          </a:xfrm>
+          <a:prstGeom prst="roundRect">
+            <a:avLst>
+              <a:gd name="adj" fmla="val 5063"/>
+            </a:avLst>
+          </a:prstGeom>
+          <a:solidFill>
+            <a:srgbClr val="FFFFFF"/>
+          </a:solidFill>
+          <a:ln w="22225">
+            <a:solidFill>
+              <a:srgbClr val="2FE6C4"/>
+            </a:solidFill>
+            <a:prstDash val="solid"/>
+          </a:ln>
+          <a:effectLst>
+            <a:outerShdw sx="100000" sy="100000" kx="0" ky="0" algn="bl" rotWithShape="0" blurRad="76200" dist="25400" dir="5400000">
+              <a:srgbClr val="1F2429">
+                <a:alpha val="16000"/>
+              </a:srgbClr>
+            </a:outerShdw>
+          </a:effectLst>
+        </p:spPr>
+      </p:sp>
+      <p:sp>
+        <p:nvSpPr>
+          <p:cNvPr id="22" name="Shape 20"/>
+          <p:cNvSpPr/>
+          <p:nvPr/>
+        </p:nvSpPr>
+        <p:spPr>
+          <a:xfrm>
+            <a:off x="6409944" y="2057400"/>
+            <a:ext cx="91440" cy="310896"/>
+          </a:xfrm>
+          <a:prstGeom prst="rect">
+            <a:avLst/>
+          </a:prstGeom>
+          <a:solidFill>
+            <a:srgbClr val="2FE6C4"/>
+          </a:solidFill>
+          <a:ln/>
+        </p:spPr>
+      </p:sp>
+      <p:sp>
+        <p:nvSpPr>
+          <p:cNvPr id="23" name="Text 21"/>
+          <p:cNvSpPr txBox="1"/>
+          <p:nvPr/>
+        </p:nvSpPr>
+        <p:spPr>
+          <a:xfrm>
+            <a:off x="6629400" y="1609344"/>
+            <a:ext cx="4800600" cy="650138"/>
+          </a:xfrm>
+          <a:prstGeom prst="rect">
+            <a:avLst/>
+          </a:prstGeom>
+          <a:noFill/>
+          <a:ln/>
+        </p:spPr>
+        <p:txBody>
+          <a:bodyPr wrap="square" rtlCol="0" anchor="t"/>
+          <a:lstStyle/>
+          <a:p>
+            <a:pPr indent="0" marL="0">
+              <a:buNone/>
+            </a:pPr>
+            <a:r>
+              <a:rPr lang="en-US" sz="1800" b="1" dirty="0">
+                <a:solidFill>
+                  <a:srgbClr val="1F2429"/>
+                </a:solidFill>
+                <a:latin typeface="Calibri" pitchFamily="34" charset="0"/>
+                <a:ea typeface="Calibri" pitchFamily="34" charset="-122"/>
+                <a:cs typeface="Calibri" pitchFamily="34" charset="-120"/>
+              </a:rPr>
+              <a:t>Shape varies per record</a:t>
+            </a:r>
+            <a:endParaRPr lang="en-US" sz="1800" dirty="0"/>
+          </a:p>
+        </p:txBody>
+      </p:sp>
+      <p:sp>
+        <p:nvSpPr>
+          <p:cNvPr id="24" name="Text 22"/>
+          <p:cNvSpPr txBox="1"/>
+          <p:nvPr/>
+        </p:nvSpPr>
+        <p:spPr>
+          <a:xfrm>
+            <a:off x="6629400" y="2142988"/>
+            <a:ext cx="4800600" cy="794614"/>
+          </a:xfrm>
+          <a:prstGeom prst="rect">
+            <a:avLst/>
+          </a:prstGeom>
+          <a:noFill/>
+          <a:ln/>
+        </p:spPr>
+        <p:txBody>
+          <a:bodyPr wrap="square" rtlCol="0" anchor="t"/>
+          <a:lstStyle/>
+          <a:p>
+            <a:pPr indent="0" marL="0">
+              <a:lnSpc>
+                <a:spcPct val="110000"/>
+              </a:lnSpc>
+              <a:buNone/>
+            </a:pPr>
+            <a:r>
+              <a:rPr lang="en-US" sz="1200" dirty="0">
+                <a:solidFill>
+                  <a:srgbClr val="6B7480"/>
+                </a:solidFill>
+                <a:latin typeface="Calibri" pitchFamily="34" charset="0"/>
+                <a:ea typeface="Calibri" pitchFamily="34" charset="-122"/>
+                <a:cs typeface="Calibri" pitchFamily="34" charset="-120"/>
+              </a:rPr>
+              <a:t>Catalogs, profiles, and content with different fields</a:t>
+            </a:r>
+            <a:endParaRPr lang="en-US" sz="1200" dirty="0"/>
+          </a:p>
+        </p:txBody>
+      </p:sp>
+      <p:sp>
+        <p:nvSpPr>
+          <p:cNvPr id="25" name="Shape 23"/>
+          <p:cNvSpPr/>
+          <p:nvPr/>
+        </p:nvSpPr>
+        <p:spPr>
+          <a:xfrm>
+            <a:off x="8938260" y="2980944"/>
+            <a:ext cx="0" cy="256032"/>
+          </a:xfrm>
+          <a:prstGeom prst="line">
+            <a:avLst/>
+          </a:prstGeom>
+          <a:noFill/>
+          <a:ln w="25400">
+            <a:solidFill>
+              <a:srgbClr val="8A939B"/>
+            </a:solidFill>
+            <a:prstDash val="solid"/>
+            <a:tailEnd type="triangle"/>
+          </a:ln>
+        </p:spPr>
+      </p:sp>
+      <p:sp>
+        <p:nvSpPr>
+          <p:cNvPr id="26" name="Shape 24"/>
+          <p:cNvSpPr/>
+          <p:nvPr/>
+        </p:nvSpPr>
+        <p:spPr>
+          <a:xfrm>
+            <a:off x="6263640" y="3236976"/>
+            <a:ext cx="5349240" cy="1444752"/>
+          </a:xfrm>
+          <a:prstGeom prst="roundRect">
+            <a:avLst>
+              <a:gd name="adj" fmla="val 5063"/>
+            </a:avLst>
+          </a:prstGeom>
+          <a:solidFill>
+            <a:srgbClr val="FFFFFF"/>
+          </a:solidFill>
+          <a:ln w="22225">
+            <a:solidFill>
+              <a:srgbClr val="8B7FD9"/>
+            </a:solidFill>
+            <a:prstDash val="solid"/>
+          </a:ln>
+          <a:effectLst>
+            <a:outerShdw sx="100000" sy="100000" kx="0" ky="0" algn="bl" rotWithShape="0" blurRad="76200" dist="25400" dir="5400000">
+              <a:srgbClr val="1F2429">
+                <a:alpha val="16000"/>
+              </a:srgbClr>
+            </a:outerShdw>
+          </a:effectLst>
+        </p:spPr>
+      </p:sp>
+      <p:sp>
+        <p:nvSpPr>
+          <p:cNvPr id="27" name="Shape 25"/>
+          <p:cNvSpPr/>
+          <p:nvPr/>
+        </p:nvSpPr>
+        <p:spPr>
+          <a:xfrm>
+            <a:off x="6409944" y="3758184"/>
+            <a:ext cx="91440" cy="310896"/>
+          </a:xfrm>
+          <a:prstGeom prst="rect">
+            <a:avLst/>
+          </a:prstGeom>
+          <a:solidFill>
+            <a:srgbClr val="8B7FD9"/>
+          </a:solidFill>
+          <a:ln/>
+        </p:spPr>
+      </p:sp>
+      <p:sp>
+        <p:nvSpPr>
+          <p:cNvPr id="28" name="Text 26"/>
+          <p:cNvSpPr txBox="1"/>
+          <p:nvPr/>
+        </p:nvSpPr>
+        <p:spPr>
+          <a:xfrm>
+            <a:off x="6629400" y="3310128"/>
+            <a:ext cx="4800600" cy="650138"/>
+          </a:xfrm>
+          <a:prstGeom prst="rect">
+            <a:avLst/>
+          </a:prstGeom>
+          <a:noFill/>
+          <a:ln/>
+        </p:spPr>
+        <p:txBody>
+          <a:bodyPr wrap="square" rtlCol="0" anchor="t"/>
+          <a:lstStyle/>
+          <a:p>
+            <a:pPr indent="0" marL="0">
+              <a:buNone/>
+            </a:pPr>
+            <a:r>
+              <a:rPr lang="en-US" sz="1800" b="1" dirty="0">
+                <a:solidFill>
+                  <a:srgbClr val="1F2429"/>
+                </a:solidFill>
+                <a:latin typeface="Calibri" pitchFamily="34" charset="0"/>
+                <a:ea typeface="Calibri" pitchFamily="34" charset="-122"/>
+                <a:cs typeface="Calibri" pitchFamily="34" charset="-120"/>
+              </a:rPr>
+              <a:t>Scale exceeds one server</a:t>
+            </a:r>
+            <a:endParaRPr lang="en-US" sz="1800" dirty="0"/>
+          </a:p>
+        </p:txBody>
+      </p:sp>
+      <p:sp>
+        <p:nvSpPr>
+          <p:cNvPr id="29" name="Text 27"/>
+          <p:cNvSpPr txBox="1"/>
+          <p:nvPr/>
+        </p:nvSpPr>
+        <p:spPr>
+          <a:xfrm>
+            <a:off x="6629400" y="3843772"/>
+            <a:ext cx="4800600" cy="794614"/>
+          </a:xfrm>
+          <a:prstGeom prst="rect">
+            <a:avLst/>
+          </a:prstGeom>
+          <a:noFill/>
+          <a:ln/>
+        </p:spPr>
+        <p:txBody>
+          <a:bodyPr wrap="square" rtlCol="0" anchor="t"/>
+          <a:lstStyle/>
+          <a:p>
+            <a:pPr indent="0" marL="0">
+              <a:lnSpc>
+                <a:spcPct val="110000"/>
+              </a:lnSpc>
+              <a:buNone/>
+            </a:pPr>
+            <a:r>
+              <a:rPr lang="en-US" sz="1200" dirty="0">
+                <a:solidFill>
+                  <a:srgbClr val="6B7480"/>
+                </a:solidFill>
+                <a:latin typeface="Calibri" pitchFamily="34" charset="0"/>
+                <a:ea typeface="Calibri" pitchFamily="34" charset="-122"/>
+                <a:cs typeface="Calibri" pitchFamily="34" charset="-120"/>
+              </a:rPr>
+              <a:t>Write volume or data size outgrows vertical scaling</a:t>
+            </a:r>
+            <a:endParaRPr lang="en-US" sz="1200" dirty="0"/>
+          </a:p>
+        </p:txBody>
+      </p:sp>
+      <p:sp>
+        <p:nvSpPr>
+          <p:cNvPr id="30" name="Shape 28"/>
+          <p:cNvSpPr/>
+          <p:nvPr/>
+        </p:nvSpPr>
+        <p:spPr>
+          <a:xfrm>
+            <a:off x="8938260" y="4681728"/>
+            <a:ext cx="0" cy="256032"/>
+          </a:xfrm>
+          <a:prstGeom prst="line">
+            <a:avLst/>
+          </a:prstGeom>
+          <a:noFill/>
+          <a:ln w="25400">
+            <a:solidFill>
+              <a:srgbClr val="8A939B"/>
+            </a:solidFill>
+            <a:prstDash val="solid"/>
+            <a:tailEnd type="triangle"/>
+          </a:ln>
+        </p:spPr>
+      </p:sp>
+      <p:sp>
+        <p:nvSpPr>
+          <p:cNvPr id="31" name="Shape 29"/>
+          <p:cNvSpPr/>
+          <p:nvPr/>
+        </p:nvSpPr>
+        <p:spPr>
+          <a:xfrm>
+            <a:off x="6263640" y="4937760"/>
+            <a:ext cx="5349240" cy="1444752"/>
+          </a:xfrm>
+          <a:prstGeom prst="roundRect">
+            <a:avLst>
+              <a:gd name="adj" fmla="val 5063"/>
+            </a:avLst>
+          </a:prstGeom>
+          <a:solidFill>
+            <a:srgbClr val="FFFFFF"/>
+          </a:solidFill>
+          <a:ln w="22225">
+            <a:solidFill>
+              <a:srgbClr val="E8A33D"/>
+            </a:solidFill>
+            <a:prstDash val="solid"/>
+          </a:ln>
+          <a:effectLst>
+            <a:outerShdw sx="100000" sy="100000" kx="0" ky="0" algn="bl" rotWithShape="0" blurRad="76200" dist="25400" dir="5400000">
+              <a:srgbClr val="1F2429">
+                <a:alpha val="16000"/>
+              </a:srgbClr>
+            </a:outerShdw>
+          </a:effectLst>
+        </p:spPr>
+      </p:sp>
+      <p:sp>
+        <p:nvSpPr>
+          <p:cNvPr id="32" name="Shape 30"/>
+          <p:cNvSpPr/>
+          <p:nvPr/>
+        </p:nvSpPr>
+        <p:spPr>
+          <a:xfrm>
+            <a:off x="6409944" y="5458968"/>
+            <a:ext cx="91440" cy="310896"/>
+          </a:xfrm>
+          <a:prstGeom prst="rect">
+            <a:avLst/>
+          </a:prstGeom>
+          <a:solidFill>
+            <a:srgbClr val="E8A33D"/>
+          </a:solidFill>
+          <a:ln/>
+        </p:spPr>
+      </p:sp>
+      <p:sp>
+        <p:nvSpPr>
+          <p:cNvPr id="33" name="Text 31"/>
+          <p:cNvSpPr txBox="1"/>
+          <p:nvPr/>
+        </p:nvSpPr>
+        <p:spPr>
+          <a:xfrm>
+            <a:off x="6629400" y="5010912"/>
+            <a:ext cx="4800600" cy="650138"/>
+          </a:xfrm>
+          <a:prstGeom prst="rect">
+            <a:avLst/>
+          </a:prstGeom>
+          <a:noFill/>
+          <a:ln/>
+        </p:spPr>
+        <p:txBody>
+          <a:bodyPr wrap="square" rtlCol="0" anchor="t"/>
+          <a:lstStyle/>
+          <a:p>
+            <a:pPr indent="0" marL="0">
+              <a:buNone/>
+            </a:pPr>
+            <a:r>
+              <a:rPr lang="en-US" sz="1800" b="1" dirty="0">
+                <a:solidFill>
+                  <a:srgbClr val="1F2429"/>
+                </a:solidFill>
+                <a:latin typeface="Calibri" pitchFamily="34" charset="0"/>
+                <a:ea typeface="Calibri" pitchFamily="34" charset="-122"/>
+                <a:cs typeface="Calibri" pitchFamily="34" charset="-120"/>
+              </a:rPr>
+              <a:t>Access is by key or traversal</a:t>
+            </a:r>
+            <a:endParaRPr lang="en-US" sz="1800" dirty="0"/>
+          </a:p>
+        </p:txBody>
+      </p:sp>
+      <p:sp>
+        <p:nvSpPr>
+          <p:cNvPr id="34" name="Text 32"/>
+          <p:cNvSpPr txBox="1"/>
+          <p:nvPr/>
+        </p:nvSpPr>
+        <p:spPr>
+          <a:xfrm>
+            <a:off x="6629400" y="5544556"/>
+            <a:ext cx="4800600" cy="794614"/>
+          </a:xfrm>
+          <a:prstGeom prst="rect">
+            <a:avLst/>
+          </a:prstGeom>
+          <a:noFill/>
+          <a:ln/>
+        </p:spPr>
+        <p:txBody>
+          <a:bodyPr wrap="square" rtlCol="0" anchor="t"/>
+          <a:lstStyle/>
+          <a:p>
+            <a:pPr indent="0" marL="0">
+              <a:lnSpc>
+                <a:spcPct val="110000"/>
+              </a:lnSpc>
+              <a:buNone/>
+            </a:pPr>
+            <a:r>
+              <a:rPr lang="en-US" sz="1200" dirty="0">
+                <a:solidFill>
+                  <a:srgbClr val="6B7480"/>
+                </a:solidFill>
+                <a:latin typeface="Calibri" pitchFamily="34" charset="0"/>
+                <a:ea typeface="Calibri" pitchFamily="34" charset="-122"/>
+                <a:cs typeface="Calibri" pitchFamily="34" charset="-120"/>
+              </a:rPr>
+              <a:t>Sessions, caches, social graphs, event streams</a:t>
+            </a:r>
+            <a:endParaRPr lang="en-US" sz="1200" dirty="0"/>
           </a:p>
         </p:txBody>
       </p:sp>
@@ -6283,7 +12465,7 @@
               <a:buNone/>
             </a:pPr>
             <a:r>
-              <a:rPr lang="en-US" sz="1000" u="sng" dirty="0">
+              <a:rPr lang="en-US" sz="1200" u="sng" dirty="0">
                 <a:solidFill>
                   <a:srgbClr val="8A939B"/>
                 </a:solidFill>
@@ -6304,7 +12486,7 @@
               <a:buNone/>
             </a:pPr>
             <a:r>
-              <a:rPr lang="en-US" sz="1000" dirty="0">
+              <a:rPr lang="en-US" sz="1200" dirty="0">
                 <a:solidFill>
                   <a:srgbClr val="8A939B"/>
                 </a:solidFill>
@@ -6312,9 +12494,9 @@
                 <a:ea typeface="Calibri" pitchFamily="34" charset="-122"/>
                 <a:cs typeface="Calibri" pitchFamily="34" charset="-120"/>
               </a:rPr>
-              <a:t>  ·  3</a:t>
-            </a:r>
-            <a:endParaRPr lang="en-US" sz="1000" dirty="0"/>
+              <a:t>  ·  4</a:t>
+            </a:r>
+            <a:endParaRPr lang="en-US" sz="1200" dirty="0"/>
           </a:p>
         </p:txBody>
       </p:sp>
@@ -6397,7 +12579,7 @@
               <a:buNone/>
             </a:pPr>
             <a:r>
-              <a:rPr lang="en-US" sz="1350" b="1" dirty="0">
+              <a:rPr lang="en-US" sz="1800" b="1" dirty="0">
                 <a:solidFill>
                   <a:srgbClr val="1F2429"/>
                 </a:solidFill>
@@ -6407,7 +12589,7 @@
               </a:rPr>
               <a:t>1,000 users</a:t>
             </a:r>
-            <a:endParaRPr lang="en-US" sz="1350" dirty="0"/>
+            <a:endParaRPr lang="en-US" sz="1800" dirty="0"/>
           </a:p>
         </p:txBody>
       </p:sp>
@@ -6439,7 +12621,7 @@
               <a:buNone/>
             </a:pPr>
             <a:r>
-              <a:rPr lang="en-US" sz="1050" dirty="0">
+              <a:rPr lang="en-US" sz="1200" dirty="0">
                 <a:solidFill>
                   <a:srgbClr val="6B7480"/>
                 </a:solidFill>
@@ -6449,7 +12631,7 @@
               </a:rPr>
               <a:t>A single relational server handles everything comfortably — posts, comments, likes, all cleanly normalized.</a:t>
             </a:r>
-            <a:endParaRPr lang="en-US" sz="1050" dirty="0"/>
+            <a:endParaRPr lang="en-US" sz="1200" dirty="0"/>
           </a:p>
         </p:txBody>
       </p:sp>
@@ -6532,7 +12714,7 @@
               <a:buNone/>
             </a:pPr>
             <a:r>
-              <a:rPr lang="en-US" sz="1350" b="1" dirty="0">
+              <a:rPr lang="en-US" sz="1800" b="1" dirty="0">
                 <a:solidFill>
                   <a:srgbClr val="1F2429"/>
                 </a:solidFill>
@@ -6542,7 +12724,7 @@
               </a:rPr>
               <a:t>10 million users</a:t>
             </a:r>
-            <a:endParaRPr lang="en-US" sz="1350" dirty="0"/>
+            <a:endParaRPr lang="en-US" sz="1800" dirty="0"/>
           </a:p>
         </p:txBody>
       </p:sp>
@@ -6574,7 +12756,7 @@
               <a:buNone/>
             </a:pPr>
             <a:r>
-              <a:rPr lang="en-US" sz="1050" dirty="0">
+              <a:rPr lang="en-US" sz="1200" dirty="0">
                 <a:solidFill>
                   <a:srgbClr val="6B7480"/>
                 </a:solidFill>
@@ -6584,7 +12766,7 @@
               </a:rPr>
               <a:t>Writes alone start to outpace one server's disk and CPU. Buying a bigger server (vertical scaling) has a hard ceiling.</a:t>
             </a:r>
-            <a:endParaRPr lang="en-US" sz="1050" dirty="0"/>
+            <a:endParaRPr lang="en-US" sz="1200" dirty="0"/>
           </a:p>
         </p:txBody>
       </p:sp>
@@ -6667,7 +12849,7 @@
               <a:buNone/>
             </a:pPr>
             <a:r>
-              <a:rPr lang="en-US" sz="1350" b="1" dirty="0">
+              <a:rPr lang="en-US" sz="1800" b="1" dirty="0">
                 <a:solidFill>
                   <a:srgbClr val="1F2429"/>
                 </a:solidFill>
@@ -6677,7 +12859,7 @@
               </a:rPr>
               <a:t>500 million users</a:t>
             </a:r>
-            <a:endParaRPr lang="en-US" sz="1350" dirty="0"/>
+            <a:endParaRPr lang="en-US" sz="1800" dirty="0"/>
           </a:p>
         </p:txBody>
       </p:sp>
@@ -6709,7 +12891,7 @@
               <a:buNone/>
             </a:pPr>
             <a:r>
-              <a:rPr lang="en-US" sz="1050" dirty="0">
+              <a:rPr lang="en-US" sz="1200" dirty="0">
                 <a:solidFill>
                   <a:srgbClr val="6B7480"/>
                 </a:solidFill>
@@ -6719,7 +12901,7 @@
               </a:rPr>
               <a:t>Friend-of-a-friend joins get expensive; every new post “type” means another schema migration nobody can afford to lock for long.</a:t>
             </a:r>
-            <a:endParaRPr lang="en-US" sz="1050" dirty="0"/>
+            <a:endParaRPr lang="en-US" sz="1200" dirty="0"/>
           </a:p>
         </p:txBody>
       </p:sp>
@@ -6802,7 +12984,7 @@
               <a:buNone/>
             </a:pPr>
             <a:r>
-              <a:rPr lang="en-US" sz="1050" b="1" spc="100" kern="0" dirty="0">
+              <a:rPr lang="en-US" sz="1200" b="1" spc="100" kern="0" dirty="0">
                 <a:solidFill>
                   <a:srgbClr val="8B7FD9"/>
                 </a:solidFill>
@@ -6812,7 +12994,7 @@
               </a:rPr>
               <a:t>NOT “WRONG,” JUST OPTIMIZED DIFFERENTLY</a:t>
             </a:r>
-            <a:endParaRPr lang="en-US" sz="1050" dirty="0"/>
+            <a:endParaRPr lang="en-US" sz="1200" dirty="0"/>
           </a:p>
         </p:txBody>
       </p:sp>
@@ -6993,7 +13175,7 @@
               <a:buNone/>
             </a:pPr>
             <a:r>
-              <a:rPr lang="en-US" sz="1000" u="sng" dirty="0">
+              <a:rPr lang="en-US" sz="1200" u="sng" dirty="0">
                 <a:solidFill>
                   <a:srgbClr val="8A939B"/>
                 </a:solidFill>
@@ -7014,7 +13196,7 @@
               <a:buNone/>
             </a:pPr>
             <a:r>
-              <a:rPr lang="en-US" sz="1000" dirty="0">
+              <a:rPr lang="en-US" sz="1200" dirty="0">
                 <a:solidFill>
                   <a:srgbClr val="8A939B"/>
                 </a:solidFill>
@@ -7022,9 +13204,9 @@
                 <a:ea typeface="Calibri" pitchFamily="34" charset="-122"/>
                 <a:cs typeface="Calibri" pitchFamily="34" charset="-120"/>
               </a:rPr>
-              <a:t>  ·  4</a:t>
-            </a:r>
-            <a:endParaRPr lang="en-US" sz="1000" dirty="0"/>
+              <a:t>  ·  5</a:t>
+            </a:r>
+            <a:endParaRPr lang="en-US" sz="1200" dirty="0"/>
           </a:p>
         </p:txBody>
       </p:sp>
@@ -7146,7 +13328,7 @@
               <a:buNone/>
             </a:pPr>
             <a:r>
-              <a:rPr lang="en-US" sz="1400" b="1" dirty="0">
+              <a:rPr lang="en-US" sz="1800" b="1" dirty="0">
                 <a:solidFill>
                   <a:srgbClr val="1F2429"/>
                 </a:solidFill>
@@ -7156,7 +13338,7 @@
               </a:rPr>
               <a:t>One server</a:t>
             </a:r>
-            <a:endParaRPr lang="en-US" sz="1400" dirty="0"/>
+            <a:endParaRPr lang="en-US" sz="1800" dirty="0"/>
           </a:p>
         </p:txBody>
       </p:sp>
@@ -7188,7 +13370,7 @@
               <a:buNone/>
             </a:pPr>
             <a:r>
-              <a:rPr lang="en-US" sz="1100" dirty="0">
+              <a:rPr lang="en-US" sz="1200" dirty="0">
                 <a:solidFill>
                   <a:srgbClr val="6B7480"/>
                 </a:solidFill>
@@ -7198,7 +13380,7 @@
               </a:rPr>
               <a:t>Grows by adding CPU, RAM, faster disks to the same box</a:t>
             </a:r>
-            <a:endParaRPr lang="en-US" sz="1100" dirty="0"/>
+            <a:endParaRPr lang="en-US" sz="1200" dirty="0"/>
           </a:p>
         </p:txBody>
       </p:sp>
@@ -7305,7 +13487,7 @@
               <a:buNone/>
             </a:pPr>
             <a:r>
-              <a:rPr lang="en-US" sz="1400" b="1" dirty="0">
+              <a:rPr lang="en-US" sz="1800" b="1" dirty="0">
                 <a:solidFill>
                   <a:srgbClr val="1F2429"/>
                 </a:solidFill>
@@ -7315,7 +13497,7 @@
               </a:rPr>
               <a:t>Bigger server</a:t>
             </a:r>
-            <a:endParaRPr lang="en-US" sz="1400" dirty="0"/>
+            <a:endParaRPr lang="en-US" sz="1800" dirty="0"/>
           </a:p>
         </p:txBody>
       </p:sp>
@@ -7347,7 +13529,7 @@
               <a:buNone/>
             </a:pPr>
             <a:r>
-              <a:rPr lang="en-US" sz="1100" dirty="0">
+              <a:rPr lang="en-US" sz="1200" dirty="0">
                 <a:solidFill>
                   <a:srgbClr val="6B7480"/>
                 </a:solidFill>
@@ -7357,7 +13539,7 @@
               </a:rPr>
               <a:t>Hard ceiling — cost rises much faster than capacity</a:t>
             </a:r>
-            <a:endParaRPr lang="en-US" sz="1100" dirty="0"/>
+            <a:endParaRPr lang="en-US" sz="1200" dirty="0"/>
           </a:p>
         </p:txBody>
       </p:sp>
@@ -7479,7 +13661,7 @@
               <a:buNone/>
             </a:pPr>
             <a:r>
-              <a:rPr lang="en-US" sz="1350" b="1" dirty="0">
+              <a:rPr lang="en-US" sz="1800" b="1" dirty="0">
                 <a:solidFill>
                   <a:srgbClr val="1F2429"/>
                 </a:solidFill>
@@ -7489,7 +13671,7 @@
               </a:rPr>
               <a:t>Server 1</a:t>
             </a:r>
-            <a:endParaRPr lang="en-US" sz="1350" dirty="0"/>
+            <a:endParaRPr lang="en-US" sz="1800" dirty="0"/>
           </a:p>
         </p:txBody>
       </p:sp>
@@ -7596,7 +13778,7 @@
               <a:buNone/>
             </a:pPr>
             <a:r>
-              <a:rPr lang="en-US" sz="1350" b="1" dirty="0">
+              <a:rPr lang="en-US" sz="1800" b="1" dirty="0">
                 <a:solidFill>
                   <a:srgbClr val="1F2429"/>
                 </a:solidFill>
@@ -7606,7 +13788,7 @@
               </a:rPr>
               <a:t>Server 2</a:t>
             </a:r>
-            <a:endParaRPr lang="en-US" sz="1350" dirty="0"/>
+            <a:endParaRPr lang="en-US" sz="1800" dirty="0"/>
           </a:p>
         </p:txBody>
       </p:sp>
@@ -7713,7 +13895,7 @@
               <a:buNone/>
             </a:pPr>
             <a:r>
-              <a:rPr lang="en-US" sz="1350" b="1" dirty="0">
+              <a:rPr lang="en-US" sz="1800" b="1" dirty="0">
                 <a:solidFill>
                   <a:srgbClr val="1F2429"/>
                 </a:solidFill>
@@ -7723,7 +13905,7 @@
               </a:rPr>
               <a:t>Server N</a:t>
             </a:r>
-            <a:endParaRPr lang="en-US" sz="1350" dirty="0"/>
+            <a:endParaRPr lang="en-US" sz="1800" dirty="0"/>
           </a:p>
         </p:txBody>
       </p:sp>
@@ -7755,7 +13937,7 @@
               <a:buNone/>
             </a:pPr>
             <a:r>
-              <a:rPr lang="en-US" sz="1050" dirty="0">
+              <a:rPr lang="en-US" sz="1200" dirty="0">
                 <a:solidFill>
                   <a:srgbClr val="6B7480"/>
                 </a:solidFill>
@@ -7763,9 +13945,9 @@
                 <a:ea typeface="Calibri" pitchFamily="34" charset="-122"/>
                 <a:cs typeface="Calibri" pitchFamily="34" charset="-120"/>
               </a:rPr>
-              <a:t>Add more ordinary machines as load grows</a:t>
-            </a:r>
-            <a:endParaRPr lang="en-US" sz="1050" dirty="0"/>
+              <a:t>Add more machines</a:t>
+            </a:r>
+            <a:endParaRPr lang="en-US" sz="1200" dirty="0"/>
           </a:p>
         </p:txBody>
       </p:sp>
@@ -7848,7 +14030,7 @@
               <a:buNone/>
             </a:pPr>
             <a:r>
-              <a:rPr lang="en-US" sz="1050" b="1" spc="100" kern="0" dirty="0">
+              <a:rPr lang="en-US" sz="1200" b="1" spc="100" kern="0" dirty="0">
                 <a:solidFill>
                   <a:srgbClr val="2FE6C4"/>
                 </a:solidFill>
@@ -7858,7 +14040,7 @@
               </a:rPr>
               <a:t>ADD MACHINES, NOT MUSCLE</a:t>
             </a:r>
-            <a:endParaRPr lang="en-US" sz="1050" dirty="0"/>
+            <a:endParaRPr lang="en-US" sz="1200" dirty="0"/>
           </a:p>
         </p:txBody>
       </p:sp>
@@ -8039,7 +14221,7 @@
               <a:buNone/>
             </a:pPr>
             <a:r>
-              <a:rPr lang="en-US" sz="1000" u="sng" dirty="0">
+              <a:rPr lang="en-US" sz="1200" u="sng" dirty="0">
                 <a:solidFill>
                   <a:srgbClr val="8A939B"/>
                 </a:solidFill>
@@ -8060,7 +14242,7 @@
               <a:buNone/>
             </a:pPr>
             <a:r>
-              <a:rPr lang="en-US" sz="1000" dirty="0">
+              <a:rPr lang="en-US" sz="1200" dirty="0">
                 <a:solidFill>
                   <a:srgbClr val="8A939B"/>
                 </a:solidFill>
@@ -8068,9 +14250,9 @@
                 <a:ea typeface="Calibri" pitchFamily="34" charset="-122"/>
                 <a:cs typeface="Calibri" pitchFamily="34" charset="-120"/>
               </a:rPr>
-              <a:t>  ·  5</a:t>
-            </a:r>
-            <a:endParaRPr lang="en-US" sz="1000" dirty="0"/>
+              <a:t>  ·  7</a:t>
+            </a:r>
+            <a:endParaRPr lang="en-US" sz="1200" dirty="0"/>
           </a:p>
         </p:txBody>
       </p:sp>
@@ -8153,7 +14335,7 @@
               <a:buNone/>
             </a:pPr>
             <a:r>
-              <a:rPr lang="en-US" sz="1350" b="1" dirty="0">
+              <a:rPr lang="en-US" sz="1800" b="1" dirty="0">
                 <a:solidFill>
                   <a:srgbClr val="1F2429"/>
                 </a:solidFill>
@@ -8163,7 +14345,7 @@
               </a:rPr>
               <a:t>Schema-flexible</a:t>
             </a:r>
-            <a:endParaRPr lang="en-US" sz="1350" dirty="0"/>
+            <a:endParaRPr lang="en-US" sz="1800" dirty="0"/>
           </a:p>
         </p:txBody>
       </p:sp>
@@ -8195,7 +14377,7 @@
               <a:buNone/>
             </a:pPr>
             <a:r>
-              <a:rPr lang="en-US" sz="1050" dirty="0">
+              <a:rPr lang="en-US" sz="1200" dirty="0">
                 <a:solidFill>
                   <a:srgbClr val="6B7480"/>
                 </a:solidFill>
@@ -8205,7 +14387,7 @@
               </a:rPr>
               <a:t>Records don't need to share fields; new fields added on the fly, no ALTER TABLE, no downtime.</a:t>
             </a:r>
-            <a:endParaRPr lang="en-US" sz="1050" dirty="0"/>
+            <a:endParaRPr lang="en-US" sz="1200" dirty="0"/>
           </a:p>
         </p:txBody>
       </p:sp>
@@ -8288,7 +14470,7 @@
               <a:buNone/>
             </a:pPr>
             <a:r>
-              <a:rPr lang="en-US" sz="1350" b="1" dirty="0">
+              <a:rPr lang="en-US" sz="1800" b="1" dirty="0">
                 <a:solidFill>
                   <a:srgbClr val="1F2429"/>
                 </a:solidFill>
@@ -8298,7 +14480,7 @@
               </a:rPr>
               <a:t>Horizontally scalable by design</a:t>
             </a:r>
-            <a:endParaRPr lang="en-US" sz="1350" dirty="0"/>
+            <a:endParaRPr lang="en-US" sz="1800" dirty="0"/>
           </a:p>
         </p:txBody>
       </p:sp>
@@ -8330,7 +14512,7 @@
               <a:buNone/>
             </a:pPr>
             <a:r>
-              <a:rPr lang="en-US" sz="1050" dirty="0">
+              <a:rPr lang="en-US" sz="1200" dirty="0">
                 <a:solidFill>
                   <a:srgbClr val="6B7480"/>
                 </a:solidFill>
@@ -8340,7 +14522,7 @@
               </a:rPr>
               <a:t>Built to spread data and load across many ordinary servers, not one powerful one.</a:t>
             </a:r>
-            <a:endParaRPr lang="en-US" sz="1050" dirty="0"/>
+            <a:endParaRPr lang="en-US" sz="1200" dirty="0"/>
           </a:p>
         </p:txBody>
       </p:sp>
@@ -8423,7 +14605,7 @@
               <a:buNone/>
             </a:pPr>
             <a:r>
-              <a:rPr lang="en-US" sz="1350" b="1" dirty="0">
+              <a:rPr lang="en-US" sz="1800" b="1" dirty="0">
                 <a:solidFill>
                   <a:srgbClr val="1F2429"/>
                 </a:solidFill>
@@ -8433,7 +14615,7 @@
               </a:rPr>
               <a:t>Often eventually consistent</a:t>
             </a:r>
-            <a:endParaRPr lang="en-US" sz="1350" dirty="0"/>
+            <a:endParaRPr lang="en-US" sz="1800" dirty="0"/>
           </a:p>
         </p:txBody>
       </p:sp>
@@ -8465,7 +14647,7 @@
               <a:buNone/>
             </a:pPr>
             <a:r>
-              <a:rPr lang="en-US" sz="1050" dirty="0">
+              <a:rPr lang="en-US" sz="1200" dirty="0">
                 <a:solidFill>
                   <a:srgbClr val="6B7480"/>
                 </a:solidFill>
@@ -8475,7 +14657,7 @@
               </a:rPr>
               <a:t>Many relax strict consistency for availability and speed — the BASE model instead of relational ACID.</a:t>
             </a:r>
-            <a:endParaRPr lang="en-US" sz="1050" dirty="0"/>
+            <a:endParaRPr lang="en-US" sz="1200" dirty="0"/>
           </a:p>
         </p:txBody>
       </p:sp>
@@ -8558,7 +14740,7 @@
               <a:buNone/>
             </a:pPr>
             <a:r>
-              <a:rPr lang="en-US" sz="1350" b="1" dirty="0">
+              <a:rPr lang="en-US" sz="1800" b="1" dirty="0">
                 <a:solidFill>
                   <a:srgbClr val="1F2429"/>
                 </a:solidFill>
@@ -8568,7 +14750,7 @@
               </a:rPr>
               <a:t>Optimized for specific access patterns</a:t>
             </a:r>
-            <a:endParaRPr lang="en-US" sz="1350" dirty="0"/>
+            <a:endParaRPr lang="en-US" sz="1800" dirty="0"/>
           </a:p>
         </p:txBody>
       </p:sp>
@@ -8600,7 +14782,7 @@
               <a:buNone/>
             </a:pPr>
             <a:r>
-              <a:rPr lang="en-US" sz="1050" dirty="0">
+              <a:rPr lang="en-US" sz="1200" dirty="0">
                 <a:solidFill>
                   <a:srgbClr val="6B7480"/>
                 </a:solidFill>
@@ -8610,7 +14792,7 @@
               </a:rPr>
               <a:t>Each family is built around the handful of operations it needs to be extremely fast at.</a:t>
             </a:r>
-            <a:endParaRPr lang="en-US" sz="1050" dirty="0"/>
+            <a:endParaRPr lang="en-US" sz="1200" dirty="0"/>
           </a:p>
         </p:txBody>
       </p:sp>
@@ -8749,7 +14931,7 @@
               <a:buNone/>
             </a:pPr>
             <a:r>
-              <a:rPr lang="en-US" sz="1000" u="sng" dirty="0">
+              <a:rPr lang="en-US" sz="1200" u="sng" dirty="0">
                 <a:solidFill>
                   <a:srgbClr val="8A939B"/>
                 </a:solidFill>
@@ -8770,7 +14952,7 @@
               <a:buNone/>
             </a:pPr>
             <a:r>
-              <a:rPr lang="en-US" sz="1000" dirty="0">
+              <a:rPr lang="en-US" sz="1200" dirty="0">
                 <a:solidFill>
                   <a:srgbClr val="8A939B"/>
                 </a:solidFill>
@@ -8778,9 +14960,9 @@
                 <a:ea typeface="Calibri" pitchFamily="34" charset="-122"/>
                 <a:cs typeface="Calibri" pitchFamily="34" charset="-120"/>
               </a:rPr>
-              <a:t>  ·  6</a:t>
-            </a:r>
-            <a:endParaRPr lang="en-US" sz="1000" dirty="0"/>
+              <a:t>  ·  8</a:t>
+            </a:r>
+            <a:endParaRPr lang="en-US" sz="1200" dirty="0"/>
           </a:p>
         </p:txBody>
       </p:sp>
@@ -8821,7 +15003,7 @@
                         <a:buNone/>
                       </a:pPr>
                       <a:r>
-                        <a:rPr lang="en-US" sz="1200" b="1" dirty="0">
+                        <a:rPr lang="en-US" sz="1400" b="1" dirty="0">
                           <a:solidFill>
                             <a:srgbClr val="FFFFFF"/>
                           </a:solidFill>
@@ -8831,7 +15013,7 @@
                         </a:rPr>
                         <a:t>Dimension</a:t>
                       </a:r>
-                      <a:endParaRPr lang="en-US" sz="1200" dirty="0">
+                      <a:endParaRPr lang="en-US" sz="1400" dirty="0">
                         <a:latin typeface="Calibri" charset="0"/>
                         <a:ea typeface="Calibri" charset="0"/>
                         <a:cs typeface="Calibri" charset="0"/>
@@ -8889,7 +15071,7 @@
                         <a:buNone/>
                       </a:pPr>
                       <a:r>
-                        <a:rPr lang="en-US" sz="1200" b="1" dirty="0">
+                        <a:rPr lang="en-US" sz="1400" b="1" dirty="0">
                           <a:solidFill>
                             <a:srgbClr val="FFFFFF"/>
                           </a:solidFill>
@@ -8899,7 +15081,7 @@
                         </a:rPr>
                         <a:t>Relational (SQL)</a:t>
                       </a:r>
-                      <a:endParaRPr lang="en-US" sz="1200" dirty="0">
+                      <a:endParaRPr lang="en-US" sz="1400" dirty="0">
                         <a:latin typeface="Calibri" charset="0"/>
                         <a:ea typeface="Calibri" charset="0"/>
                         <a:cs typeface="Calibri" charset="0"/>
@@ -8957,7 +15139,7 @@
                         <a:buNone/>
                       </a:pPr>
                       <a:r>
-                        <a:rPr lang="en-US" sz="1200" b="1" dirty="0">
+                        <a:rPr lang="en-US" sz="1400" b="1" dirty="0">
                           <a:solidFill>
                             <a:srgbClr val="FFFFFF"/>
                           </a:solidFill>
@@ -8967,7 +15149,7 @@
                         </a:rPr>
                         <a:t>NoSQL</a:t>
                       </a:r>
-                      <a:endParaRPr lang="en-US" sz="1200" dirty="0">
+                      <a:endParaRPr lang="en-US" sz="1400" dirty="0">
                         <a:latin typeface="Calibri" charset="0"/>
                         <a:ea typeface="Calibri" charset="0"/>
                         <a:cs typeface="Calibri" charset="0"/>
@@ -9027,7 +15209,7 @@
                         <a:buNone/>
                       </a:pPr>
                       <a:r>
-                        <a:rPr lang="en-US" sz="1200" dirty="0">
+                        <a:rPr lang="en-US" sz="1400" dirty="0">
                           <a:solidFill>
                             <a:srgbClr val="1F2429"/>
                           </a:solidFill>
@@ -9037,7 +15219,7 @@
                         </a:rPr>
                         <a:t>Schema flexibility</a:t>
                       </a:r>
-                      <a:endParaRPr lang="en-US" sz="1200" dirty="0">
+                      <a:endParaRPr lang="en-US" sz="1400" dirty="0">
                         <a:latin typeface="Calibri" charset="0"/>
                         <a:ea typeface="Calibri" charset="0"/>
                         <a:cs typeface="Calibri" charset="0"/>
@@ -9095,7 +15277,7 @@
                         <a:buNone/>
                       </a:pPr>
                       <a:r>
-                        <a:rPr lang="en-US" sz="1200" dirty="0">
+                        <a:rPr lang="en-US" sz="1400" dirty="0">
                           <a:solidFill>
                             <a:srgbClr val="1F2429"/>
                           </a:solidFill>
@@ -9105,7 +15287,7 @@
                         </a:rPr>
                         <a:t>Fixed, defined in advance; changes need ALTER TABLE</a:t>
                       </a:r>
-                      <a:endParaRPr lang="en-US" sz="1200" dirty="0">
+                      <a:endParaRPr lang="en-US" sz="1400" dirty="0">
                         <a:latin typeface="Calibri" charset="0"/>
                         <a:ea typeface="Calibri" charset="0"/>
                         <a:cs typeface="Calibri" charset="0"/>
@@ -9163,7 +15345,7 @@
                         <a:buNone/>
                       </a:pPr>
                       <a:r>
-                        <a:rPr lang="en-US" sz="1200" dirty="0">
+                        <a:rPr lang="en-US" sz="1400" dirty="0">
                           <a:solidFill>
                             <a:srgbClr val="1F2429"/>
                           </a:solidFill>
@@ -9173,7 +15355,7 @@
                         </a:rPr>
                         <a:t>Flexible or absent; documents/records can differ in shape</a:t>
                       </a:r>
-                      <a:endParaRPr lang="en-US" sz="1200" dirty="0">
+                      <a:endParaRPr lang="en-US" sz="1400" dirty="0">
                         <a:latin typeface="Calibri" charset="0"/>
                         <a:ea typeface="Calibri" charset="0"/>
                         <a:cs typeface="Calibri" charset="0"/>
@@ -9233,7 +15415,7 @@
                         <a:buNone/>
                       </a:pPr>
                       <a:r>
-                        <a:rPr lang="en-US" sz="1200" dirty="0">
+                        <a:rPr lang="en-US" sz="1400" dirty="0">
                           <a:solidFill>
                             <a:srgbClr val="1F2429"/>
                           </a:solidFill>
@@ -9243,7 +15425,7 @@
                         </a:rPr>
                         <a:t>Scaling model</a:t>
                       </a:r>
-                      <a:endParaRPr lang="en-US" sz="1200" dirty="0">
+                      <a:endParaRPr lang="en-US" sz="1400" dirty="0">
                         <a:latin typeface="Calibri" charset="0"/>
                         <a:ea typeface="Calibri" charset="0"/>
                         <a:cs typeface="Calibri" charset="0"/>
@@ -9301,7 +15483,7 @@
                         <a:buNone/>
                       </a:pPr>
                       <a:r>
-                        <a:rPr lang="en-US" sz="1200" dirty="0">
+                        <a:rPr lang="en-US" sz="1400" dirty="0">
                           <a:solidFill>
                             <a:srgbClr val="1F2429"/>
                           </a:solidFill>
@@ -9311,7 +15493,7 @@
                         </a:rPr>
                         <a:t>Primarily vertical; horizontal scaling is possible but hard</a:t>
                       </a:r>
-                      <a:endParaRPr lang="en-US" sz="1200" dirty="0">
+                      <a:endParaRPr lang="en-US" sz="1400" dirty="0">
                         <a:latin typeface="Calibri" charset="0"/>
                         <a:ea typeface="Calibri" charset="0"/>
                         <a:cs typeface="Calibri" charset="0"/>
@@ -9369,7 +15551,7 @@
                         <a:buNone/>
                       </a:pPr>
                       <a:r>
-                        <a:rPr lang="en-US" sz="1200" dirty="0">
+                        <a:rPr lang="en-US" sz="1400" dirty="0">
                           <a:solidFill>
                             <a:srgbClr val="1F2429"/>
                           </a:solidFill>
@@ -9379,7 +15561,7 @@
                         </a:rPr>
                         <a:t>Horizontal by default (add more servers)</a:t>
                       </a:r>
-                      <a:endParaRPr lang="en-US" sz="1200" dirty="0">
+                      <a:endParaRPr lang="en-US" sz="1400" dirty="0">
                         <a:latin typeface="Calibri" charset="0"/>
                         <a:ea typeface="Calibri" charset="0"/>
                         <a:cs typeface="Calibri" charset="0"/>
@@ -9439,7 +15621,7 @@
                         <a:buNone/>
                       </a:pPr>
                       <a:r>
-                        <a:rPr lang="en-US" sz="1200" dirty="0">
+                        <a:rPr lang="en-US" sz="1400" dirty="0">
                           <a:solidFill>
                             <a:srgbClr val="1F2429"/>
                           </a:solidFill>
@@ -9449,7 +15631,7 @@
                         </a:rPr>
                         <a:t>Consistency model</a:t>
                       </a:r>
-                      <a:endParaRPr lang="en-US" sz="1200" dirty="0">
+                      <a:endParaRPr lang="en-US" sz="1400" dirty="0">
                         <a:latin typeface="Calibri" charset="0"/>
                         <a:ea typeface="Calibri" charset="0"/>
                         <a:cs typeface="Calibri" charset="0"/>
@@ -9507,7 +15689,7 @@
                         <a:buNone/>
                       </a:pPr>
                       <a:r>
-                        <a:rPr lang="en-US" sz="1200" dirty="0">
+                        <a:rPr lang="en-US" sz="1400" dirty="0">
                           <a:solidFill>
                             <a:srgbClr val="1F2429"/>
                           </a:solidFill>
@@ -9517,7 +15699,7 @@
                         </a:rPr>
                         <a:t>Strong consistency, ACID transactions</a:t>
                       </a:r>
-                      <a:endParaRPr lang="en-US" sz="1200" dirty="0">
+                      <a:endParaRPr lang="en-US" sz="1400" dirty="0">
                         <a:latin typeface="Calibri" charset="0"/>
                         <a:ea typeface="Calibri" charset="0"/>
                         <a:cs typeface="Calibri" charset="0"/>
@@ -9575,7 +15757,7 @@
                         <a:buNone/>
                       </a:pPr>
                       <a:r>
-                        <a:rPr lang="en-US" sz="1200" dirty="0">
+                        <a:rPr lang="en-US" sz="1400" dirty="0">
                           <a:solidFill>
                             <a:srgbClr val="1F2429"/>
                           </a:solidFill>
@@ -9585,7 +15767,7 @@
                         </a:rPr>
                         <a:t>Often eventual consistency, BASE model (varies by product)</a:t>
                       </a:r>
-                      <a:endParaRPr lang="en-US" sz="1200" dirty="0">
+                      <a:endParaRPr lang="en-US" sz="1400" dirty="0">
                         <a:latin typeface="Calibri" charset="0"/>
                         <a:ea typeface="Calibri" charset="0"/>
                         <a:cs typeface="Calibri" charset="0"/>
@@ -9645,7 +15827,7 @@
                         <a:buNone/>
                       </a:pPr>
                       <a:r>
-                        <a:rPr lang="en-US" sz="1200" dirty="0">
+                        <a:rPr lang="en-US" sz="1400" dirty="0">
                           <a:solidFill>
                             <a:srgbClr val="1F2429"/>
                           </a:solidFill>
@@ -9655,7 +15837,7 @@
                         </a:rPr>
                         <a:t>Query language</a:t>
                       </a:r>
-                      <a:endParaRPr lang="en-US" sz="1200" dirty="0">
+                      <a:endParaRPr lang="en-US" sz="1400" dirty="0">
                         <a:latin typeface="Calibri" charset="0"/>
                         <a:ea typeface="Calibri" charset="0"/>
                         <a:cs typeface="Calibri" charset="0"/>
@@ -9713,7 +15895,7 @@
                         <a:buNone/>
                       </a:pPr>
                       <a:r>
-                        <a:rPr lang="en-US" sz="1200" dirty="0">
+                        <a:rPr lang="en-US" sz="1400" dirty="0">
                           <a:solidFill>
                             <a:srgbClr val="1F2429"/>
                           </a:solidFill>
@@ -9723,7 +15905,7 @@
                         </a:rPr>
                         <a:t>SQL — standardized across vendors</a:t>
                       </a:r>
-                      <a:endParaRPr lang="en-US" sz="1200" dirty="0">
+                      <a:endParaRPr lang="en-US" sz="1400" dirty="0">
                         <a:latin typeface="Calibri" charset="0"/>
                         <a:ea typeface="Calibri" charset="0"/>
                         <a:cs typeface="Calibri" charset="0"/>
@@ -9781,7 +15963,7 @@
                         <a:buNone/>
                       </a:pPr>
                       <a:r>
-                        <a:rPr lang="en-US" sz="1200" dirty="0">
+                        <a:rPr lang="en-US" sz="1400" dirty="0">
                           <a:solidFill>
                             <a:srgbClr val="1F2429"/>
                           </a:solidFill>
@@ -9791,7 +15973,7 @@
                         </a:rPr>
                         <a:t>Varies per product (MongoDB API, CQL, Gremlin, …)</a:t>
                       </a:r>
-                      <a:endParaRPr lang="en-US" sz="1200" dirty="0">
+                      <a:endParaRPr lang="en-US" sz="1400" dirty="0">
                         <a:latin typeface="Calibri" charset="0"/>
                         <a:ea typeface="Calibri" charset="0"/>
                         <a:cs typeface="Calibri" charset="0"/>
@@ -9851,7 +16033,7 @@
                         <a:buNone/>
                       </a:pPr>
                       <a:r>
-                        <a:rPr lang="en-US" sz="1200" dirty="0">
+                        <a:rPr lang="en-US" sz="1400" dirty="0">
                           <a:solidFill>
                             <a:srgbClr val="1F2429"/>
                           </a:solidFill>
@@ -9861,7 +16043,7 @@
                         </a:rPr>
                         <a:t>Typical use case</a:t>
                       </a:r>
-                      <a:endParaRPr lang="en-US" sz="1200" dirty="0">
+                      <a:endParaRPr lang="en-US" sz="1400" dirty="0">
                         <a:latin typeface="Calibri" charset="0"/>
                         <a:ea typeface="Calibri" charset="0"/>
                         <a:cs typeface="Calibri" charset="0"/>
@@ -9919,7 +16101,7 @@
                         <a:buNone/>
                       </a:pPr>
                       <a:r>
-                        <a:rPr lang="en-US" sz="1200" dirty="0">
+                        <a:rPr lang="en-US" sz="1400" dirty="0">
                           <a:solidFill>
                             <a:srgbClr val="1F2429"/>
                           </a:solidFill>
@@ -9929,7 +16111,7 @@
                         </a:rPr>
                         <a:t>Banking, ERP — strict integrity, complex joins</a:t>
                       </a:r>
-                      <a:endParaRPr lang="en-US" sz="1200" dirty="0">
+                      <a:endParaRPr lang="en-US" sz="1400" dirty="0">
                         <a:latin typeface="Calibri" charset="0"/>
                         <a:ea typeface="Calibri" charset="0"/>
                         <a:cs typeface="Calibri" charset="0"/>
@@ -9987,7 +16169,7 @@
                         <a:buNone/>
                       </a:pPr>
                       <a:r>
-                        <a:rPr lang="en-US" sz="1200" dirty="0">
+                        <a:rPr lang="en-US" sz="1400" dirty="0">
                           <a:solidFill>
                             <a:srgbClr val="1F2429"/>
                           </a:solidFill>
@@ -9997,7 +16179,7 @@
                         </a:rPr>
                         <a:t>Content mgmt, catalogs, real-time analytics, social graphs</a:t>
                       </a:r>
-                      <a:endParaRPr lang="en-US" sz="1200" dirty="0">
+                      <a:endParaRPr lang="en-US" sz="1400" dirty="0">
                         <a:latin typeface="Calibri" charset="0"/>
                         <a:ea typeface="Calibri" charset="0"/>
                         <a:cs typeface="Calibri" charset="0"/>
@@ -10130,7 +16312,7 @@
               <a:buNone/>
             </a:pPr>
             <a:r>
-              <a:rPr lang="en-US" sz="1050" b="1" spc="100" kern="0" dirty="0">
+              <a:rPr lang="en-US" sz="1200" b="1" spc="100" kern="0" dirty="0">
                 <a:solidFill>
                   <a:srgbClr val="8B7FD9"/>
                 </a:solidFill>
@@ -10140,7 +16322,7 @@
               </a:rPr>
               <a:t>A SPECTRUM, NOT A STRICT LINE</a:t>
             </a:r>
-            <a:endParaRPr lang="en-US" sz="1050" dirty="0"/>
+            <a:endParaRPr lang="en-US" sz="1200" dirty="0"/>
           </a:p>
         </p:txBody>
       </p:sp>
@@ -10321,7 +16503,7 @@
               <a:buNone/>
             </a:pPr>
             <a:r>
-              <a:rPr lang="en-US" sz="1000" u="sng" dirty="0">
+              <a:rPr lang="en-US" sz="1200" u="sng" dirty="0">
                 <a:solidFill>
                   <a:srgbClr val="8A939B"/>
                 </a:solidFill>
@@ -10342,7 +16524,7 @@
               <a:buNone/>
             </a:pPr>
             <a:r>
-              <a:rPr lang="en-US" sz="1000" dirty="0">
+              <a:rPr lang="en-US" sz="1200" dirty="0">
                 <a:solidFill>
                   <a:srgbClr val="8A939B"/>
                 </a:solidFill>
@@ -10350,9 +16532,9 @@
                 <a:ea typeface="Calibri" pitchFamily="34" charset="-122"/>
                 <a:cs typeface="Calibri" pitchFamily="34" charset="-120"/>
               </a:rPr>
-              <a:t>  ·  7</a:t>
-            </a:r>
-            <a:endParaRPr lang="en-US" sz="1000" dirty="0"/>
+              <a:t>  ·  9</a:t>
+            </a:r>
+            <a:endParaRPr lang="en-US" sz="1200" dirty="0"/>
           </a:p>
         </p:txBody>
       </p:sp>
@@ -10435,7 +16617,7 @@
               <a:buNone/>
             </a:pPr>
             <a:r>
-              <a:rPr lang="en-US" sz="1350" b="1" dirty="0">
+              <a:rPr lang="en-US" sz="1800" b="1" dirty="0">
                 <a:solidFill>
                   <a:srgbClr val="1F2429"/>
                 </a:solidFill>
@@ -10445,7 +16627,7 @@
               </a:rPr>
               <a:t>Document Store — MongoDB</a:t>
             </a:r>
-            <a:endParaRPr lang="en-US" sz="1350" dirty="0"/>
+            <a:endParaRPr lang="en-US" sz="1800" dirty="0"/>
           </a:p>
         </p:txBody>
       </p:sp>
@@ -10477,7 +16659,7 @@
               <a:buNone/>
             </a:pPr>
             <a:r>
-              <a:rPr lang="en-US" sz="1050" dirty="0">
+              <a:rPr lang="en-US" sz="1200" dirty="0">
                 <a:solidFill>
                   <a:srgbClr val="6B7480"/>
                 </a:solidFill>
@@ -10487,7 +16669,7 @@
               </a:rPr>
               <a:t>Stores self-contained, JSON-like documents grouped into collections. Each document can have its own shape.</a:t>
             </a:r>
-            <a:endParaRPr lang="en-US" sz="1050" dirty="0"/>
+            <a:endParaRPr lang="en-US" sz="1200" dirty="0"/>
           </a:p>
         </p:txBody>
       </p:sp>
@@ -10570,7 +16752,7 @@
               <a:buNone/>
             </a:pPr>
             <a:r>
-              <a:rPr lang="en-US" sz="1350" b="1" dirty="0">
+              <a:rPr lang="en-US" sz="1800" b="1" dirty="0">
                 <a:solidFill>
                   <a:srgbClr val="1F2429"/>
                 </a:solidFill>
@@ -10580,7 +16762,7 @@
               </a:rPr>
               <a:t>Key-Value Store — DynamoDB / Redis</a:t>
             </a:r>
-            <a:endParaRPr lang="en-US" sz="1350" dirty="0"/>
+            <a:endParaRPr lang="en-US" sz="1800" dirty="0"/>
           </a:p>
         </p:txBody>
       </p:sp>
@@ -10612,7 +16794,7 @@
               <a:buNone/>
             </a:pPr>
             <a:r>
-              <a:rPr lang="en-US" sz="1050" dirty="0">
+              <a:rPr lang="en-US" sz="1200" dirty="0">
                 <a:solidFill>
                   <a:srgbClr val="6B7480"/>
                 </a:solidFill>
@@ -10622,7 +16804,7 @@
               </a:rPr>
               <a:t>Stores an opaque value against a unique key — extremely fast lookups, minimal querying beyond “get this key.”</a:t>
             </a:r>
-            <a:endParaRPr lang="en-US" sz="1050" dirty="0"/>
+            <a:endParaRPr lang="en-US" sz="1200" dirty="0"/>
           </a:p>
         </p:txBody>
       </p:sp>
@@ -10705,7 +16887,7 @@
               <a:buNone/>
             </a:pPr>
             <a:r>
-              <a:rPr lang="en-US" sz="1350" b="1" dirty="0">
+              <a:rPr lang="en-US" sz="1800" b="1" dirty="0">
                 <a:solidFill>
                   <a:srgbClr val="1F2429"/>
                 </a:solidFill>
@@ -10715,7 +16897,7 @@
               </a:rPr>
               <a:t>Column-Family Store — Cassandra</a:t>
             </a:r>
-            <a:endParaRPr lang="en-US" sz="1350" dirty="0"/>
+            <a:endParaRPr lang="en-US" sz="1800" dirty="0"/>
           </a:p>
         </p:txBody>
       </p:sp>
@@ -10747,7 +16929,7 @@
               <a:buNone/>
             </a:pPr>
             <a:r>
-              <a:rPr lang="en-US" sz="1050" dirty="0">
+              <a:rPr lang="en-US" sz="1200" dirty="0">
                 <a:solidFill>
                   <a:srgbClr val="6B7480"/>
                 </a:solidFill>
@@ -10757,7 +16939,7 @@
               </a:rPr>
               <a:t>Stores data in wide rows grouped by column families, tuned for very high write throughput across many nodes.</a:t>
             </a:r>
-            <a:endParaRPr lang="en-US" sz="1050" dirty="0"/>
+            <a:endParaRPr lang="en-US" sz="1200" dirty="0"/>
           </a:p>
         </p:txBody>
       </p:sp>
@@ -10840,7 +17022,7 @@
               <a:buNone/>
             </a:pPr>
             <a:r>
-              <a:rPr lang="en-US" sz="1350" b="1" dirty="0">
+              <a:rPr lang="en-US" sz="1800" b="1" dirty="0">
                 <a:solidFill>
                   <a:srgbClr val="1F2429"/>
                 </a:solidFill>
@@ -10850,7 +17032,7 @@
               </a:rPr>
               <a:t>Graph Database — Neo4j</a:t>
             </a:r>
-            <a:endParaRPr lang="en-US" sz="1350" dirty="0"/>
+            <a:endParaRPr lang="en-US" sz="1800" dirty="0"/>
           </a:p>
         </p:txBody>
       </p:sp>
@@ -10882,7 +17064,7 @@
               <a:buNone/>
             </a:pPr>
             <a:r>
-              <a:rPr lang="en-US" sz="1050" dirty="0">
+              <a:rPr lang="en-US" sz="1200" dirty="0">
                 <a:solidFill>
                   <a:srgbClr val="6B7480"/>
                 </a:solidFill>
@@ -10892,7 +17074,7 @@
               </a:rPr>
               <a:t>Stores nodes and the relationships between them, purpose-built for traversal queries like “friends of friends.”</a:t>
             </a:r>
-            <a:endParaRPr lang="en-US" sz="1050" dirty="0"/>
+            <a:endParaRPr lang="en-US" sz="1200" dirty="0"/>
           </a:p>
         </p:txBody>
       </p:sp>
@@ -11031,7 +17213,7 @@
               <a:buNone/>
             </a:pPr>
             <a:r>
-              <a:rPr lang="en-US" sz="1000" u="sng" dirty="0">
+              <a:rPr lang="en-US" sz="1200" u="sng" dirty="0">
                 <a:solidFill>
                   <a:srgbClr val="8A939B"/>
                 </a:solidFill>
@@ -11052,7 +17234,7 @@
               <a:buNone/>
             </a:pPr>
             <a:r>
-              <a:rPr lang="en-US" sz="1000" dirty="0">
+              <a:rPr lang="en-US" sz="1200" dirty="0">
                 <a:solidFill>
                   <a:srgbClr val="8A939B"/>
                 </a:solidFill>
@@ -11060,9 +17242,9 @@
                 <a:ea typeface="Calibri" pitchFamily="34" charset="-122"/>
                 <a:cs typeface="Calibri" pitchFamily="34" charset="-120"/>
               </a:rPr>
-              <a:t>  ·  8</a:t>
-            </a:r>
-            <a:endParaRPr lang="en-US" sz="1000" dirty="0"/>
+              <a:t>  ·  11</a:t>
+            </a:r>
+            <a:endParaRPr lang="en-US" sz="1200" dirty="0"/>
           </a:p>
         </p:txBody>
       </p:sp>
@@ -11103,7 +17285,7 @@
                         <a:buNone/>
                       </a:pPr>
                       <a:r>
-                        <a:rPr lang="en-US" sz="1250" b="1" dirty="0">
+                        <a:rPr lang="en-US" sz="1400" b="1" dirty="0">
                           <a:solidFill>
                             <a:srgbClr val="FFFFFF"/>
                           </a:solidFill>
@@ -11113,7 +17295,7 @@
                         </a:rPr>
                         <a:t>Model</a:t>
                       </a:r>
-                      <a:endParaRPr lang="en-US" sz="1250" dirty="0">
+                      <a:endParaRPr lang="en-US" sz="1400" dirty="0">
                         <a:latin typeface="Calibri" charset="0"/>
                         <a:ea typeface="Calibri" charset="0"/>
                         <a:cs typeface="Calibri" charset="0"/>
@@ -11171,7 +17353,7 @@
                         <a:buNone/>
                       </a:pPr>
                       <a:r>
-                        <a:rPr lang="en-US" sz="1250" b="1" dirty="0">
+                        <a:rPr lang="en-US" sz="1400" b="1" dirty="0">
                           <a:solidFill>
                             <a:srgbClr val="FFFFFF"/>
                           </a:solidFill>
@@ -11181,7 +17363,7 @@
                         </a:rPr>
                         <a:t>How data is organized</a:t>
                       </a:r>
-                      <a:endParaRPr lang="en-US" sz="1250" dirty="0">
+                      <a:endParaRPr lang="en-US" sz="1400" dirty="0">
                         <a:latin typeface="Calibri" charset="0"/>
                         <a:ea typeface="Calibri" charset="0"/>
                         <a:cs typeface="Calibri" charset="0"/>
@@ -11239,7 +17421,7 @@
                         <a:buNone/>
                       </a:pPr>
                       <a:r>
-                        <a:rPr lang="en-US" sz="1250" b="1" dirty="0">
+                        <a:rPr lang="en-US" sz="1400" b="1" dirty="0">
                           <a:solidFill>
                             <a:srgbClr val="FFFFFF"/>
                           </a:solidFill>
@@ -11249,7 +17431,7 @@
                         </a:rPr>
                         <a:t>Example subject</a:t>
                       </a:r>
-                      <a:endParaRPr lang="en-US" sz="1250" dirty="0">
+                      <a:endParaRPr lang="en-US" sz="1400" dirty="0">
                         <a:latin typeface="Calibri" charset="0"/>
                         <a:ea typeface="Calibri" charset="0"/>
                         <a:cs typeface="Calibri" charset="0"/>
@@ -11309,7 +17491,7 @@
                         <a:buNone/>
                       </a:pPr>
                       <a:r>
-                        <a:rPr lang="en-US" sz="1250" dirty="0">
+                        <a:rPr lang="en-US" sz="1400" dirty="0">
                           <a:solidFill>
                             <a:srgbClr val="1F2429"/>
                           </a:solidFill>
@@ -11319,7 +17501,7 @@
                         </a:rPr>
                         <a:t>Document</a:t>
                       </a:r>
-                      <a:endParaRPr lang="en-US" sz="1250" dirty="0">
+                      <a:endParaRPr lang="en-US" sz="1400" dirty="0">
                         <a:latin typeface="Calibri" charset="0"/>
                         <a:ea typeface="Calibri" charset="0"/>
                         <a:cs typeface="Calibri" charset="0"/>
@@ -11377,7 +17559,7 @@
                         <a:buNone/>
                       </a:pPr>
                       <a:r>
-                        <a:rPr lang="en-US" sz="1250" dirty="0">
+                        <a:rPr lang="en-US" sz="1400" dirty="0">
                           <a:solidFill>
                             <a:srgbClr val="1F2429"/>
                           </a:solidFill>
@@ -11387,7 +17569,7 @@
                         </a:rPr>
                         <a:t>Self-contained, nested, JSON-like structure per record</a:t>
                       </a:r>
-                      <a:endParaRPr lang="en-US" sz="1250" dirty="0">
+                      <a:endParaRPr lang="en-US" sz="1400" dirty="0">
                         <a:latin typeface="Calibri" charset="0"/>
                         <a:ea typeface="Calibri" charset="0"/>
                         <a:cs typeface="Calibri" charset="0"/>
@@ -11445,7 +17627,7 @@
                         <a:buNone/>
                       </a:pPr>
                       <a:r>
-                        <a:rPr lang="en-US" sz="1250" dirty="0">
+                        <a:rPr lang="en-US" sz="1400" dirty="0">
                           <a:solidFill>
                             <a:srgbClr val="1F2429"/>
                           </a:solidFill>
@@ -11455,7 +17637,7 @@
                         </a:rPr>
                         <a:t>MongoDB BSON documents (Lecture 27)</a:t>
                       </a:r>
-                      <a:endParaRPr lang="en-US" sz="1250" dirty="0">
+                      <a:endParaRPr lang="en-US" sz="1400" dirty="0">
                         <a:latin typeface="Calibri" charset="0"/>
                         <a:ea typeface="Calibri" charset="0"/>
                         <a:cs typeface="Calibri" charset="0"/>
@@ -11515,7 +17697,7 @@
                         <a:buNone/>
                       </a:pPr>
                       <a:r>
-                        <a:rPr lang="en-US" sz="1250" dirty="0">
+                        <a:rPr lang="en-US" sz="1400" dirty="0">
                           <a:solidFill>
                             <a:srgbClr val="1F2429"/>
                           </a:solidFill>
@@ -11525,7 +17707,7 @@
                         </a:rPr>
                         <a:t>Key-value</a:t>
                       </a:r>
-                      <a:endParaRPr lang="en-US" sz="1250" dirty="0">
+                      <a:endParaRPr lang="en-US" sz="1400" dirty="0">
                         <a:latin typeface="Calibri" charset="0"/>
                         <a:ea typeface="Calibri" charset="0"/>
                         <a:cs typeface="Calibri" charset="0"/>
@@ -11583,7 +17765,7 @@
                         <a:buNone/>
                       </a:pPr>
                       <a:r>
-                        <a:rPr lang="en-US" sz="1250" dirty="0">
+                        <a:rPr lang="en-US" sz="1400" dirty="0">
                           <a:solidFill>
                             <a:srgbClr val="1F2429"/>
                           </a:solidFill>
@@ -11593,7 +17775,7 @@
                         </a:rPr>
                         <a:t>An opaque value retrieved only by its exact key</a:t>
                       </a:r>
-                      <a:endParaRPr lang="en-US" sz="1250" dirty="0">
+                      <a:endParaRPr lang="en-US" sz="1400" dirty="0">
                         <a:latin typeface="Calibri" charset="0"/>
                         <a:ea typeface="Calibri" charset="0"/>
                         <a:cs typeface="Calibri" charset="0"/>
@@ -11651,7 +17833,7 @@
                         <a:buNone/>
                       </a:pPr>
                       <a:r>
-                        <a:rPr lang="en-US" sz="1250" dirty="0">
+                        <a:rPr lang="en-US" sz="1400" dirty="0">
                           <a:solidFill>
                             <a:srgbClr val="1F2429"/>
                           </a:solidFill>
@@ -11661,7 +17843,7 @@
                         </a:rPr>
                         <a:t>Redis, DynamoDB</a:t>
                       </a:r>
-                      <a:endParaRPr lang="en-US" sz="1250" dirty="0">
+                      <a:endParaRPr lang="en-US" sz="1400" dirty="0">
                         <a:latin typeface="Calibri" charset="0"/>
                         <a:ea typeface="Calibri" charset="0"/>
                         <a:cs typeface="Calibri" charset="0"/>
@@ -11721,7 +17903,7 @@
                         <a:buNone/>
                       </a:pPr>
                       <a:r>
-                        <a:rPr lang="en-US" sz="1250" dirty="0">
+                        <a:rPr lang="en-US" sz="1400" dirty="0">
                           <a:solidFill>
                             <a:srgbClr val="1F2429"/>
                           </a:solidFill>
@@ -11731,7 +17913,7 @@
                         </a:rPr>
                         <a:t>Column-family</a:t>
                       </a:r>
-                      <a:endParaRPr lang="en-US" sz="1250" dirty="0">
+                      <a:endParaRPr lang="en-US" sz="1400" dirty="0">
                         <a:latin typeface="Calibri" charset="0"/>
                         <a:ea typeface="Calibri" charset="0"/>
                         <a:cs typeface="Calibri" charset="0"/>
@@ -11789,7 +17971,7 @@
                         <a:buNone/>
                       </a:pPr>
                       <a:r>
-                        <a:rPr lang="en-US" sz="1250" dirty="0">
+                        <a:rPr lang="en-US" sz="1400" dirty="0">
                           <a:solidFill>
                             <a:srgbClr val="1F2429"/>
                           </a:solidFill>
@@ -11799,7 +17981,7 @@
                         </a:rPr>
                         <a:t>Rows keyed by ID; columns grouped into families that vary row to row</a:t>
                       </a:r>
-                      <a:endParaRPr lang="en-US" sz="1250" dirty="0">
+                      <a:endParaRPr lang="en-US" sz="1400" dirty="0">
                         <a:latin typeface="Calibri" charset="0"/>
                         <a:ea typeface="Calibri" charset="0"/>
                         <a:cs typeface="Calibri" charset="0"/>
@@ -11857,7 +18039,7 @@
                         <a:buNone/>
                       </a:pPr>
                       <a:r>
-                        <a:rPr lang="en-US" sz="1250" dirty="0">
+                        <a:rPr lang="en-US" sz="1400" dirty="0">
                           <a:solidFill>
                             <a:srgbClr val="1F2429"/>
                           </a:solidFill>
@@ -11867,7 +18049,7 @@
                         </a:rPr>
                         <a:t>Apache Cassandra</a:t>
                       </a:r>
-                      <a:endParaRPr lang="en-US" sz="1250" dirty="0">
+                      <a:endParaRPr lang="en-US" sz="1400" dirty="0">
                         <a:latin typeface="Calibri" charset="0"/>
                         <a:ea typeface="Calibri" charset="0"/>
                         <a:cs typeface="Calibri" charset="0"/>
@@ -11927,7 +18109,7 @@
                         <a:buNone/>
                       </a:pPr>
                       <a:r>
-                        <a:rPr lang="en-US" sz="1250" dirty="0">
+                        <a:rPr lang="en-US" sz="1400" dirty="0">
                           <a:solidFill>
                             <a:srgbClr val="1F2429"/>
                           </a:solidFill>
@@ -11937,7 +18119,7 @@
                         </a:rPr>
                         <a:t>Graph</a:t>
                       </a:r>
-                      <a:endParaRPr lang="en-US" sz="1250" dirty="0">
+                      <a:endParaRPr lang="en-US" sz="1400" dirty="0">
                         <a:latin typeface="Calibri" charset="0"/>
                         <a:ea typeface="Calibri" charset="0"/>
                         <a:cs typeface="Calibri" charset="0"/>
@@ -11995,7 +18177,7 @@
                         <a:buNone/>
                       </a:pPr>
                       <a:r>
-                        <a:rPr lang="en-US" sz="1250" dirty="0">
+                        <a:rPr lang="en-US" sz="1400" dirty="0">
                           <a:solidFill>
                             <a:srgbClr val="1F2429"/>
                           </a:solidFill>
@@ -12005,7 +18187,7 @@
                         </a:rPr>
                         <a:t>Data modeled explicitly as nodes and edges; traversal is the primitive operation</a:t>
                       </a:r>
-                      <a:endParaRPr lang="en-US" sz="1250" dirty="0">
+                      <a:endParaRPr lang="en-US" sz="1400" dirty="0">
                         <a:latin typeface="Calibri" charset="0"/>
                         <a:ea typeface="Calibri" charset="0"/>
                         <a:cs typeface="Calibri" charset="0"/>
@@ -12063,7 +18245,7 @@
                         <a:buNone/>
                       </a:pPr>
                       <a:r>
-                        <a:rPr lang="en-US" sz="1250" dirty="0">
+                        <a:rPr lang="en-US" sz="1400" dirty="0">
                           <a:solidFill>
                             <a:srgbClr val="1F2429"/>
                           </a:solidFill>
@@ -12073,7 +18255,7 @@
                         </a:rPr>
                         <a:t>Neo4j</a:t>
                       </a:r>
-                      <a:endParaRPr lang="en-US" sz="1250" dirty="0">
+                      <a:endParaRPr lang="en-US" sz="1400" dirty="0">
                         <a:latin typeface="Calibri" charset="0"/>
                         <a:ea typeface="Calibri" charset="0"/>
                         <a:cs typeface="Calibri" charset="0"/>
@@ -12206,7 +18388,7 @@
               <a:buNone/>
             </a:pPr>
             <a:r>
-              <a:rPr lang="en-US" sz="1050" b="1" spc="100" kern="0" dirty="0">
+              <a:rPr lang="en-US" sz="1200" b="1" spc="100" kern="0" dirty="0">
                 <a:solidFill>
                   <a:srgbClr val="2FE6C4"/>
                 </a:solidFill>
@@ -12216,7 +18398,7 @@
               </a:rPr>
               <a:t>SAME IDEA, DIFFERENT SHAPE</a:t>
             </a:r>
-            <a:endParaRPr lang="en-US" sz="1050" dirty="0"/>
+            <a:endParaRPr lang="en-US" sz="1200" dirty="0"/>
           </a:p>
         </p:txBody>
       </p:sp>
@@ -12397,7 +18579,7 @@
               <a:buNone/>
             </a:pPr>
             <a:r>
-              <a:rPr lang="en-US" sz="1000" u="sng" dirty="0">
+              <a:rPr lang="en-US" sz="1200" u="sng" dirty="0">
                 <a:solidFill>
                   <a:srgbClr val="8A939B"/>
                 </a:solidFill>
@@ -12418,7 +18600,7 @@
               <a:buNone/>
             </a:pPr>
             <a:r>
-              <a:rPr lang="en-US" sz="1000" dirty="0">
+              <a:rPr lang="en-US" sz="1200" dirty="0">
                 <a:solidFill>
                   <a:srgbClr val="8A939B"/>
                 </a:solidFill>
@@ -12426,9 +18608,9 @@
                 <a:ea typeface="Calibri" pitchFamily="34" charset="-122"/>
                 <a:cs typeface="Calibri" pitchFamily="34" charset="-120"/>
               </a:rPr>
-              <a:t>  ·  9</a:t>
-            </a:r>
-            <a:endParaRPr lang="en-US" sz="1000" dirty="0"/>
+              <a:t>  ·  12</a:t>
+            </a:r>
+            <a:endParaRPr lang="en-US" sz="1200" dirty="0"/>
           </a:p>
         </p:txBody>
       </p:sp>
@@ -12550,7 +18732,7 @@
               <a:buNone/>
             </a:pPr>
             <a:r>
-              <a:rPr lang="en-US" sz="1400" b="1" dirty="0">
+              <a:rPr lang="en-US" sz="1800" b="1" dirty="0">
                 <a:solidFill>
                   <a:srgbClr val="1F2429"/>
                 </a:solidFill>
@@ -12560,7 +18742,7 @@
               </a:rPr>
               <a:t>Scales horizontally</a:t>
             </a:r>
-            <a:endParaRPr lang="en-US" sz="1400" dirty="0"/>
+            <a:endParaRPr lang="en-US" sz="1800" dirty="0"/>
           </a:p>
         </p:txBody>
       </p:sp>
@@ -12592,7 +18774,7 @@
               <a:buNone/>
             </a:pPr>
             <a:r>
-              <a:rPr lang="en-US" sz="1100" dirty="0">
+              <a:rPr lang="en-US" sz="1200" dirty="0">
                 <a:solidFill>
                   <a:srgbClr val="6B7480"/>
                 </a:solidFill>
@@ -12602,7 +18784,7 @@
               </a:rPr>
               <a:t>Add commodity servers instead of a bigger one</a:t>
             </a:r>
-            <a:endParaRPr lang="en-US" sz="1100" dirty="0"/>
+            <a:endParaRPr lang="en-US" sz="1200" dirty="0"/>
           </a:p>
         </p:txBody>
       </p:sp>
@@ -12709,7 +18891,7 @@
               <a:buNone/>
             </a:pPr>
             <a:r>
-              <a:rPr lang="en-US" sz="1400" b="1" dirty="0">
+              <a:rPr lang="en-US" sz="1800" b="1" dirty="0">
                 <a:solidFill>
                   <a:srgbClr val="1F2429"/>
                 </a:solidFill>
@@ -12719,7 +18901,7 @@
               </a:rPr>
               <a:t>Flexible schema</a:t>
             </a:r>
-            <a:endParaRPr lang="en-US" sz="1400" dirty="0"/>
+            <a:endParaRPr lang="en-US" sz="1800" dirty="0"/>
           </a:p>
         </p:txBody>
       </p:sp>
@@ -12751,7 +18933,7 @@
               <a:buNone/>
             </a:pPr>
             <a:r>
-              <a:rPr lang="en-US" sz="1100" dirty="0">
+              <a:rPr lang="en-US" sz="1200" dirty="0">
                 <a:solidFill>
                   <a:srgbClr val="6B7480"/>
                 </a:solidFill>
@@ -12761,7 +18943,7 @@
               </a:rPr>
               <a:t>Iterate on the data model without migrations</a:t>
             </a:r>
-            <a:endParaRPr lang="en-US" sz="1100" dirty="0"/>
+            <a:endParaRPr lang="en-US" sz="1200" dirty="0"/>
           </a:p>
         </p:txBody>
       </p:sp>
@@ -12868,7 +19050,7 @@
               <a:buNone/>
             </a:pPr>
             <a:r>
-              <a:rPr lang="en-US" sz="1400" b="1" dirty="0">
+              <a:rPr lang="en-US" sz="1800" b="1" dirty="0">
                 <a:solidFill>
                   <a:srgbClr val="1F2429"/>
                 </a:solidFill>
@@ -12878,7 +19060,7 @@
               </a:rPr>
               <a:t>Fast for its access pattern</a:t>
             </a:r>
-            <a:endParaRPr lang="en-US" sz="1400" dirty="0"/>
+            <a:endParaRPr lang="en-US" sz="1800" dirty="0"/>
           </a:p>
         </p:txBody>
       </p:sp>
@@ -12910,7 +19092,7 @@
               <a:buNone/>
             </a:pPr>
             <a:r>
-              <a:rPr lang="en-US" sz="1100" dirty="0">
+              <a:rPr lang="en-US" sz="1200" dirty="0">
                 <a:solidFill>
                   <a:srgbClr val="6B7480"/>
                 </a:solidFill>
@@ -12920,7 +19102,7 @@
               </a:rPr>
               <a:t>Purpose-built for the operations it targets</a:t>
             </a:r>
-            <a:endParaRPr lang="en-US" sz="1100" dirty="0"/>
+            <a:endParaRPr lang="en-US" sz="1200" dirty="0"/>
           </a:p>
         </p:txBody>
       </p:sp>
@@ -13042,7 +19224,7 @@
               <a:buNone/>
             </a:pPr>
             <a:r>
-              <a:rPr lang="en-US" sz="1400" b="1" dirty="0">
+              <a:rPr lang="en-US" sz="1800" b="1" dirty="0">
                 <a:solidFill>
                   <a:srgbClr val="1F2429"/>
                 </a:solidFill>
@@ -13052,7 +19234,7 @@
               </a:rPr>
               <a:t>Weaker consistency guarantees</a:t>
             </a:r>
-            <a:endParaRPr lang="en-US" sz="1400" dirty="0"/>
+            <a:endParaRPr lang="en-US" sz="1800" dirty="0"/>
           </a:p>
         </p:txBody>
       </p:sp>
@@ -13084,7 +19266,7 @@
               <a:buNone/>
             </a:pPr>
             <a:r>
-              <a:rPr lang="en-US" sz="1100" dirty="0">
+              <a:rPr lang="en-US" sz="1200" dirty="0">
                 <a:solidFill>
                   <a:srgbClr val="6B7480"/>
                 </a:solidFill>
@@ -13094,7 +19276,7 @@
               </a:rPr>
               <a:t>Eventual consistency can surprise developers used to ACID</a:t>
             </a:r>
-            <a:endParaRPr lang="en-US" sz="1100" dirty="0"/>
+            <a:endParaRPr lang="en-US" sz="1200" dirty="0"/>
           </a:p>
         </p:txBody>
       </p:sp>
@@ -13201,7 +19383,7 @@
               <a:buNone/>
             </a:pPr>
             <a:r>
-              <a:rPr lang="en-US" sz="1400" b="1" dirty="0">
+              <a:rPr lang="en-US" sz="1800" b="1" dirty="0">
                 <a:solidFill>
                   <a:srgbClr val="1F2429"/>
                 </a:solidFill>
@@ -13211,7 +19393,7 @@
               </a:rPr>
               <a:t>No standard query language</a:t>
             </a:r>
-            <a:endParaRPr lang="en-US" sz="1400" dirty="0"/>
+            <a:endParaRPr lang="en-US" sz="1800" dirty="0"/>
           </a:p>
         </p:txBody>
       </p:sp>
@@ -13243,7 +19425,7 @@
               <a:buNone/>
             </a:pPr>
             <a:r>
-              <a:rPr lang="en-US" sz="1100" dirty="0">
+              <a:rPr lang="en-US" sz="1200" dirty="0">
                 <a:solidFill>
                   <a:srgbClr val="6B7480"/>
                 </a:solidFill>
@@ -13253,7 +19435,7 @@
               </a:rPr>
               <a:t>Skills and tooling don't transfer between products like SQL does</a:t>
             </a:r>
-            <a:endParaRPr lang="en-US" sz="1100" dirty="0"/>
+            <a:endParaRPr lang="en-US" sz="1200" dirty="0"/>
           </a:p>
         </p:txBody>
       </p:sp>
@@ -13360,7 +19542,7 @@
               <a:buNone/>
             </a:pPr>
             <a:r>
-              <a:rPr lang="en-US" sz="1400" b="1" dirty="0">
+              <a:rPr lang="en-US" sz="1800" b="1" dirty="0">
                 <a:solidFill>
                   <a:srgbClr val="1F2429"/>
                 </a:solidFill>
@@ -13370,7 +19552,7 @@
               </a:rPr>
               <a:t>Weaker or absent joins</a:t>
             </a:r>
-            <a:endParaRPr lang="en-US" sz="1400" dirty="0"/>
+            <a:endParaRPr lang="en-US" sz="1800" dirty="0"/>
           </a:p>
         </p:txBody>
       </p:sp>
@@ -13402,7 +19584,7 @@
               <a:buNone/>
             </a:pPr>
             <a:r>
-              <a:rPr lang="en-US" sz="1100" dirty="0">
+              <a:rPr lang="en-US" sz="1200" dirty="0">
                 <a:solidFill>
                   <a:srgbClr val="6B7480"/>
                 </a:solidFill>
@@ -13412,7 +19594,7 @@
               </a:rPr>
               <a:t>Multi-collection/table relationships are harder to query in one step</a:t>
             </a:r>
-            <a:endParaRPr lang="en-US" sz="1100" dirty="0"/>
+            <a:endParaRPr lang="en-US" sz="1200" dirty="0"/>
           </a:p>
         </p:txBody>
       </p:sp>
